--- a/docs/QI_경진대회_발표_애플.pptx
+++ b/docs/QI_경진대회_발표_애플.pptx
@@ -867,9 +867,11 @@
           <a:p>
             <a:r>
               <a:rPr lang="en-US" dirty="0"/>
-              <a:t>- 연결: "가장 먼저, 무엇으로 개선을 판단할지 정했습니다."
-- 행정시간은 실제 교육 시간 제외 — 작성 · 서명 · 취합 · 결재만
-- 다음 장 연결: "재 보니, 먼저 누락과 종이였습니다." (20초)</a:t>
+              <a:t>- 연결: "먼저 현황을 조사했습니다. 첫째, 누락과 종이였습니다."
+- "교육 106건 중 18건이 기록 없이 지나갔습니다. 바쁜 달의 문제가 아니라 12개월 중 8개월에서 반복됐습니다."
+- "모든 기록이 종이에 있으니, 누가 아직 안 했는지 볼 방법이 없었습니다."
+- (입사 규모와 누락률 상관 0.03 — 질문 대비)
+- 다음 장 연결: "둘째, 시간이었습니다." (30초)</a:t>
             </a:r>
             <a:endParaRPr lang="en-US" dirty="0"/>
           </a:p>
@@ -957,11 +959,10 @@
           <a:p>
             <a:r>
               <a:rPr lang="en-US" dirty="0"/>
-              <a:t>- 연결: "재 보니, 먼저 누락과 종이였습니다."
-- "교육 106건 중 18건이 기록 없이 지나갔습니다. 바쁜 달의 문제가 아니라 12개월 중 8개월에서 반복됐습니다."
-- "모든 기록이 종이에 있으니, 누가 아직 안 했는지 볼 방법이 없었습니다."
-- (입사 규모와 누락률 상관 0.03 — 질문 대비)
-- 다음 장 연결: "그리고 시간이었습니다." (30초)</a:t>
+              <a:t>- 연결: "둘째, 시간이었습니다."
+- "교육 1건에 33분 48초. 그중 57%는 결재를 기다린 시간, 21%는 보건관리실까지 걸어온 시간입니다."
+- "이 두 단계는 노력으로 줄일 수 없고, 체계를 바꿔야만 없어집니다 — 그래서 목표를 70%로 잡았습니다."
+- 다음 장 연결: "이 결과를 기준값으로 지표와 목표를 정했습니다." (25초)</a:t>
             </a:r>
             <a:endParaRPr lang="en-US" dirty="0"/>
           </a:p>
@@ -1049,10 +1050,10 @@
           <a:p>
             <a:r>
               <a:rPr lang="en-US" dirty="0"/>
-              <a:t>- 연결: "그리고 시간이었습니다."
-- "교육 1건에 33분 48초. 그중 57%는 결재를 기다린 시간, 21%는 보건관리실까지 걸어온 시간입니다."
-- "이 두 단계는 노력으로 줄일 수 없고, 체계를 바꿔야만 없어집니다 — 그래서 목표를 70%로 잡았습니다."
-- 다음 장 연결: "왜 이렇게 됐는지 원인을 따라가 봤습니다." (25초)</a:t>
+              <a:t>- 연결: "이 결과를 기준값으로 지표와 목표를 정했습니다."
+- 행정시간은 실제 교육 시간 제외 — 작성 · 서명 · 취합 · 결재만
+- 목표 70% 근거: 기다림과 이동만 없애도 78%
+- 다음 장 연결: "그렇다면 왜 이렇게 됐는지, 원인을 따라가 봤습니다." (20초)</a:t>
             </a:r>
             <a:endParaRPr lang="en-US" dirty="0"/>
           </a:p>
@@ -2523,7 +2524,7 @@
                 <a:ea typeface="Noto Sans KR" pitchFamily="34" charset="-122"/>
                 <a:cs typeface="Noto Sans KR" pitchFamily="34" charset="-120"/>
               </a:rPr>
-              <a:t>지표 정의 · 자료수집</a:t>
+              <a:t>현황 분석</a:t>
             </a:r>
             <a:endParaRPr lang="en-US" sz="1500" dirty="0"/>
           </a:p>
@@ -2543,7 +2544,7 @@
                 <a:ea typeface="Noto Sans KR" pitchFamily="34" charset="-122"/>
                 <a:cs typeface="Noto Sans KR" pitchFamily="34" charset="-120"/>
               </a:rPr>
-              <a:t>현황 분석</a:t>
+              <a:t>지표 설정 · 목표</a:t>
             </a:r>
             <a:endParaRPr lang="en-US" sz="1500" dirty="0"/>
           </a:p>
@@ -6781,7 +6782,7 @@
                 <a:ea typeface="Noto Sans KR" pitchFamily="34" charset="-122"/>
                 <a:cs typeface="Noto Sans KR" pitchFamily="34" charset="-120"/>
               </a:rPr>
-              <a:t>PLAN · 지표 정의 · 자료수집</a:t>
+              <a:t>PLAN · 현황 분석 ①</a:t>
             </a:r>
             <a:endParaRPr lang="en-US" sz="1000" dirty="0"/>
           </a:p>
@@ -6996,7 +6997,7 @@
                 <a:ea typeface="Noto Sans KR" pitchFamily="34" charset="-122"/>
                 <a:cs typeface="Noto Sans KR" pitchFamily="34" charset="-120"/>
               </a:rPr>
-              <a:t>4개 지표를 정하고, 전수조사와 시간 실측으로 측정했다</a:t>
+              <a:t>모든 기록이 종이에 있어, 교육 6건 중 1건이 누락됐다</a:t>
             </a:r>
             <a:endParaRPr lang="en-US" sz="2800" dirty="0"/>
           </a:p>
@@ -7035,7 +7036,7 @@
                 <a:ea typeface="Noto Sans KR" pitchFamily="34" charset="-122"/>
                 <a:cs typeface="Noto Sans KR" pitchFamily="34" charset="-120"/>
               </a:rPr>
-              <a:t>무엇으로 개선을 판단할지 먼저 정했습니다</a:t>
+              <a:t>2025년 1–12월 신규 입사자 106명 교육일지 대조 전수조사</a:t>
             </a:r>
             <a:endParaRPr lang="en-US" sz="1500" dirty="0"/>
           </a:p>
@@ -7128,11 +7129,11 @@
         <p:spPr>
           <a:xfrm>
             <a:off x="609600" y="1600200"/>
-            <a:ext cx="5391150" cy="1181100"/>
+            <a:ext cx="7086600" cy="4648200"/>
           </a:xfrm>
           <a:prstGeom prst="roundRect">
             <a:avLst>
-              <a:gd name="adj" fmla="val 16129"/>
+              <a:gd name="adj" fmla="val 4098"/>
             </a:avLst>
           </a:prstGeom>
           <a:solidFill>
@@ -7149,32 +7150,71 @@
         </p:nvSpPr>
         <p:spPr>
           <a:xfrm>
-            <a:off x="876300" y="1790700"/>
-            <a:ext cx="1905000" cy="171450"/>
-          </a:xfrm>
-          <a:prstGeom prst="rect">
-            <a:avLst/>
-          </a:prstGeom>
-          <a:noFill/>
-          <a:ln/>
-        </p:spPr>
-        <p:txBody>
-          <a:bodyPr wrap="square" lIns="0" tIns="0" rIns="0" bIns="0" rtlCol="0" anchor="t"/>
-          <a:lstStyle/>
-          <a:p>
-            <a:pPr indent="0" marL="0">
+            <a:off x="914400" y="1828800"/>
+            <a:ext cx="3810000" cy="209550"/>
+          </a:xfrm>
+          <a:prstGeom prst="rect">
+            <a:avLst/>
+          </a:prstGeom>
+          <a:noFill/>
+          <a:ln/>
+        </p:spPr>
+        <p:txBody>
+          <a:bodyPr wrap="square" lIns="0" tIns="0" rIns="0" bIns="0" rtlCol="0" anchor="t"/>
+          <a:lstStyle/>
+          <a:p>
+            <a:pPr indent="0" marL="0">
+              <a:buNone/>
+            </a:pPr>
+            <a:r>
+              <a:rPr lang="en-US" sz="1500" b="1" dirty="0">
+                <a:solidFill>
+                  <a:srgbClr val="1D1D1F"/>
+                </a:solidFill>
+                <a:latin typeface="Noto Sans KR" pitchFamily="34" charset="0"/>
+                <a:ea typeface="Noto Sans KR" pitchFamily="34" charset="-122"/>
+                <a:cs typeface="Noto Sans KR" pitchFamily="34" charset="-120"/>
+              </a:rPr>
+              <a:t>월별 법정교육 이행률</a:t>
+            </a:r>
+            <a:endParaRPr lang="en-US" sz="1500" dirty="0"/>
+          </a:p>
+        </p:txBody>
+      </p:sp>
+      <p:sp>
+        <p:nvSpPr>
+          <p:cNvPr id="14" name="o155"/>
+          <p:cNvSpPr txBox="1"/>
+          <p:nvPr/>
+        </p:nvSpPr>
+        <p:spPr>
+          <a:xfrm>
+            <a:off x="4762500" y="1847850"/>
+            <a:ext cx="2667000" cy="190500"/>
+          </a:xfrm>
+          <a:prstGeom prst="rect">
+            <a:avLst/>
+          </a:prstGeom>
+          <a:noFill/>
+          <a:ln/>
+        </p:spPr>
+        <p:txBody>
+          <a:bodyPr wrap="square" lIns="0" tIns="0" rIns="0" bIns="0" rtlCol="0" anchor="t"/>
+          <a:lstStyle/>
+          <a:p>
+            <a:pPr algn="r" indent="0" marL="0">
               <a:buNone/>
             </a:pPr>
             <a:r>
               <a:rPr lang="en-US" sz="1100" b="1" dirty="0">
                 <a:solidFill>
-                  <a:srgbClr val="0A1F44"/>
-                </a:solidFill>
-                <a:latin typeface="Noto Sans KR" pitchFamily="34" charset="0"/>
-                <a:ea typeface="Noto Sans KR" pitchFamily="34" charset="-122"/>
-                <a:cs typeface="Noto Sans KR" pitchFamily="34" charset="-120"/>
-              </a:rPr>
-              <a:t>과정지표</a:t>
+                  <a:srgbClr val="B33F00"/>
+                </a:solidFill>
+                <a:latin typeface="Noto Sans KR" pitchFamily="34" charset="0"/>
+                <a:ea typeface="Noto Sans KR" pitchFamily="34" charset="-122"/>
+                <a:cs typeface="Noto Sans KR" pitchFamily="34" charset="-120"/>
+              </a:rPr>
+              <a:t>주황 = 누락이 있었던 달</a:t>
             </a:r>
             <a:endParaRPr lang="en-US" sz="1100" dirty="0"/>
           </a:p>
@@ -7182,14 +7222,37 @@
       </p:sp>
       <p:sp>
         <p:nvSpPr>
-          <p:cNvPr id="14" name="o155"/>
-          <p:cNvSpPr txBox="1"/>
-          <p:nvPr/>
-        </p:nvSpPr>
-        <p:spPr>
-          <a:xfrm>
-            <a:off x="4781550" y="1790700"/>
-            <a:ext cx="952500" cy="171450"/>
+          <p:cNvPr id="15" name="o156"/>
+          <p:cNvSpPr/>
+          <p:nvPr/>
+        </p:nvSpPr>
+        <p:spPr>
+          <a:xfrm>
+            <a:off x="1333500" y="5581650"/>
+            <a:ext cx="6096000" cy="0"/>
+          </a:xfrm>
+          <a:prstGeom prst="line">
+            <a:avLst/>
+          </a:prstGeom>
+          <a:noFill/>
+          <a:ln w="9525">
+            <a:solidFill>
+              <a:srgbClr val="E5E5EA"/>
+            </a:solidFill>
+            <a:prstDash val="solid"/>
+          </a:ln>
+        </p:spPr>
+      </p:sp>
+      <p:sp>
+        <p:nvSpPr>
+          <p:cNvPr id="16" name="o157"/>
+          <p:cNvSpPr txBox="1"/>
+          <p:nvPr/>
+        </p:nvSpPr>
+        <p:spPr>
+          <a:xfrm>
+            <a:off x="914400" y="5505450"/>
+            <a:ext cx="342900" cy="152400"/>
           </a:xfrm>
           <a:prstGeom prst="rect">
             <a:avLst/>
@@ -7205,7 +7268,7 @@
               <a:buNone/>
             </a:pPr>
             <a:r>
-              <a:rPr lang="en-US" sz="1000" dirty="0">
+              <a:rPr lang="en-US" sz="900" dirty="0">
                 <a:solidFill>
                   <a:srgbClr val="636366"/>
                 </a:solidFill>
@@ -7213,165 +7276,71 @@
                 <a:ea typeface="Inter" pitchFamily="34" charset="-122"/>
                 <a:cs typeface="Inter" pitchFamily="34" charset="-120"/>
               </a:rPr>
-              <a:t>현황 06</a:t>
-            </a:r>
-            <a:endParaRPr lang="en-US" sz="1000" dirty="0"/>
-          </a:p>
-        </p:txBody>
-      </p:sp>
-      <p:sp>
-        <p:nvSpPr>
-          <p:cNvPr id="15" name="o156"/>
-          <p:cNvSpPr txBox="1"/>
-          <p:nvPr/>
-        </p:nvSpPr>
-        <p:spPr>
-          <a:xfrm>
-            <a:off x="876300" y="2000250"/>
-            <a:ext cx="3429000" cy="285750"/>
-          </a:xfrm>
-          <a:prstGeom prst="rect">
-            <a:avLst/>
-          </a:prstGeom>
-          <a:noFill/>
-          <a:ln/>
-        </p:spPr>
-        <p:txBody>
-          <a:bodyPr wrap="square" lIns="0" tIns="0" rIns="0" bIns="0" rtlCol="0" anchor="t"/>
-          <a:lstStyle/>
-          <a:p>
-            <a:pPr indent="0" marL="0">
-              <a:buNone/>
-            </a:pPr>
-            <a:r>
-              <a:rPr lang="en-US" sz="1900" b="1" dirty="0">
-                <a:solidFill>
-                  <a:srgbClr val="1D1D1F"/>
-                </a:solidFill>
-                <a:latin typeface="Noto Sans KR" pitchFamily="34" charset="0"/>
-                <a:ea typeface="Noto Sans KR" pitchFamily="34" charset="-122"/>
-                <a:cs typeface="Noto Sans KR" pitchFamily="34" charset="-120"/>
-              </a:rPr>
-              <a:t>법정 의무교육 준수율</a:t>
-            </a:r>
-            <a:endParaRPr lang="en-US" sz="1900" dirty="0"/>
-          </a:p>
-        </p:txBody>
-      </p:sp>
-      <p:sp>
-        <p:nvSpPr>
-          <p:cNvPr id="16" name="o157"/>
-          <p:cNvSpPr txBox="1"/>
-          <p:nvPr/>
-        </p:nvSpPr>
-        <p:spPr>
-          <a:xfrm>
-            <a:off x="876300" y="2362200"/>
-            <a:ext cx="3429000" cy="190500"/>
-          </a:xfrm>
-          <a:prstGeom prst="rect">
-            <a:avLst/>
-          </a:prstGeom>
-          <a:noFill/>
-          <a:ln/>
-        </p:spPr>
-        <p:txBody>
-          <a:bodyPr wrap="square" lIns="0" tIns="0" rIns="0" bIns="0" rtlCol="0" anchor="t"/>
-          <a:lstStyle/>
-          <a:p>
-            <a:pPr indent="0" marL="0">
-              <a:buNone/>
-            </a:pPr>
-            <a:r>
-              <a:rPr lang="en-US" sz="1200" dirty="0">
+              <a:t>0%</a:t>
+            </a:r>
+            <a:endParaRPr lang="en-US" sz="900" dirty="0"/>
+          </a:p>
+        </p:txBody>
+      </p:sp>
+      <p:sp>
+        <p:nvSpPr>
+          <p:cNvPr id="17" name="o158"/>
+          <p:cNvSpPr/>
+          <p:nvPr/>
+        </p:nvSpPr>
+        <p:spPr>
+          <a:xfrm>
+            <a:off x="1333500" y="4152900"/>
+            <a:ext cx="6096000" cy="0"/>
+          </a:xfrm>
+          <a:prstGeom prst="line">
+            <a:avLst/>
+          </a:prstGeom>
+          <a:noFill/>
+          <a:ln w="9525">
+            <a:solidFill>
+              <a:srgbClr val="E5E5EA"/>
+            </a:solidFill>
+            <a:prstDash val="solid"/>
+          </a:ln>
+        </p:spPr>
+      </p:sp>
+      <p:sp>
+        <p:nvSpPr>
+          <p:cNvPr id="18" name="o159"/>
+          <p:cNvSpPr txBox="1"/>
+          <p:nvPr/>
+        </p:nvSpPr>
+        <p:spPr>
+          <a:xfrm>
+            <a:off x="914400" y="4076700"/>
+            <a:ext cx="342900" cy="152400"/>
+          </a:xfrm>
+          <a:prstGeom prst="rect">
+            <a:avLst/>
+          </a:prstGeom>
+          <a:noFill/>
+          <a:ln/>
+        </p:spPr>
+        <p:txBody>
+          <a:bodyPr wrap="square" lIns="0" tIns="0" rIns="0" bIns="0" rtlCol="0" anchor="t"/>
+          <a:lstStyle/>
+          <a:p>
+            <a:pPr algn="r" indent="0" marL="0">
+              <a:buNone/>
+            </a:pPr>
+            <a:r>
+              <a:rPr lang="en-US" sz="900" dirty="0">
                 <a:solidFill>
                   <a:srgbClr val="636366"/>
-                </a:solidFill>
-                <a:latin typeface="Noto Sans KR" pitchFamily="34" charset="0"/>
-                <a:ea typeface="Noto Sans KR" pitchFamily="34" charset="-122"/>
-                <a:cs typeface="Noto Sans KR" pitchFamily="34" charset="-120"/>
-              </a:rPr>
-              <a:t>기한 내 이행 완료 ÷ 법정 교육 대상</a:t>
-            </a:r>
-            <a:endParaRPr lang="en-US" sz="1200" dirty="0"/>
-          </a:p>
-        </p:txBody>
-      </p:sp>
-      <p:sp>
-        <p:nvSpPr>
-          <p:cNvPr id="17" name="o158"/>
-          <p:cNvSpPr txBox="1"/>
-          <p:nvPr/>
-        </p:nvSpPr>
-        <p:spPr>
-          <a:xfrm>
-            <a:off x="4400550" y="2057400"/>
-            <a:ext cx="1333500" cy="152400"/>
-          </a:xfrm>
-          <a:prstGeom prst="rect">
-            <a:avLst/>
-          </a:prstGeom>
-          <a:noFill/>
-          <a:ln/>
-        </p:spPr>
-        <p:txBody>
-          <a:bodyPr wrap="square" lIns="0" tIns="0" rIns="0" bIns="0" rtlCol="0" anchor="t"/>
-          <a:lstStyle/>
-          <a:p>
-            <a:pPr algn="r" indent="0" marL="0">
-              <a:buNone/>
-            </a:pPr>
-            <a:r>
-              <a:rPr lang="en-US" sz="1100" dirty="0">
-                <a:solidFill>
-                  <a:srgbClr val="636366"/>
-                </a:solidFill>
-                <a:latin typeface="Noto Sans KR" pitchFamily="34" charset="0"/>
-                <a:ea typeface="Noto Sans KR" pitchFamily="34" charset="-122"/>
-                <a:cs typeface="Noto Sans KR" pitchFamily="34" charset="-120"/>
-              </a:rPr>
-              <a:t>목표</a:t>
-            </a:r>
-            <a:endParaRPr lang="en-US" sz="1100" dirty="0"/>
-          </a:p>
-        </p:txBody>
-      </p:sp>
-      <p:sp>
-        <p:nvSpPr>
-          <p:cNvPr id="18" name="o159"/>
-          <p:cNvSpPr txBox="1"/>
-          <p:nvPr/>
-        </p:nvSpPr>
-        <p:spPr>
-          <a:xfrm>
-            <a:off x="3829050" y="2228850"/>
-            <a:ext cx="1905000" cy="381000"/>
-          </a:xfrm>
-          <a:prstGeom prst="rect">
-            <a:avLst/>
-          </a:prstGeom>
-          <a:noFill/>
-          <a:ln/>
-        </p:spPr>
-        <p:txBody>
-          <a:bodyPr wrap="square" lIns="0" tIns="0" rIns="0" bIns="0" rtlCol="0" anchor="t"/>
-          <a:lstStyle/>
-          <a:p>
-            <a:pPr algn="r" indent="0" marL="0">
-              <a:buNone/>
-            </a:pPr>
-            <a:r>
-              <a:rPr lang="en-US" sz="2600" b="1" dirty="0">
-                <a:solidFill>
-                  <a:srgbClr val="0A1F44"/>
                 </a:solidFill>
                 <a:latin typeface="Inter" pitchFamily="34" charset="0"/>
                 <a:ea typeface="Inter" pitchFamily="34" charset="-122"/>
                 <a:cs typeface="Inter" pitchFamily="34" charset="-120"/>
               </a:rPr>
-              <a:t>100%</a:t>
-            </a:r>
-            <a:endParaRPr lang="en-US" sz="2600" dirty="0"/>
+              <a:t>50%</a:t>
+            </a:r>
+            <a:endParaRPr lang="en-US" sz="900" dirty="0"/>
           </a:p>
         </p:txBody>
       </p:sp>
@@ -7383,12 +7352,1219 @@
         </p:nvSpPr>
         <p:spPr>
           <a:xfrm>
-            <a:off x="6191250" y="1600200"/>
-            <a:ext cx="5391150" cy="1181100"/>
+            <a:off x="1333500" y="2724150"/>
+            <a:ext cx="6096000" cy="0"/>
+          </a:xfrm>
+          <a:prstGeom prst="line">
+            <a:avLst/>
+          </a:prstGeom>
+          <a:noFill/>
+          <a:ln w="9525">
+            <a:solidFill>
+              <a:srgbClr val="E5E5EA"/>
+            </a:solidFill>
+            <a:prstDash val="solid"/>
+          </a:ln>
+        </p:spPr>
+      </p:sp>
+      <p:sp>
+        <p:nvSpPr>
+          <p:cNvPr id="20" name="o161"/>
+          <p:cNvSpPr txBox="1"/>
+          <p:nvPr/>
+        </p:nvSpPr>
+        <p:spPr>
+          <a:xfrm>
+            <a:off x="914400" y="2647950"/>
+            <a:ext cx="342900" cy="152400"/>
+          </a:xfrm>
+          <a:prstGeom prst="rect">
+            <a:avLst/>
+          </a:prstGeom>
+          <a:noFill/>
+          <a:ln/>
+        </p:spPr>
+        <p:txBody>
+          <a:bodyPr wrap="square" lIns="0" tIns="0" rIns="0" bIns="0" rtlCol="0" anchor="t"/>
+          <a:lstStyle/>
+          <a:p>
+            <a:pPr algn="r" indent="0" marL="0">
+              <a:buNone/>
+            </a:pPr>
+            <a:r>
+              <a:rPr lang="en-US" sz="900" dirty="0">
+                <a:solidFill>
+                  <a:srgbClr val="636366"/>
+                </a:solidFill>
+                <a:latin typeface="Inter" pitchFamily="34" charset="0"/>
+                <a:ea typeface="Inter" pitchFamily="34" charset="-122"/>
+                <a:cs typeface="Inter" pitchFamily="34" charset="-120"/>
+              </a:rPr>
+              <a:t>100%</a:t>
+            </a:r>
+            <a:endParaRPr lang="en-US" sz="900" dirty="0"/>
+          </a:p>
+        </p:txBody>
+      </p:sp>
+      <p:sp>
+        <p:nvSpPr>
+          <p:cNvPr id="21" name="o162"/>
+          <p:cNvSpPr/>
+          <p:nvPr/>
+        </p:nvSpPr>
+        <p:spPr>
+          <a:xfrm>
+            <a:off x="1333500" y="2724150"/>
+            <a:ext cx="6096000" cy="0"/>
+          </a:xfrm>
+          <a:prstGeom prst="line">
+            <a:avLst/>
+          </a:prstGeom>
+          <a:noFill/>
+          <a:ln w="12700">
+            <a:solidFill>
+              <a:srgbClr val="0A1F44"/>
+            </a:solidFill>
+            <a:prstDash val="dash"/>
+          </a:ln>
+        </p:spPr>
+      </p:sp>
+      <p:sp>
+        <p:nvSpPr>
+          <p:cNvPr id="22" name="o163"/>
+          <p:cNvSpPr txBox="1"/>
+          <p:nvPr/>
+        </p:nvSpPr>
+        <p:spPr>
+          <a:xfrm>
+            <a:off x="6572250" y="2514600"/>
+            <a:ext cx="857250" cy="152400"/>
+          </a:xfrm>
+          <a:prstGeom prst="rect">
+            <a:avLst/>
+          </a:prstGeom>
+          <a:noFill/>
+          <a:ln/>
+        </p:spPr>
+        <p:txBody>
+          <a:bodyPr wrap="square" lIns="0" tIns="0" rIns="0" bIns="0" rtlCol="0" anchor="t"/>
+          <a:lstStyle/>
+          <a:p>
+            <a:pPr algn="r" indent="0" marL="0">
+              <a:buNone/>
+            </a:pPr>
+            <a:r>
+              <a:rPr lang="en-US" sz="1000" b="1" dirty="0">
+                <a:solidFill>
+                  <a:srgbClr val="0A1F44"/>
+                </a:solidFill>
+                <a:latin typeface="Noto Sans KR" pitchFamily="34" charset="0"/>
+                <a:ea typeface="Noto Sans KR" pitchFamily="34" charset="-122"/>
+                <a:cs typeface="Noto Sans KR" pitchFamily="34" charset="-120"/>
+              </a:rPr>
+              <a:t>목표 100%</a:t>
+            </a:r>
+            <a:endParaRPr lang="en-US" sz="1000" dirty="0"/>
+          </a:p>
+        </p:txBody>
+      </p:sp>
+      <p:sp>
+        <p:nvSpPr>
+          <p:cNvPr id="23" name="o164"/>
+          <p:cNvSpPr/>
+          <p:nvPr/>
+        </p:nvSpPr>
+        <p:spPr>
+          <a:xfrm>
+            <a:off x="1440180" y="3795713"/>
+            <a:ext cx="294640" cy="1785938"/>
           </a:xfrm>
           <a:prstGeom prst="roundRect">
             <a:avLst>
-              <a:gd name="adj" fmla="val 16129"/>
+              <a:gd name="adj" fmla="val 19397"/>
+            </a:avLst>
+          </a:prstGeom>
+          <a:solidFill>
+            <a:srgbClr val="F56300"/>
+          </a:solidFill>
+          <a:ln/>
+        </p:spPr>
+      </p:sp>
+      <p:sp>
+        <p:nvSpPr>
+          <p:cNvPr id="24" name="o165"/>
+          <p:cNvSpPr txBox="1"/>
+          <p:nvPr/>
+        </p:nvSpPr>
+        <p:spPr>
+          <a:xfrm>
+            <a:off x="1363980" y="3624263"/>
+            <a:ext cx="447040" cy="133350"/>
+          </a:xfrm>
+          <a:prstGeom prst="rect">
+            <a:avLst/>
+          </a:prstGeom>
+          <a:noFill/>
+          <a:ln/>
+        </p:spPr>
+        <p:txBody>
+          <a:bodyPr wrap="square" lIns="0" tIns="0" rIns="0" bIns="0" rtlCol="0" anchor="t"/>
+          <a:lstStyle/>
+          <a:p>
+            <a:pPr algn="ctr" indent="0" marL="0">
+              <a:buNone/>
+            </a:pPr>
+            <a:r>
+              <a:rPr lang="en-US" sz="1000" b="1" dirty="0">
+                <a:solidFill>
+                  <a:srgbClr val="B33F00"/>
+                </a:solidFill>
+                <a:latin typeface="Inter" pitchFamily="34" charset="0"/>
+                <a:ea typeface="Inter" pitchFamily="34" charset="-122"/>
+                <a:cs typeface="Inter" pitchFamily="34" charset="-120"/>
+              </a:rPr>
+              <a:t>63</a:t>
+            </a:r>
+            <a:endParaRPr lang="en-US" sz="1000" dirty="0"/>
+          </a:p>
+        </p:txBody>
+      </p:sp>
+      <p:sp>
+        <p:nvSpPr>
+          <p:cNvPr id="25" name="o166"/>
+          <p:cNvSpPr txBox="1"/>
+          <p:nvPr/>
+        </p:nvSpPr>
+        <p:spPr>
+          <a:xfrm>
+            <a:off x="1363980" y="5657850"/>
+            <a:ext cx="447040" cy="133350"/>
+          </a:xfrm>
+          <a:prstGeom prst="rect">
+            <a:avLst/>
+          </a:prstGeom>
+          <a:noFill/>
+          <a:ln/>
+        </p:spPr>
+        <p:txBody>
+          <a:bodyPr wrap="square" lIns="0" tIns="0" rIns="0" bIns="0" rtlCol="0" anchor="t"/>
+          <a:lstStyle/>
+          <a:p>
+            <a:pPr algn="ctr" indent="0" marL="0">
+              <a:buNone/>
+            </a:pPr>
+            <a:r>
+              <a:rPr lang="en-US" sz="1000" dirty="0">
+                <a:solidFill>
+                  <a:srgbClr val="636366"/>
+                </a:solidFill>
+                <a:latin typeface="Noto Sans KR" pitchFamily="34" charset="0"/>
+                <a:ea typeface="Noto Sans KR" pitchFamily="34" charset="-122"/>
+                <a:cs typeface="Noto Sans KR" pitchFamily="34" charset="-120"/>
+              </a:rPr>
+              <a:t>1월</a:t>
+            </a:r>
+            <a:endParaRPr lang="en-US" sz="1000" dirty="0"/>
+          </a:p>
+        </p:txBody>
+      </p:sp>
+      <p:sp>
+        <p:nvSpPr>
+          <p:cNvPr id="26" name="o167"/>
+          <p:cNvSpPr/>
+          <p:nvPr/>
+        </p:nvSpPr>
+        <p:spPr>
+          <a:xfrm>
+            <a:off x="1948180" y="3041650"/>
+            <a:ext cx="294640" cy="2540000"/>
+          </a:xfrm>
+          <a:prstGeom prst="roundRect">
+            <a:avLst>
+              <a:gd name="adj" fmla="val 19397"/>
+            </a:avLst>
+          </a:prstGeom>
+          <a:solidFill>
+            <a:srgbClr val="F56300"/>
+          </a:solidFill>
+          <a:ln/>
+        </p:spPr>
+      </p:sp>
+      <p:sp>
+        <p:nvSpPr>
+          <p:cNvPr id="27" name="o168"/>
+          <p:cNvSpPr txBox="1"/>
+          <p:nvPr/>
+        </p:nvSpPr>
+        <p:spPr>
+          <a:xfrm>
+            <a:off x="1871980" y="2870200"/>
+            <a:ext cx="447040" cy="133350"/>
+          </a:xfrm>
+          <a:prstGeom prst="rect">
+            <a:avLst/>
+          </a:prstGeom>
+          <a:noFill/>
+          <a:ln/>
+        </p:spPr>
+        <p:txBody>
+          <a:bodyPr wrap="square" lIns="0" tIns="0" rIns="0" bIns="0" rtlCol="0" anchor="t"/>
+          <a:lstStyle/>
+          <a:p>
+            <a:pPr algn="ctr" indent="0" marL="0">
+              <a:buNone/>
+            </a:pPr>
+            <a:r>
+              <a:rPr lang="en-US" sz="1000" b="1" dirty="0">
+                <a:solidFill>
+                  <a:srgbClr val="B33F00"/>
+                </a:solidFill>
+                <a:latin typeface="Inter" pitchFamily="34" charset="0"/>
+                <a:ea typeface="Inter" pitchFamily="34" charset="-122"/>
+                <a:cs typeface="Inter" pitchFamily="34" charset="-120"/>
+              </a:rPr>
+              <a:t>89</a:t>
+            </a:r>
+            <a:endParaRPr lang="en-US" sz="1000" dirty="0"/>
+          </a:p>
+        </p:txBody>
+      </p:sp>
+      <p:sp>
+        <p:nvSpPr>
+          <p:cNvPr id="28" name="o169"/>
+          <p:cNvSpPr txBox="1"/>
+          <p:nvPr/>
+        </p:nvSpPr>
+        <p:spPr>
+          <a:xfrm>
+            <a:off x="1871980" y="5657850"/>
+            <a:ext cx="447040" cy="133350"/>
+          </a:xfrm>
+          <a:prstGeom prst="rect">
+            <a:avLst/>
+          </a:prstGeom>
+          <a:noFill/>
+          <a:ln/>
+        </p:spPr>
+        <p:txBody>
+          <a:bodyPr wrap="square" lIns="0" tIns="0" rIns="0" bIns="0" rtlCol="0" anchor="t"/>
+          <a:lstStyle/>
+          <a:p>
+            <a:pPr algn="ctr" indent="0" marL="0">
+              <a:buNone/>
+            </a:pPr>
+            <a:r>
+              <a:rPr lang="en-US" sz="1000" dirty="0">
+                <a:solidFill>
+                  <a:srgbClr val="636366"/>
+                </a:solidFill>
+                <a:latin typeface="Noto Sans KR" pitchFamily="34" charset="0"/>
+                <a:ea typeface="Noto Sans KR" pitchFamily="34" charset="-122"/>
+                <a:cs typeface="Noto Sans KR" pitchFamily="34" charset="-120"/>
+              </a:rPr>
+              <a:t>2월</a:t>
+            </a:r>
+            <a:endParaRPr lang="en-US" sz="1000" dirty="0"/>
+          </a:p>
+        </p:txBody>
+      </p:sp>
+      <p:sp>
+        <p:nvSpPr>
+          <p:cNvPr id="29" name="o170"/>
+          <p:cNvSpPr/>
+          <p:nvPr/>
+        </p:nvSpPr>
+        <p:spPr>
+          <a:xfrm>
+            <a:off x="2456180" y="3041650"/>
+            <a:ext cx="294640" cy="2540000"/>
+          </a:xfrm>
+          <a:prstGeom prst="roundRect">
+            <a:avLst>
+              <a:gd name="adj" fmla="val 19397"/>
+            </a:avLst>
+          </a:prstGeom>
+          <a:solidFill>
+            <a:srgbClr val="F56300"/>
+          </a:solidFill>
+          <a:ln/>
+        </p:spPr>
+      </p:sp>
+      <p:sp>
+        <p:nvSpPr>
+          <p:cNvPr id="30" name="o171"/>
+          <p:cNvSpPr txBox="1"/>
+          <p:nvPr/>
+        </p:nvSpPr>
+        <p:spPr>
+          <a:xfrm>
+            <a:off x="2379980" y="2870200"/>
+            <a:ext cx="447040" cy="133350"/>
+          </a:xfrm>
+          <a:prstGeom prst="rect">
+            <a:avLst/>
+          </a:prstGeom>
+          <a:noFill/>
+          <a:ln/>
+        </p:spPr>
+        <p:txBody>
+          <a:bodyPr wrap="square" lIns="0" tIns="0" rIns="0" bIns="0" rtlCol="0" anchor="t"/>
+          <a:lstStyle/>
+          <a:p>
+            <a:pPr algn="ctr" indent="0" marL="0">
+              <a:buNone/>
+            </a:pPr>
+            <a:r>
+              <a:rPr lang="en-US" sz="1000" b="1" dirty="0">
+                <a:solidFill>
+                  <a:srgbClr val="B33F00"/>
+                </a:solidFill>
+                <a:latin typeface="Inter" pitchFamily="34" charset="0"/>
+                <a:ea typeface="Inter" pitchFamily="34" charset="-122"/>
+                <a:cs typeface="Inter" pitchFamily="34" charset="-120"/>
+              </a:rPr>
+              <a:t>89</a:t>
+            </a:r>
+            <a:endParaRPr lang="en-US" sz="1000" dirty="0"/>
+          </a:p>
+        </p:txBody>
+      </p:sp>
+      <p:sp>
+        <p:nvSpPr>
+          <p:cNvPr id="31" name="o172"/>
+          <p:cNvSpPr txBox="1"/>
+          <p:nvPr/>
+        </p:nvSpPr>
+        <p:spPr>
+          <a:xfrm>
+            <a:off x="2379980" y="5657850"/>
+            <a:ext cx="447040" cy="133350"/>
+          </a:xfrm>
+          <a:prstGeom prst="rect">
+            <a:avLst/>
+          </a:prstGeom>
+          <a:noFill/>
+          <a:ln/>
+        </p:spPr>
+        <p:txBody>
+          <a:bodyPr wrap="square" lIns="0" tIns="0" rIns="0" bIns="0" rtlCol="0" anchor="t"/>
+          <a:lstStyle/>
+          <a:p>
+            <a:pPr algn="ctr" indent="0" marL="0">
+              <a:buNone/>
+            </a:pPr>
+            <a:r>
+              <a:rPr lang="en-US" sz="1000" dirty="0">
+                <a:solidFill>
+                  <a:srgbClr val="636366"/>
+                </a:solidFill>
+                <a:latin typeface="Noto Sans KR" pitchFamily="34" charset="0"/>
+                <a:ea typeface="Noto Sans KR" pitchFamily="34" charset="-122"/>
+                <a:cs typeface="Noto Sans KR" pitchFamily="34" charset="-120"/>
+              </a:rPr>
+              <a:t>3월</a:t>
+            </a:r>
+            <a:endParaRPr lang="en-US" sz="1000" dirty="0"/>
+          </a:p>
+        </p:txBody>
+      </p:sp>
+      <p:sp>
+        <p:nvSpPr>
+          <p:cNvPr id="32" name="o173"/>
+          <p:cNvSpPr/>
+          <p:nvPr/>
+        </p:nvSpPr>
+        <p:spPr>
+          <a:xfrm>
+            <a:off x="2964180" y="2724150"/>
+            <a:ext cx="294640" cy="2857500"/>
+          </a:xfrm>
+          <a:prstGeom prst="roundRect">
+            <a:avLst>
+              <a:gd name="adj" fmla="val 19397"/>
+            </a:avLst>
+          </a:prstGeom>
+          <a:solidFill>
+            <a:srgbClr val="C7C7CC"/>
+          </a:solidFill>
+          <a:ln/>
+        </p:spPr>
+      </p:sp>
+      <p:sp>
+        <p:nvSpPr>
+          <p:cNvPr id="33" name="o174"/>
+          <p:cNvSpPr txBox="1"/>
+          <p:nvPr/>
+        </p:nvSpPr>
+        <p:spPr>
+          <a:xfrm>
+            <a:off x="2887980" y="5657850"/>
+            <a:ext cx="447040" cy="133350"/>
+          </a:xfrm>
+          <a:prstGeom prst="rect">
+            <a:avLst/>
+          </a:prstGeom>
+          <a:noFill/>
+          <a:ln/>
+        </p:spPr>
+        <p:txBody>
+          <a:bodyPr wrap="square" lIns="0" tIns="0" rIns="0" bIns="0" rtlCol="0" anchor="t"/>
+          <a:lstStyle/>
+          <a:p>
+            <a:pPr algn="ctr" indent="0" marL="0">
+              <a:buNone/>
+            </a:pPr>
+            <a:r>
+              <a:rPr lang="en-US" sz="1000" dirty="0">
+                <a:solidFill>
+                  <a:srgbClr val="636366"/>
+                </a:solidFill>
+                <a:latin typeface="Noto Sans KR" pitchFamily="34" charset="0"/>
+                <a:ea typeface="Noto Sans KR" pitchFamily="34" charset="-122"/>
+                <a:cs typeface="Noto Sans KR" pitchFamily="34" charset="-120"/>
+              </a:rPr>
+              <a:t>4월</a:t>
+            </a:r>
+            <a:endParaRPr lang="en-US" sz="1000" dirty="0"/>
+          </a:p>
+        </p:txBody>
+      </p:sp>
+      <p:sp>
+        <p:nvSpPr>
+          <p:cNvPr id="34" name="o175"/>
+          <p:cNvSpPr/>
+          <p:nvPr/>
+        </p:nvSpPr>
+        <p:spPr>
+          <a:xfrm>
+            <a:off x="3472180" y="3132364"/>
+            <a:ext cx="294640" cy="2449286"/>
+          </a:xfrm>
+          <a:prstGeom prst="roundRect">
+            <a:avLst>
+              <a:gd name="adj" fmla="val 19397"/>
+            </a:avLst>
+          </a:prstGeom>
+          <a:solidFill>
+            <a:srgbClr val="F56300"/>
+          </a:solidFill>
+          <a:ln/>
+        </p:spPr>
+      </p:sp>
+      <p:sp>
+        <p:nvSpPr>
+          <p:cNvPr id="35" name="o176"/>
+          <p:cNvSpPr txBox="1"/>
+          <p:nvPr/>
+        </p:nvSpPr>
+        <p:spPr>
+          <a:xfrm>
+            <a:off x="3395980" y="2960914"/>
+            <a:ext cx="447040" cy="133350"/>
+          </a:xfrm>
+          <a:prstGeom prst="rect">
+            <a:avLst/>
+          </a:prstGeom>
+          <a:noFill/>
+          <a:ln/>
+        </p:spPr>
+        <p:txBody>
+          <a:bodyPr wrap="square" lIns="0" tIns="0" rIns="0" bIns="0" rtlCol="0" anchor="t"/>
+          <a:lstStyle/>
+          <a:p>
+            <a:pPr algn="ctr" indent="0" marL="0">
+              <a:buNone/>
+            </a:pPr>
+            <a:r>
+              <a:rPr lang="en-US" sz="1000" b="1" dirty="0">
+                <a:solidFill>
+                  <a:srgbClr val="B33F00"/>
+                </a:solidFill>
+                <a:latin typeface="Inter" pitchFamily="34" charset="0"/>
+                <a:ea typeface="Inter" pitchFamily="34" charset="-122"/>
+                <a:cs typeface="Inter" pitchFamily="34" charset="-120"/>
+              </a:rPr>
+              <a:t>86</a:t>
+            </a:r>
+            <a:endParaRPr lang="en-US" sz="1000" dirty="0"/>
+          </a:p>
+        </p:txBody>
+      </p:sp>
+      <p:sp>
+        <p:nvSpPr>
+          <p:cNvPr id="36" name="o177"/>
+          <p:cNvSpPr txBox="1"/>
+          <p:nvPr/>
+        </p:nvSpPr>
+        <p:spPr>
+          <a:xfrm>
+            <a:off x="3395980" y="5657850"/>
+            <a:ext cx="447040" cy="133350"/>
+          </a:xfrm>
+          <a:prstGeom prst="rect">
+            <a:avLst/>
+          </a:prstGeom>
+          <a:noFill/>
+          <a:ln/>
+        </p:spPr>
+        <p:txBody>
+          <a:bodyPr wrap="square" lIns="0" tIns="0" rIns="0" bIns="0" rtlCol="0" anchor="t"/>
+          <a:lstStyle/>
+          <a:p>
+            <a:pPr algn="ctr" indent="0" marL="0">
+              <a:buNone/>
+            </a:pPr>
+            <a:r>
+              <a:rPr lang="en-US" sz="1000" dirty="0">
+                <a:solidFill>
+                  <a:srgbClr val="636366"/>
+                </a:solidFill>
+                <a:latin typeface="Noto Sans KR" pitchFamily="34" charset="0"/>
+                <a:ea typeface="Noto Sans KR" pitchFamily="34" charset="-122"/>
+                <a:cs typeface="Noto Sans KR" pitchFamily="34" charset="-120"/>
+              </a:rPr>
+              <a:t>5월</a:t>
+            </a:r>
+            <a:endParaRPr lang="en-US" sz="1000" dirty="0"/>
+          </a:p>
+        </p:txBody>
+      </p:sp>
+      <p:sp>
+        <p:nvSpPr>
+          <p:cNvPr id="37" name="o178"/>
+          <p:cNvSpPr/>
+          <p:nvPr/>
+        </p:nvSpPr>
+        <p:spPr>
+          <a:xfrm>
+            <a:off x="3980180" y="2724150"/>
+            <a:ext cx="294640" cy="2857500"/>
+          </a:xfrm>
+          <a:prstGeom prst="roundRect">
+            <a:avLst>
+              <a:gd name="adj" fmla="val 19397"/>
+            </a:avLst>
+          </a:prstGeom>
+          <a:solidFill>
+            <a:srgbClr val="C7C7CC"/>
+          </a:solidFill>
+          <a:ln/>
+        </p:spPr>
+      </p:sp>
+      <p:sp>
+        <p:nvSpPr>
+          <p:cNvPr id="38" name="o179"/>
+          <p:cNvSpPr txBox="1"/>
+          <p:nvPr/>
+        </p:nvSpPr>
+        <p:spPr>
+          <a:xfrm>
+            <a:off x="3903980" y="5657850"/>
+            <a:ext cx="447040" cy="133350"/>
+          </a:xfrm>
+          <a:prstGeom prst="rect">
+            <a:avLst/>
+          </a:prstGeom>
+          <a:noFill/>
+          <a:ln/>
+        </p:spPr>
+        <p:txBody>
+          <a:bodyPr wrap="square" lIns="0" tIns="0" rIns="0" bIns="0" rtlCol="0" anchor="t"/>
+          <a:lstStyle/>
+          <a:p>
+            <a:pPr algn="ctr" indent="0" marL="0">
+              <a:buNone/>
+            </a:pPr>
+            <a:r>
+              <a:rPr lang="en-US" sz="1000" dirty="0">
+                <a:solidFill>
+                  <a:srgbClr val="636366"/>
+                </a:solidFill>
+                <a:latin typeface="Noto Sans KR" pitchFamily="34" charset="0"/>
+                <a:ea typeface="Noto Sans KR" pitchFamily="34" charset="-122"/>
+                <a:cs typeface="Noto Sans KR" pitchFamily="34" charset="-120"/>
+              </a:rPr>
+              <a:t>6월</a:t>
+            </a:r>
+            <a:endParaRPr lang="en-US" sz="1000" dirty="0"/>
+          </a:p>
+        </p:txBody>
+      </p:sp>
+      <p:sp>
+        <p:nvSpPr>
+          <p:cNvPr id="39" name="o180"/>
+          <p:cNvSpPr/>
+          <p:nvPr/>
+        </p:nvSpPr>
+        <p:spPr>
+          <a:xfrm>
+            <a:off x="4488180" y="3163765"/>
+            <a:ext cx="294640" cy="2417885"/>
+          </a:xfrm>
+          <a:prstGeom prst="roundRect">
+            <a:avLst>
+              <a:gd name="adj" fmla="val 19397"/>
+            </a:avLst>
+          </a:prstGeom>
+          <a:solidFill>
+            <a:srgbClr val="F56300"/>
+          </a:solidFill>
+          <a:ln/>
+        </p:spPr>
+      </p:sp>
+      <p:sp>
+        <p:nvSpPr>
+          <p:cNvPr id="40" name="o181"/>
+          <p:cNvSpPr txBox="1"/>
+          <p:nvPr/>
+        </p:nvSpPr>
+        <p:spPr>
+          <a:xfrm>
+            <a:off x="4411980" y="2992315"/>
+            <a:ext cx="447040" cy="133350"/>
+          </a:xfrm>
+          <a:prstGeom prst="rect">
+            <a:avLst/>
+          </a:prstGeom>
+          <a:noFill/>
+          <a:ln/>
+        </p:spPr>
+        <p:txBody>
+          <a:bodyPr wrap="square" lIns="0" tIns="0" rIns="0" bIns="0" rtlCol="0" anchor="t"/>
+          <a:lstStyle/>
+          <a:p>
+            <a:pPr algn="ctr" indent="0" marL="0">
+              <a:buNone/>
+            </a:pPr>
+            <a:r>
+              <a:rPr lang="en-US" sz="1000" b="1" dirty="0">
+                <a:solidFill>
+                  <a:srgbClr val="B33F00"/>
+                </a:solidFill>
+                <a:latin typeface="Inter" pitchFamily="34" charset="0"/>
+                <a:ea typeface="Inter" pitchFamily="34" charset="-122"/>
+                <a:cs typeface="Inter" pitchFamily="34" charset="-120"/>
+              </a:rPr>
+              <a:t>85</a:t>
+            </a:r>
+            <a:endParaRPr lang="en-US" sz="1000" dirty="0"/>
+          </a:p>
+        </p:txBody>
+      </p:sp>
+      <p:sp>
+        <p:nvSpPr>
+          <p:cNvPr id="41" name="o182"/>
+          <p:cNvSpPr txBox="1"/>
+          <p:nvPr/>
+        </p:nvSpPr>
+        <p:spPr>
+          <a:xfrm>
+            <a:off x="4411980" y="5657850"/>
+            <a:ext cx="447040" cy="133350"/>
+          </a:xfrm>
+          <a:prstGeom prst="rect">
+            <a:avLst/>
+          </a:prstGeom>
+          <a:noFill/>
+          <a:ln/>
+        </p:spPr>
+        <p:txBody>
+          <a:bodyPr wrap="square" lIns="0" tIns="0" rIns="0" bIns="0" rtlCol="0" anchor="t"/>
+          <a:lstStyle/>
+          <a:p>
+            <a:pPr algn="ctr" indent="0" marL="0">
+              <a:buNone/>
+            </a:pPr>
+            <a:r>
+              <a:rPr lang="en-US" sz="1000" dirty="0">
+                <a:solidFill>
+                  <a:srgbClr val="636366"/>
+                </a:solidFill>
+                <a:latin typeface="Noto Sans KR" pitchFamily="34" charset="0"/>
+                <a:ea typeface="Noto Sans KR" pitchFamily="34" charset="-122"/>
+                <a:cs typeface="Noto Sans KR" pitchFamily="34" charset="-120"/>
+              </a:rPr>
+              <a:t>7월</a:t>
+            </a:r>
+            <a:endParaRPr lang="en-US" sz="1000" dirty="0"/>
+          </a:p>
+        </p:txBody>
+      </p:sp>
+      <p:sp>
+        <p:nvSpPr>
+          <p:cNvPr id="42" name="o183"/>
+          <p:cNvSpPr/>
+          <p:nvPr/>
+        </p:nvSpPr>
+        <p:spPr>
+          <a:xfrm>
+            <a:off x="4996180" y="2724150"/>
+            <a:ext cx="294640" cy="2857500"/>
+          </a:xfrm>
+          <a:prstGeom prst="roundRect">
+            <a:avLst>
+              <a:gd name="adj" fmla="val 19397"/>
+            </a:avLst>
+          </a:prstGeom>
+          <a:solidFill>
+            <a:srgbClr val="C7C7CC"/>
+          </a:solidFill>
+          <a:ln/>
+        </p:spPr>
+      </p:sp>
+      <p:sp>
+        <p:nvSpPr>
+          <p:cNvPr id="43" name="o184"/>
+          <p:cNvSpPr txBox="1"/>
+          <p:nvPr/>
+        </p:nvSpPr>
+        <p:spPr>
+          <a:xfrm>
+            <a:off x="4919980" y="5657850"/>
+            <a:ext cx="447040" cy="133350"/>
+          </a:xfrm>
+          <a:prstGeom prst="rect">
+            <a:avLst/>
+          </a:prstGeom>
+          <a:noFill/>
+          <a:ln/>
+        </p:spPr>
+        <p:txBody>
+          <a:bodyPr wrap="square" lIns="0" tIns="0" rIns="0" bIns="0" rtlCol="0" anchor="t"/>
+          <a:lstStyle/>
+          <a:p>
+            <a:pPr algn="ctr" indent="0" marL="0">
+              <a:buNone/>
+            </a:pPr>
+            <a:r>
+              <a:rPr lang="en-US" sz="1000" dirty="0">
+                <a:solidFill>
+                  <a:srgbClr val="636366"/>
+                </a:solidFill>
+                <a:latin typeface="Noto Sans KR" pitchFamily="34" charset="0"/>
+                <a:ea typeface="Noto Sans KR" pitchFamily="34" charset="-122"/>
+                <a:cs typeface="Noto Sans KR" pitchFamily="34" charset="-120"/>
+              </a:rPr>
+              <a:t>8월</a:t>
+            </a:r>
+            <a:endParaRPr lang="en-US" sz="1000" dirty="0"/>
+          </a:p>
+        </p:txBody>
+      </p:sp>
+      <p:sp>
+        <p:nvSpPr>
+          <p:cNvPr id="44" name="o185"/>
+          <p:cNvSpPr/>
+          <p:nvPr/>
+        </p:nvSpPr>
+        <p:spPr>
+          <a:xfrm>
+            <a:off x="5504180" y="3295650"/>
+            <a:ext cx="294640" cy="2286000"/>
+          </a:xfrm>
+          <a:prstGeom prst="roundRect">
+            <a:avLst>
+              <a:gd name="adj" fmla="val 19397"/>
+            </a:avLst>
+          </a:prstGeom>
+          <a:solidFill>
+            <a:srgbClr val="F56300"/>
+          </a:solidFill>
+          <a:ln/>
+        </p:spPr>
+      </p:sp>
+      <p:sp>
+        <p:nvSpPr>
+          <p:cNvPr id="45" name="o186"/>
+          <p:cNvSpPr txBox="1"/>
+          <p:nvPr/>
+        </p:nvSpPr>
+        <p:spPr>
+          <a:xfrm>
+            <a:off x="5427980" y="3124200"/>
+            <a:ext cx="447040" cy="133350"/>
+          </a:xfrm>
+          <a:prstGeom prst="rect">
+            <a:avLst/>
+          </a:prstGeom>
+          <a:noFill/>
+          <a:ln/>
+        </p:spPr>
+        <p:txBody>
+          <a:bodyPr wrap="square" lIns="0" tIns="0" rIns="0" bIns="0" rtlCol="0" anchor="t"/>
+          <a:lstStyle/>
+          <a:p>
+            <a:pPr algn="ctr" indent="0" marL="0">
+              <a:buNone/>
+            </a:pPr>
+            <a:r>
+              <a:rPr lang="en-US" sz="1000" b="1" dirty="0">
+                <a:solidFill>
+                  <a:srgbClr val="B33F00"/>
+                </a:solidFill>
+                <a:latin typeface="Inter" pitchFamily="34" charset="0"/>
+                <a:ea typeface="Inter" pitchFamily="34" charset="-122"/>
+                <a:cs typeface="Inter" pitchFamily="34" charset="-120"/>
+              </a:rPr>
+              <a:t>80</a:t>
+            </a:r>
+            <a:endParaRPr lang="en-US" sz="1000" dirty="0"/>
+          </a:p>
+        </p:txBody>
+      </p:sp>
+      <p:sp>
+        <p:nvSpPr>
+          <p:cNvPr id="46" name="o187"/>
+          <p:cNvSpPr txBox="1"/>
+          <p:nvPr/>
+        </p:nvSpPr>
+        <p:spPr>
+          <a:xfrm>
+            <a:off x="5427980" y="5657850"/>
+            <a:ext cx="447040" cy="133350"/>
+          </a:xfrm>
+          <a:prstGeom prst="rect">
+            <a:avLst/>
+          </a:prstGeom>
+          <a:noFill/>
+          <a:ln/>
+        </p:spPr>
+        <p:txBody>
+          <a:bodyPr wrap="square" lIns="0" tIns="0" rIns="0" bIns="0" rtlCol="0" anchor="t"/>
+          <a:lstStyle/>
+          <a:p>
+            <a:pPr algn="ctr" indent="0" marL="0">
+              <a:buNone/>
+            </a:pPr>
+            <a:r>
+              <a:rPr lang="en-US" sz="1000" dirty="0">
+                <a:solidFill>
+                  <a:srgbClr val="636366"/>
+                </a:solidFill>
+                <a:latin typeface="Noto Sans KR" pitchFamily="34" charset="0"/>
+                <a:ea typeface="Noto Sans KR" pitchFamily="34" charset="-122"/>
+                <a:cs typeface="Noto Sans KR" pitchFamily="34" charset="-120"/>
+              </a:rPr>
+              <a:t>9월</a:t>
+            </a:r>
+            <a:endParaRPr lang="en-US" sz="1000" dirty="0"/>
+          </a:p>
+        </p:txBody>
+      </p:sp>
+      <p:sp>
+        <p:nvSpPr>
+          <p:cNvPr id="47" name="o188"/>
+          <p:cNvSpPr/>
+          <p:nvPr/>
+        </p:nvSpPr>
+        <p:spPr>
+          <a:xfrm>
+            <a:off x="6012180" y="4152900"/>
+            <a:ext cx="294640" cy="1428750"/>
+          </a:xfrm>
+          <a:prstGeom prst="roundRect">
+            <a:avLst>
+              <a:gd name="adj" fmla="val 19397"/>
+            </a:avLst>
+          </a:prstGeom>
+          <a:solidFill>
+            <a:srgbClr val="F56300"/>
+          </a:solidFill>
+          <a:ln/>
+        </p:spPr>
+      </p:sp>
+      <p:sp>
+        <p:nvSpPr>
+          <p:cNvPr id="48" name="o189"/>
+          <p:cNvSpPr txBox="1"/>
+          <p:nvPr/>
+        </p:nvSpPr>
+        <p:spPr>
+          <a:xfrm>
+            <a:off x="5935980" y="3981450"/>
+            <a:ext cx="447040" cy="133350"/>
+          </a:xfrm>
+          <a:prstGeom prst="rect">
+            <a:avLst/>
+          </a:prstGeom>
+          <a:noFill/>
+          <a:ln/>
+        </p:spPr>
+        <p:txBody>
+          <a:bodyPr wrap="square" lIns="0" tIns="0" rIns="0" bIns="0" rtlCol="0" anchor="t"/>
+          <a:lstStyle/>
+          <a:p>
+            <a:pPr algn="ctr" indent="0" marL="0">
+              <a:buNone/>
+            </a:pPr>
+            <a:r>
+              <a:rPr lang="en-US" sz="1000" b="1" dirty="0">
+                <a:solidFill>
+                  <a:srgbClr val="B33F00"/>
+                </a:solidFill>
+                <a:latin typeface="Inter" pitchFamily="34" charset="0"/>
+                <a:ea typeface="Inter" pitchFamily="34" charset="-122"/>
+                <a:cs typeface="Inter" pitchFamily="34" charset="-120"/>
+              </a:rPr>
+              <a:t>50</a:t>
+            </a:r>
+            <a:endParaRPr lang="en-US" sz="1000" dirty="0"/>
+          </a:p>
+        </p:txBody>
+      </p:sp>
+      <p:sp>
+        <p:nvSpPr>
+          <p:cNvPr id="49" name="o190"/>
+          <p:cNvSpPr txBox="1"/>
+          <p:nvPr/>
+        </p:nvSpPr>
+        <p:spPr>
+          <a:xfrm>
+            <a:off x="5935980" y="5657850"/>
+            <a:ext cx="447040" cy="133350"/>
+          </a:xfrm>
+          <a:prstGeom prst="rect">
+            <a:avLst/>
+          </a:prstGeom>
+          <a:noFill/>
+          <a:ln/>
+        </p:spPr>
+        <p:txBody>
+          <a:bodyPr wrap="square" lIns="0" tIns="0" rIns="0" bIns="0" rtlCol="0" anchor="t"/>
+          <a:lstStyle/>
+          <a:p>
+            <a:pPr algn="ctr" indent="0" marL="0">
+              <a:buNone/>
+            </a:pPr>
+            <a:r>
+              <a:rPr lang="en-US" sz="1000" dirty="0">
+                <a:solidFill>
+                  <a:srgbClr val="636366"/>
+                </a:solidFill>
+                <a:latin typeface="Noto Sans KR" pitchFamily="34" charset="0"/>
+                <a:ea typeface="Noto Sans KR" pitchFamily="34" charset="-122"/>
+                <a:cs typeface="Noto Sans KR" pitchFamily="34" charset="-120"/>
+              </a:rPr>
+              <a:t>10월</a:t>
+            </a:r>
+            <a:endParaRPr lang="en-US" sz="1000" dirty="0"/>
+          </a:p>
+        </p:txBody>
+      </p:sp>
+      <p:sp>
+        <p:nvSpPr>
+          <p:cNvPr id="50" name="o191"/>
+          <p:cNvSpPr/>
+          <p:nvPr/>
+        </p:nvSpPr>
+        <p:spPr>
+          <a:xfrm>
+            <a:off x="6520180" y="3900768"/>
+            <a:ext cx="294640" cy="1680882"/>
+          </a:xfrm>
+          <a:prstGeom prst="roundRect">
+            <a:avLst>
+              <a:gd name="adj" fmla="val 19397"/>
+            </a:avLst>
+          </a:prstGeom>
+          <a:solidFill>
+            <a:srgbClr val="F56300"/>
+          </a:solidFill>
+          <a:ln/>
+        </p:spPr>
+      </p:sp>
+      <p:sp>
+        <p:nvSpPr>
+          <p:cNvPr id="51" name="o192"/>
+          <p:cNvSpPr txBox="1"/>
+          <p:nvPr/>
+        </p:nvSpPr>
+        <p:spPr>
+          <a:xfrm>
+            <a:off x="6443980" y="3729318"/>
+            <a:ext cx="447040" cy="133350"/>
+          </a:xfrm>
+          <a:prstGeom prst="rect">
+            <a:avLst/>
+          </a:prstGeom>
+          <a:noFill/>
+          <a:ln/>
+        </p:spPr>
+        <p:txBody>
+          <a:bodyPr wrap="square" lIns="0" tIns="0" rIns="0" bIns="0" rtlCol="0" anchor="t"/>
+          <a:lstStyle/>
+          <a:p>
+            <a:pPr algn="ctr" indent="0" marL="0">
+              <a:buNone/>
+            </a:pPr>
+            <a:r>
+              <a:rPr lang="en-US" sz="1000" b="1" dirty="0">
+                <a:solidFill>
+                  <a:srgbClr val="B33F00"/>
+                </a:solidFill>
+                <a:latin typeface="Inter" pitchFamily="34" charset="0"/>
+                <a:ea typeface="Inter" pitchFamily="34" charset="-122"/>
+                <a:cs typeface="Inter" pitchFamily="34" charset="-120"/>
+              </a:rPr>
+              <a:t>59</a:t>
+            </a:r>
+            <a:endParaRPr lang="en-US" sz="1000" dirty="0"/>
+          </a:p>
+        </p:txBody>
+      </p:sp>
+      <p:sp>
+        <p:nvSpPr>
+          <p:cNvPr id="52" name="o193"/>
+          <p:cNvSpPr txBox="1"/>
+          <p:nvPr/>
+        </p:nvSpPr>
+        <p:spPr>
+          <a:xfrm>
+            <a:off x="6443980" y="5657850"/>
+            <a:ext cx="447040" cy="133350"/>
+          </a:xfrm>
+          <a:prstGeom prst="rect">
+            <a:avLst/>
+          </a:prstGeom>
+          <a:noFill/>
+          <a:ln/>
+        </p:spPr>
+        <p:txBody>
+          <a:bodyPr wrap="square" lIns="0" tIns="0" rIns="0" bIns="0" rtlCol="0" anchor="t"/>
+          <a:lstStyle/>
+          <a:p>
+            <a:pPr algn="ctr" indent="0" marL="0">
+              <a:buNone/>
+            </a:pPr>
+            <a:r>
+              <a:rPr lang="en-US" sz="1000" dirty="0">
+                <a:solidFill>
+                  <a:srgbClr val="636366"/>
+                </a:solidFill>
+                <a:latin typeface="Noto Sans KR" pitchFamily="34" charset="0"/>
+                <a:ea typeface="Noto Sans KR" pitchFamily="34" charset="-122"/>
+                <a:cs typeface="Noto Sans KR" pitchFamily="34" charset="-120"/>
+              </a:rPr>
+              <a:t>11월</a:t>
+            </a:r>
+            <a:endParaRPr lang="en-US" sz="1000" dirty="0"/>
+          </a:p>
+        </p:txBody>
+      </p:sp>
+      <p:sp>
+        <p:nvSpPr>
+          <p:cNvPr id="53" name="o194"/>
+          <p:cNvSpPr/>
+          <p:nvPr/>
+        </p:nvSpPr>
+        <p:spPr>
+          <a:xfrm>
+            <a:off x="7028180" y="2724150"/>
+            <a:ext cx="294640" cy="2857500"/>
+          </a:xfrm>
+          <a:prstGeom prst="roundRect">
+            <a:avLst>
+              <a:gd name="adj" fmla="val 19397"/>
+            </a:avLst>
+          </a:prstGeom>
+          <a:solidFill>
+            <a:srgbClr val="C7C7CC"/>
+          </a:solidFill>
+          <a:ln/>
+        </p:spPr>
+      </p:sp>
+      <p:sp>
+        <p:nvSpPr>
+          <p:cNvPr id="54" name="o195"/>
+          <p:cNvSpPr txBox="1"/>
+          <p:nvPr/>
+        </p:nvSpPr>
+        <p:spPr>
+          <a:xfrm>
+            <a:off x="6951980" y="5657850"/>
+            <a:ext cx="447040" cy="133350"/>
+          </a:xfrm>
+          <a:prstGeom prst="rect">
+            <a:avLst/>
+          </a:prstGeom>
+          <a:noFill/>
+          <a:ln/>
+        </p:spPr>
+        <p:txBody>
+          <a:bodyPr wrap="square" lIns="0" tIns="0" rIns="0" bIns="0" rtlCol="0" anchor="t"/>
+          <a:lstStyle/>
+          <a:p>
+            <a:pPr algn="ctr" indent="0" marL="0">
+              <a:buNone/>
+            </a:pPr>
+            <a:r>
+              <a:rPr lang="en-US" sz="1000" dirty="0">
+                <a:solidFill>
+                  <a:srgbClr val="636366"/>
+                </a:solidFill>
+                <a:latin typeface="Noto Sans KR" pitchFamily="34" charset="0"/>
+                <a:ea typeface="Noto Sans KR" pitchFamily="34" charset="-122"/>
+                <a:cs typeface="Noto Sans KR" pitchFamily="34" charset="-120"/>
+              </a:rPr>
+              <a:t>12월</a:t>
+            </a:r>
+            <a:endParaRPr lang="en-US" sz="1000" dirty="0"/>
+          </a:p>
+        </p:txBody>
+      </p:sp>
+      <p:sp>
+        <p:nvSpPr>
+          <p:cNvPr id="55" name="o196"/>
+          <p:cNvSpPr txBox="1"/>
+          <p:nvPr/>
+        </p:nvSpPr>
+        <p:spPr>
+          <a:xfrm>
+            <a:off x="914400" y="5886450"/>
+            <a:ext cx="6667500" cy="190500"/>
+          </a:xfrm>
+          <a:prstGeom prst="rect">
+            <a:avLst/>
+          </a:prstGeom>
+          <a:noFill/>
+          <a:ln/>
+        </p:spPr>
+        <p:txBody>
+          <a:bodyPr wrap="square" lIns="0" tIns="0" rIns="0" bIns="0" rtlCol="0" anchor="t"/>
+          <a:lstStyle/>
+          <a:p>
+            <a:pPr indent="0" marL="0">
+              <a:buNone/>
+            </a:pPr>
+            <a:r>
+              <a:rPr lang="en-US" sz="1300" b="1" dirty="0">
+                <a:solidFill>
+                  <a:srgbClr val="B33F00"/>
+                </a:solidFill>
+                <a:latin typeface="Noto Sans KR" pitchFamily="34" charset="0"/>
+                <a:ea typeface="Noto Sans KR" pitchFamily="34" charset="-122"/>
+                <a:cs typeface="Noto Sans KR" pitchFamily="34" charset="-120"/>
+              </a:rPr>
+              <a:t>12개월 중 8개월에서 누락 — 특정 시기가 아니라 1년 내내 반복됐다</a:t>
+            </a:r>
+            <a:endParaRPr lang="en-US" sz="1300" dirty="0"/>
+          </a:p>
+        </p:txBody>
+      </p:sp>
+      <p:sp>
+        <p:nvSpPr>
+          <p:cNvPr id="56" name="o197"/>
+          <p:cNvSpPr/>
+          <p:nvPr/>
+        </p:nvSpPr>
+        <p:spPr>
+          <a:xfrm>
+            <a:off x="7886700" y="1600200"/>
+            <a:ext cx="3695700" cy="2209800"/>
+          </a:xfrm>
+          <a:prstGeom prst="roundRect">
+            <a:avLst>
+              <a:gd name="adj" fmla="val 8621"/>
             </a:avLst>
           </a:prstGeom>
           <a:solidFill>
@@ -7399,108 +8575,108 @@
       </p:sp>
       <p:sp>
         <p:nvSpPr>
-          <p:cNvPr id="20" name="o161"/>
-          <p:cNvSpPr txBox="1"/>
-          <p:nvPr/>
-        </p:nvSpPr>
-        <p:spPr>
-          <a:xfrm>
-            <a:off x="6457950" y="1790700"/>
-            <a:ext cx="1905000" cy="171450"/>
-          </a:xfrm>
-          <a:prstGeom prst="rect">
-            <a:avLst/>
-          </a:prstGeom>
-          <a:noFill/>
-          <a:ln/>
-        </p:spPr>
-        <p:txBody>
-          <a:bodyPr wrap="square" lIns="0" tIns="0" rIns="0" bIns="0" rtlCol="0" anchor="t"/>
-          <a:lstStyle/>
-          <a:p>
-            <a:pPr indent="0" marL="0">
-              <a:buNone/>
-            </a:pPr>
-            <a:r>
-              <a:rPr lang="en-US" sz="1100" b="1" dirty="0">
-                <a:solidFill>
-                  <a:srgbClr val="0A1F44"/>
-                </a:solidFill>
-                <a:latin typeface="Noto Sans KR" pitchFamily="34" charset="0"/>
-                <a:ea typeface="Noto Sans KR" pitchFamily="34" charset="-122"/>
-                <a:cs typeface="Noto Sans KR" pitchFamily="34" charset="-120"/>
-              </a:rPr>
-              <a:t>결과지표</a:t>
-            </a:r>
-            <a:endParaRPr lang="en-US" sz="1100" dirty="0"/>
-          </a:p>
-        </p:txBody>
-      </p:sp>
-      <p:sp>
-        <p:nvSpPr>
-          <p:cNvPr id="21" name="o162"/>
-          <p:cNvSpPr txBox="1"/>
-          <p:nvPr/>
-        </p:nvSpPr>
-        <p:spPr>
-          <a:xfrm>
-            <a:off x="10363200" y="1790700"/>
-            <a:ext cx="952500" cy="171450"/>
-          </a:xfrm>
-          <a:prstGeom prst="rect">
-            <a:avLst/>
-          </a:prstGeom>
-          <a:noFill/>
-          <a:ln/>
-        </p:spPr>
-        <p:txBody>
-          <a:bodyPr wrap="square" lIns="0" tIns="0" rIns="0" bIns="0" rtlCol="0" anchor="t"/>
-          <a:lstStyle/>
-          <a:p>
-            <a:pPr algn="r" indent="0" marL="0">
-              <a:buNone/>
-            </a:pPr>
-            <a:r>
-              <a:rPr lang="en-US" sz="1000" dirty="0">
+          <p:cNvPr id="57" name="o198"/>
+          <p:cNvSpPr txBox="1"/>
+          <p:nvPr/>
+        </p:nvSpPr>
+        <p:spPr>
+          <a:xfrm>
+            <a:off x="8191500" y="1828800"/>
+            <a:ext cx="3048000" cy="171450"/>
+          </a:xfrm>
+          <a:prstGeom prst="rect">
+            <a:avLst/>
+          </a:prstGeom>
+          <a:noFill/>
+          <a:ln/>
+        </p:spPr>
+        <p:txBody>
+          <a:bodyPr wrap="square" lIns="0" tIns="0" rIns="0" bIns="0" rtlCol="0" anchor="t"/>
+          <a:lstStyle/>
+          <a:p>
+            <a:pPr indent="0" marL="0">
+              <a:buNone/>
+            </a:pPr>
+            <a:r>
+              <a:rPr lang="en-US" sz="1300" dirty="0">
                 <a:solidFill>
                   <a:srgbClr val="636366"/>
+                </a:solidFill>
+                <a:latin typeface="Noto Sans KR" pitchFamily="34" charset="0"/>
+                <a:ea typeface="Noto Sans KR" pitchFamily="34" charset="-122"/>
+                <a:cs typeface="Noto Sans KR" pitchFamily="34" charset="-120"/>
+              </a:rPr>
+              <a:t>법정교육 누락</a:t>
+            </a:r>
+            <a:endParaRPr lang="en-US" sz="1300" dirty="0"/>
+          </a:p>
+        </p:txBody>
+      </p:sp>
+      <p:sp>
+        <p:nvSpPr>
+          <p:cNvPr id="58" name="o199"/>
+          <p:cNvSpPr txBox="1"/>
+          <p:nvPr/>
+        </p:nvSpPr>
+        <p:spPr>
+          <a:xfrm>
+            <a:off x="8191500" y="2076450"/>
+            <a:ext cx="3048000" cy="666750"/>
+          </a:xfrm>
+          <a:prstGeom prst="rect">
+            <a:avLst/>
+          </a:prstGeom>
+          <a:noFill/>
+          <a:ln/>
+        </p:spPr>
+        <p:txBody>
+          <a:bodyPr wrap="square" lIns="0" tIns="0" rIns="0" bIns="0" rtlCol="0" anchor="t"/>
+          <a:lstStyle/>
+          <a:p>
+            <a:pPr indent="0" marL="0">
+              <a:buNone/>
+            </a:pPr>
+            <a:r>
+              <a:rPr lang="en-US" sz="5200" b="1" dirty="0">
+                <a:solidFill>
+                  <a:srgbClr val="B33F00"/>
                 </a:solidFill>
                 <a:latin typeface="Inter" pitchFamily="34" charset="0"/>
                 <a:ea typeface="Inter" pitchFamily="34" charset="-122"/>
                 <a:cs typeface="Inter" pitchFamily="34" charset="-120"/>
               </a:rPr>
-              <a:t>현황 06</a:t>
-            </a:r>
-            <a:endParaRPr lang="en-US" sz="1000" dirty="0"/>
-          </a:p>
-        </p:txBody>
-      </p:sp>
-      <p:sp>
-        <p:nvSpPr>
-          <p:cNvPr id="22" name="o163"/>
-          <p:cNvSpPr txBox="1"/>
-          <p:nvPr/>
-        </p:nvSpPr>
-        <p:spPr>
-          <a:xfrm>
-            <a:off x="6457950" y="2000250"/>
-            <a:ext cx="3429000" cy="285750"/>
-          </a:xfrm>
-          <a:prstGeom prst="rect">
-            <a:avLst/>
-          </a:prstGeom>
-          <a:noFill/>
-          <a:ln/>
-        </p:spPr>
-        <p:txBody>
-          <a:bodyPr wrap="square" lIns="0" tIns="0" rIns="0" bIns="0" rtlCol="0" anchor="t"/>
-          <a:lstStyle/>
-          <a:p>
-            <a:pPr indent="0" marL="0">
-              <a:buNone/>
-            </a:pPr>
-            <a:r>
-              <a:rPr lang="en-US" sz="1900" b="1" dirty="0">
+              <a:t>18건</a:t>
+            </a:r>
+            <a:endParaRPr lang="en-US" sz="5200" dirty="0"/>
+          </a:p>
+        </p:txBody>
+      </p:sp>
+      <p:sp>
+        <p:nvSpPr>
+          <p:cNvPr id="59" name="o200"/>
+          <p:cNvSpPr txBox="1"/>
+          <p:nvPr/>
+        </p:nvSpPr>
+        <p:spPr>
+          <a:xfrm>
+            <a:off x="8191500" y="2857500"/>
+            <a:ext cx="3048000" cy="190500"/>
+          </a:xfrm>
+          <a:prstGeom prst="rect">
+            <a:avLst/>
+          </a:prstGeom>
+          <a:noFill/>
+          <a:ln/>
+        </p:spPr>
+        <p:txBody>
+          <a:bodyPr wrap="square" lIns="0" tIns="0" rIns="0" bIns="0" rtlCol="0" anchor="t"/>
+          <a:lstStyle/>
+          <a:p>
+            <a:pPr indent="0" marL="0">
+              <a:buNone/>
+            </a:pPr>
+            <a:r>
+              <a:rPr lang="en-US" sz="1300" b="1" dirty="0">
                 <a:solidFill>
                   <a:srgbClr val="1D1D1F"/>
                 </a:solidFill>
@@ -7508,22 +8684,22 @@
                 <a:ea typeface="Noto Sans KR" pitchFamily="34" charset="-122"/>
                 <a:cs typeface="Noto Sans KR" pitchFamily="34" charset="-120"/>
               </a:rPr>
-              <a:t>페이퍼리스 전환율</a:t>
-            </a:r>
-            <a:endParaRPr lang="en-US" sz="1900" dirty="0"/>
-          </a:p>
-        </p:txBody>
-      </p:sp>
-      <p:sp>
-        <p:nvSpPr>
-          <p:cNvPr id="23" name="o164"/>
-          <p:cNvSpPr txBox="1"/>
-          <p:nvPr/>
-        </p:nvSpPr>
-        <p:spPr>
-          <a:xfrm>
-            <a:off x="6457950" y="2362200"/>
-            <a:ext cx="3429000" cy="190500"/>
+              <a:t>106명 중 17% · 이행률 83%</a:t>
+            </a:r>
+            <a:endParaRPr lang="en-US" sz="1300" dirty="0"/>
+          </a:p>
+        </p:txBody>
+      </p:sp>
+      <p:sp>
+        <p:nvSpPr>
+          <p:cNvPr id="60" name="o201"/>
+          <p:cNvSpPr txBox="1"/>
+          <p:nvPr/>
+        </p:nvSpPr>
+        <p:spPr>
+          <a:xfrm>
+            <a:off x="8191500" y="3352800"/>
+            <a:ext cx="3048000" cy="171450"/>
           </a:xfrm>
           <a:prstGeom prst="rect">
             <a:avLst/>
@@ -7547,7 +8723,7 @@
                 <a:ea typeface="Noto Sans KR" pitchFamily="34" charset="-122"/>
                 <a:cs typeface="Noto Sans KR" pitchFamily="34" charset="-120"/>
               </a:rPr>
-              <a:t>종이 없이 DB 저장 완결 ÷ 대상 업무</a:t>
+              <a:t>기준값 → 지표 ① 법정교육 준수율</a:t>
             </a:r>
             <a:endParaRPr lang="en-US" sz="1200" dirty="0"/>
           </a:p>
@@ -7555,71 +8731,93 @@
       </p:sp>
       <p:sp>
         <p:nvSpPr>
-          <p:cNvPr id="24" name="o165"/>
-          <p:cNvSpPr txBox="1"/>
-          <p:nvPr/>
-        </p:nvSpPr>
-        <p:spPr>
-          <a:xfrm>
-            <a:off x="9982200" y="2057400"/>
-            <a:ext cx="1333500" cy="152400"/>
-          </a:xfrm>
-          <a:prstGeom prst="rect">
-            <a:avLst/>
-          </a:prstGeom>
-          <a:noFill/>
-          <a:ln/>
-        </p:spPr>
-        <p:txBody>
-          <a:bodyPr wrap="square" lIns="0" tIns="0" rIns="0" bIns="0" rtlCol="0" anchor="t"/>
-          <a:lstStyle/>
-          <a:p>
-            <a:pPr algn="r" indent="0" marL="0">
-              <a:buNone/>
-            </a:pPr>
-            <a:r>
-              <a:rPr lang="en-US" sz="1100" dirty="0">
-                <a:solidFill>
-                  <a:srgbClr val="636366"/>
-                </a:solidFill>
-                <a:latin typeface="Noto Sans KR" pitchFamily="34" charset="0"/>
-                <a:ea typeface="Noto Sans KR" pitchFamily="34" charset="-122"/>
-                <a:cs typeface="Noto Sans KR" pitchFamily="34" charset="-120"/>
-              </a:rPr>
-              <a:t>목표</a:t>
-            </a:r>
-            <a:endParaRPr lang="en-US" sz="1100" dirty="0"/>
-          </a:p>
-        </p:txBody>
-      </p:sp>
-      <p:sp>
-        <p:nvSpPr>
-          <p:cNvPr id="25" name="o166"/>
-          <p:cNvSpPr txBox="1"/>
-          <p:nvPr/>
-        </p:nvSpPr>
-        <p:spPr>
-          <a:xfrm>
-            <a:off x="9410700" y="2228850"/>
-            <a:ext cx="1905000" cy="381000"/>
-          </a:xfrm>
-          <a:prstGeom prst="rect">
-            <a:avLst/>
-          </a:prstGeom>
-          <a:noFill/>
-          <a:ln/>
-        </p:spPr>
-        <p:txBody>
-          <a:bodyPr wrap="square" lIns="0" tIns="0" rIns="0" bIns="0" rtlCol="0" anchor="t"/>
-          <a:lstStyle/>
-          <a:p>
-            <a:pPr algn="r" indent="0" marL="0">
-              <a:buNone/>
-            </a:pPr>
-            <a:r>
-              <a:rPr lang="en-US" sz="2600" b="1" dirty="0">
-                <a:solidFill>
-                  <a:srgbClr val="0A1F44"/>
+          <p:cNvPr id="61" name="o202"/>
+          <p:cNvSpPr/>
+          <p:nvPr/>
+        </p:nvSpPr>
+        <p:spPr>
+          <a:xfrm>
+            <a:off x="7886700" y="4000500"/>
+            <a:ext cx="3695700" cy="2247900"/>
+          </a:xfrm>
+          <a:prstGeom prst="roundRect">
+            <a:avLst>
+              <a:gd name="adj" fmla="val 8475"/>
+            </a:avLst>
+          </a:prstGeom>
+          <a:solidFill>
+            <a:srgbClr val="0A1F44"/>
+          </a:solidFill>
+          <a:ln/>
+        </p:spPr>
+      </p:sp>
+      <p:sp>
+        <p:nvSpPr>
+          <p:cNvPr id="62" name="o203"/>
+          <p:cNvSpPr txBox="1"/>
+          <p:nvPr/>
+        </p:nvSpPr>
+        <p:spPr>
+          <a:xfrm>
+            <a:off x="8191500" y="4229100"/>
+            <a:ext cx="3048000" cy="171450"/>
+          </a:xfrm>
+          <a:prstGeom prst="rect">
+            <a:avLst/>
+          </a:prstGeom>
+          <a:noFill/>
+          <a:ln/>
+        </p:spPr>
+        <p:txBody>
+          <a:bodyPr wrap="square" lIns="0" tIns="0" rIns="0" bIns="0" rtlCol="0" anchor="t"/>
+          <a:lstStyle/>
+          <a:p>
+            <a:pPr indent="0" marL="0">
+              <a:buNone/>
+            </a:pPr>
+            <a:r>
+              <a:rPr lang="en-US" sz="1300" dirty="0">
+                <a:solidFill>
+                  <a:srgbClr val="A9B8D0"/>
+                </a:solidFill>
+                <a:latin typeface="Noto Sans KR" pitchFamily="34" charset="0"/>
+                <a:ea typeface="Noto Sans KR" pitchFamily="34" charset="-122"/>
+                <a:cs typeface="Noto Sans KR" pitchFamily="34" charset="-120"/>
+              </a:rPr>
+              <a:t>종이 기반 처리</a:t>
+            </a:r>
+            <a:endParaRPr lang="en-US" sz="1300" dirty="0"/>
+          </a:p>
+        </p:txBody>
+      </p:sp>
+      <p:sp>
+        <p:nvSpPr>
+          <p:cNvPr id="63" name="o204"/>
+          <p:cNvSpPr txBox="1"/>
+          <p:nvPr/>
+        </p:nvSpPr>
+        <p:spPr>
+          <a:xfrm>
+            <a:off x="8191500" y="4476750"/>
+            <a:ext cx="3048000" cy="666750"/>
+          </a:xfrm>
+          <a:prstGeom prst="rect">
+            <a:avLst/>
+          </a:prstGeom>
+          <a:noFill/>
+          <a:ln/>
+        </p:spPr>
+        <p:txBody>
+          <a:bodyPr wrap="square" lIns="0" tIns="0" rIns="0" bIns="0" rtlCol="0" anchor="t"/>
+          <a:lstStyle/>
+          <a:p>
+            <a:pPr indent="0" marL="0">
+              <a:buNone/>
+            </a:pPr>
+            <a:r>
+              <a:rPr lang="en-US" sz="5200" b="1" dirty="0">
+                <a:solidFill>
+                  <a:srgbClr val="FFFFFF"/>
                 </a:solidFill>
                 <a:latin typeface="Inter" pitchFamily="34" charset="0"/>
                 <a:ea typeface="Inter" pitchFamily="34" charset="-122"/>
@@ -7627,159 +8825,59 @@
               </a:rPr>
               <a:t>100%</a:t>
             </a:r>
-            <a:endParaRPr lang="en-US" sz="2600" dirty="0"/>
-          </a:p>
-        </p:txBody>
-      </p:sp>
-      <p:sp>
-        <p:nvSpPr>
-          <p:cNvPr id="26" name="o167"/>
-          <p:cNvSpPr/>
-          <p:nvPr/>
-        </p:nvSpPr>
-        <p:spPr>
-          <a:xfrm>
-            <a:off x="609600" y="2933700"/>
-            <a:ext cx="5391150" cy="1181100"/>
-          </a:xfrm>
-          <a:prstGeom prst="roundRect">
-            <a:avLst>
-              <a:gd name="adj" fmla="val 16129"/>
-            </a:avLst>
-          </a:prstGeom>
-          <a:solidFill>
-            <a:srgbClr val="F5F5F7"/>
-          </a:solidFill>
-          <a:ln/>
-        </p:spPr>
-      </p:sp>
-      <p:sp>
-        <p:nvSpPr>
-          <p:cNvPr id="27" name="o168"/>
-          <p:cNvSpPr txBox="1"/>
-          <p:nvPr/>
-        </p:nvSpPr>
-        <p:spPr>
-          <a:xfrm>
-            <a:off x="876300" y="3124200"/>
-            <a:ext cx="1905000" cy="171450"/>
-          </a:xfrm>
-          <a:prstGeom prst="rect">
-            <a:avLst/>
-          </a:prstGeom>
-          <a:noFill/>
-          <a:ln/>
-        </p:spPr>
-        <p:txBody>
-          <a:bodyPr wrap="square" lIns="0" tIns="0" rIns="0" bIns="0" rtlCol="0" anchor="t"/>
-          <a:lstStyle/>
-          <a:p>
-            <a:pPr indent="0" marL="0">
-              <a:buNone/>
-            </a:pPr>
-            <a:r>
-              <a:rPr lang="en-US" sz="1100" b="1" dirty="0">
-                <a:solidFill>
-                  <a:srgbClr val="0A1F44"/>
-                </a:solidFill>
-                <a:latin typeface="Noto Sans KR" pitchFamily="34" charset="0"/>
-                <a:ea typeface="Noto Sans KR" pitchFamily="34" charset="-122"/>
-                <a:cs typeface="Noto Sans KR" pitchFamily="34" charset="-120"/>
-              </a:rPr>
-              <a:t>효율지표</a:t>
-            </a:r>
-            <a:endParaRPr lang="en-US" sz="1100" dirty="0"/>
-          </a:p>
-        </p:txBody>
-      </p:sp>
-      <p:sp>
-        <p:nvSpPr>
-          <p:cNvPr id="28" name="o169"/>
-          <p:cNvSpPr txBox="1"/>
-          <p:nvPr/>
-        </p:nvSpPr>
-        <p:spPr>
-          <a:xfrm>
-            <a:off x="4781550" y="3124200"/>
-            <a:ext cx="952500" cy="171450"/>
-          </a:xfrm>
-          <a:prstGeom prst="rect">
-            <a:avLst/>
-          </a:prstGeom>
-          <a:noFill/>
-          <a:ln/>
-        </p:spPr>
-        <p:txBody>
-          <a:bodyPr wrap="square" lIns="0" tIns="0" rIns="0" bIns="0" rtlCol="0" anchor="t"/>
-          <a:lstStyle/>
-          <a:p>
-            <a:pPr algn="r" indent="0" marL="0">
-              <a:buNone/>
-            </a:pPr>
-            <a:r>
-              <a:rPr lang="en-US" sz="1000" dirty="0">
-                <a:solidFill>
-                  <a:srgbClr val="636366"/>
-                </a:solidFill>
-                <a:latin typeface="Inter" pitchFamily="34" charset="0"/>
-                <a:ea typeface="Inter" pitchFamily="34" charset="-122"/>
-                <a:cs typeface="Inter" pitchFamily="34" charset="-120"/>
-              </a:rPr>
-              <a:t>현황 07</a:t>
-            </a:r>
-            <a:endParaRPr lang="en-US" sz="1000" dirty="0"/>
-          </a:p>
-        </p:txBody>
-      </p:sp>
-      <p:sp>
-        <p:nvSpPr>
-          <p:cNvPr id="29" name="o170"/>
-          <p:cNvSpPr txBox="1"/>
-          <p:nvPr/>
-        </p:nvSpPr>
-        <p:spPr>
-          <a:xfrm>
-            <a:off x="876300" y="3333750"/>
-            <a:ext cx="3429000" cy="285750"/>
-          </a:xfrm>
-          <a:prstGeom prst="rect">
-            <a:avLst/>
-          </a:prstGeom>
-          <a:noFill/>
-          <a:ln/>
-        </p:spPr>
-        <p:txBody>
-          <a:bodyPr wrap="square" lIns="0" tIns="0" rIns="0" bIns="0" rtlCol="0" anchor="t"/>
-          <a:lstStyle/>
-          <a:p>
-            <a:pPr indent="0" marL="0">
-              <a:buNone/>
-            </a:pPr>
-            <a:r>
-              <a:rPr lang="en-US" sz="1900" b="1" dirty="0">
-                <a:solidFill>
-                  <a:srgbClr val="1D1D1F"/>
-                </a:solidFill>
-                <a:latin typeface="Noto Sans KR" pitchFamily="34" charset="0"/>
-                <a:ea typeface="Noto Sans KR" pitchFamily="34" charset="-122"/>
-                <a:cs typeface="Noto Sans KR" pitchFamily="34" charset="-120"/>
-              </a:rPr>
-              <a:t>행정 소요시간 단축률</a:t>
-            </a:r>
-            <a:endParaRPr lang="en-US" sz="1900" dirty="0"/>
-          </a:p>
-        </p:txBody>
-      </p:sp>
-      <p:sp>
-        <p:nvSpPr>
-          <p:cNvPr id="30" name="o171"/>
-          <p:cNvSpPr txBox="1"/>
-          <p:nvPr/>
-        </p:nvSpPr>
-        <p:spPr>
-          <a:xfrm>
-            <a:off x="876300" y="3695700"/>
-            <a:ext cx="3429000" cy="190500"/>
+            <a:endParaRPr lang="en-US" sz="5200" dirty="0"/>
+          </a:p>
+        </p:txBody>
+      </p:sp>
+      <p:sp>
+        <p:nvSpPr>
+          <p:cNvPr id="64" name="o205"/>
+          <p:cNvSpPr txBox="1"/>
+          <p:nvPr/>
+        </p:nvSpPr>
+        <p:spPr>
+          <a:xfrm>
+            <a:off x="8191500" y="5257800"/>
+            <a:ext cx="3048000" cy="190500"/>
+          </a:xfrm>
+          <a:prstGeom prst="rect">
+            <a:avLst/>
+          </a:prstGeom>
+          <a:noFill/>
+          <a:ln/>
+        </p:spPr>
+        <p:txBody>
+          <a:bodyPr wrap="square" lIns="0" tIns="0" rIns="0" bIns="0" rtlCol="0" anchor="t"/>
+          <a:lstStyle/>
+          <a:p>
+            <a:pPr indent="0" marL="0">
+              <a:buNone/>
+            </a:pPr>
+            <a:r>
+              <a:rPr lang="en-US" sz="1300" b="1" dirty="0">
+                <a:solidFill>
+                  <a:srgbClr val="FFFFFF"/>
+                </a:solidFill>
+                <a:latin typeface="Noto Sans KR" pitchFamily="34" charset="0"/>
+                <a:ea typeface="Noto Sans KR" pitchFamily="34" charset="-122"/>
+                <a:cs typeface="Noto Sans KR" pitchFamily="34" charset="-120"/>
+              </a:rPr>
+              <a:t>연 94건 출력 · 서명 · 바인더 보관</a:t>
+            </a:r>
+            <a:endParaRPr lang="en-US" sz="1300" dirty="0"/>
+          </a:p>
+        </p:txBody>
+      </p:sp>
+      <p:sp>
+        <p:nvSpPr>
+          <p:cNvPr id="65" name="o206"/>
+          <p:cNvSpPr txBox="1"/>
+          <p:nvPr/>
+        </p:nvSpPr>
+        <p:spPr>
+          <a:xfrm>
+            <a:off x="8191500" y="5753100"/>
+            <a:ext cx="3048000" cy="171450"/>
           </a:xfrm>
           <a:prstGeom prst="rect">
             <a:avLst/>
@@ -7797,812 +8895,13 @@
             <a:r>
               <a:rPr lang="en-US" sz="1200" dirty="0">
                 <a:solidFill>
-                  <a:srgbClr val="636366"/>
-                </a:solidFill>
-                <a:latin typeface="Noto Sans KR" pitchFamily="34" charset="0"/>
-                <a:ea typeface="Noto Sans KR" pitchFamily="34" charset="-122"/>
-                <a:cs typeface="Noto Sans KR" pitchFamily="34" charset="-120"/>
-              </a:rPr>
-              <a:t>(수기 시간 − 플랫폼 시간) ÷ 수기 시간</a:t>
-            </a:r>
-            <a:endParaRPr lang="en-US" sz="1200" dirty="0"/>
-          </a:p>
-        </p:txBody>
-      </p:sp>
-      <p:sp>
-        <p:nvSpPr>
-          <p:cNvPr id="31" name="o172"/>
-          <p:cNvSpPr txBox="1"/>
-          <p:nvPr/>
-        </p:nvSpPr>
-        <p:spPr>
-          <a:xfrm>
-            <a:off x="4400550" y="3390900"/>
-            <a:ext cx="1333500" cy="152400"/>
-          </a:xfrm>
-          <a:prstGeom prst="rect">
-            <a:avLst/>
-          </a:prstGeom>
-          <a:noFill/>
-          <a:ln/>
-        </p:spPr>
-        <p:txBody>
-          <a:bodyPr wrap="square" lIns="0" tIns="0" rIns="0" bIns="0" rtlCol="0" anchor="t"/>
-          <a:lstStyle/>
-          <a:p>
-            <a:pPr algn="r" indent="0" marL="0">
-              <a:buNone/>
-            </a:pPr>
-            <a:r>
-              <a:rPr lang="en-US" sz="1100" dirty="0">
-                <a:solidFill>
-                  <a:srgbClr val="636366"/>
-                </a:solidFill>
-                <a:latin typeface="Noto Sans KR" pitchFamily="34" charset="0"/>
-                <a:ea typeface="Noto Sans KR" pitchFamily="34" charset="-122"/>
-                <a:cs typeface="Noto Sans KR" pitchFamily="34" charset="-120"/>
-              </a:rPr>
-              <a:t>목표</a:t>
-            </a:r>
-            <a:endParaRPr lang="en-US" sz="1100" dirty="0"/>
-          </a:p>
-        </p:txBody>
-      </p:sp>
-      <p:sp>
-        <p:nvSpPr>
-          <p:cNvPr id="32" name="o173"/>
-          <p:cNvSpPr txBox="1"/>
-          <p:nvPr/>
-        </p:nvSpPr>
-        <p:spPr>
-          <a:xfrm>
-            <a:off x="3829050" y="3562350"/>
-            <a:ext cx="1905000" cy="381000"/>
-          </a:xfrm>
-          <a:prstGeom prst="rect">
-            <a:avLst/>
-          </a:prstGeom>
-          <a:noFill/>
-          <a:ln/>
-        </p:spPr>
-        <p:txBody>
-          <a:bodyPr wrap="square" lIns="0" tIns="0" rIns="0" bIns="0" rtlCol="0" anchor="t"/>
-          <a:lstStyle/>
-          <a:p>
-            <a:pPr algn="r" indent="0" marL="0">
-              <a:buNone/>
-            </a:pPr>
-            <a:r>
-              <a:rPr lang="en-US" sz="2600" b="1" dirty="0">
-                <a:solidFill>
-                  <a:srgbClr val="0A1F44"/>
-                </a:solidFill>
-                <a:latin typeface="Inter" pitchFamily="34" charset="0"/>
-                <a:ea typeface="Inter" pitchFamily="34" charset="-122"/>
-                <a:cs typeface="Inter" pitchFamily="34" charset="-120"/>
-              </a:rPr>
-              <a:t>70% 이상</a:t>
-            </a:r>
-            <a:endParaRPr lang="en-US" sz="2600" dirty="0"/>
-          </a:p>
-        </p:txBody>
-      </p:sp>
-      <p:sp>
-        <p:nvSpPr>
-          <p:cNvPr id="33" name="o174"/>
-          <p:cNvSpPr/>
-          <p:nvPr/>
-        </p:nvSpPr>
-        <p:spPr>
-          <a:xfrm>
-            <a:off x="6191250" y="2933700"/>
-            <a:ext cx="5391150" cy="1181100"/>
-          </a:xfrm>
-          <a:prstGeom prst="roundRect">
-            <a:avLst>
-              <a:gd name="adj" fmla="val 16129"/>
-            </a:avLst>
-          </a:prstGeom>
-          <a:solidFill>
-            <a:srgbClr val="F5F5F7"/>
-          </a:solidFill>
-          <a:ln/>
-        </p:spPr>
-      </p:sp>
-      <p:sp>
-        <p:nvSpPr>
-          <p:cNvPr id="34" name="o175"/>
-          <p:cNvSpPr txBox="1"/>
-          <p:nvPr/>
-        </p:nvSpPr>
-        <p:spPr>
-          <a:xfrm>
-            <a:off x="6457950" y="3124200"/>
-            <a:ext cx="1905000" cy="171450"/>
-          </a:xfrm>
-          <a:prstGeom prst="rect">
-            <a:avLst/>
-          </a:prstGeom>
-          <a:noFill/>
-          <a:ln/>
-        </p:spPr>
-        <p:txBody>
-          <a:bodyPr wrap="square" lIns="0" tIns="0" rIns="0" bIns="0" rtlCol="0" anchor="t"/>
-          <a:lstStyle/>
-          <a:p>
-            <a:pPr indent="0" marL="0">
-              <a:buNone/>
-            </a:pPr>
-            <a:r>
-              <a:rPr lang="en-US" sz="1100" b="1" dirty="0">
-                <a:solidFill>
-                  <a:srgbClr val="0A1F44"/>
-                </a:solidFill>
-                <a:latin typeface="Noto Sans KR" pitchFamily="34" charset="0"/>
-                <a:ea typeface="Noto Sans KR" pitchFamily="34" charset="-122"/>
-                <a:cs typeface="Noto Sans KR" pitchFamily="34" charset="-120"/>
-              </a:rPr>
-              <a:t>인프라지표</a:t>
-            </a:r>
-            <a:endParaRPr lang="en-US" sz="1100" dirty="0"/>
-          </a:p>
-        </p:txBody>
-      </p:sp>
-      <p:sp>
-        <p:nvSpPr>
-          <p:cNvPr id="35" name="o176"/>
-          <p:cNvSpPr txBox="1"/>
-          <p:nvPr/>
-        </p:nvSpPr>
-        <p:spPr>
-          <a:xfrm>
-            <a:off x="10363200" y="3124200"/>
-            <a:ext cx="952500" cy="171450"/>
-          </a:xfrm>
-          <a:prstGeom prst="rect">
-            <a:avLst/>
-          </a:prstGeom>
-          <a:noFill/>
-          <a:ln/>
-        </p:spPr>
-        <p:txBody>
-          <a:bodyPr wrap="square" lIns="0" tIns="0" rIns="0" bIns="0" rtlCol="0" anchor="t"/>
-          <a:lstStyle/>
-          <a:p>
-            <a:pPr algn="r" indent="0" marL="0">
-              <a:buNone/>
-            </a:pPr>
-            <a:r>
-              <a:rPr lang="en-US" sz="1000" dirty="0">
-                <a:solidFill>
-                  <a:srgbClr val="636366"/>
-                </a:solidFill>
-                <a:latin typeface="Inter" pitchFamily="34" charset="0"/>
-                <a:ea typeface="Inter" pitchFamily="34" charset="-122"/>
-                <a:cs typeface="Inter" pitchFamily="34" charset="-120"/>
-              </a:rPr>
-              <a:t>전략 08</a:t>
-            </a:r>
-            <a:endParaRPr lang="en-US" sz="1000" dirty="0"/>
-          </a:p>
-        </p:txBody>
-      </p:sp>
-      <p:sp>
-        <p:nvSpPr>
-          <p:cNvPr id="36" name="o177"/>
-          <p:cNvSpPr txBox="1"/>
-          <p:nvPr/>
-        </p:nvSpPr>
-        <p:spPr>
-          <a:xfrm>
-            <a:off x="6457950" y="3333750"/>
-            <a:ext cx="3429000" cy="285750"/>
-          </a:xfrm>
-          <a:prstGeom prst="rect">
-            <a:avLst/>
-          </a:prstGeom>
-          <a:noFill/>
-          <a:ln/>
-        </p:spPr>
-        <p:txBody>
-          <a:bodyPr wrap="square" lIns="0" tIns="0" rIns="0" bIns="0" rtlCol="0" anchor="t"/>
-          <a:lstStyle/>
-          <a:p>
-            <a:pPr indent="0" marL="0">
-              <a:buNone/>
-            </a:pPr>
-            <a:r>
-              <a:rPr lang="en-US" sz="1900" b="1" dirty="0">
-                <a:solidFill>
-                  <a:srgbClr val="1D1D1F"/>
-                </a:solidFill>
-                <a:latin typeface="Noto Sans KR" pitchFamily="34" charset="0"/>
-                <a:ea typeface="Noto Sans KR" pitchFamily="34" charset="-122"/>
-                <a:cs typeface="Noto Sans KR" pitchFamily="34" charset="-120"/>
-              </a:rPr>
-              <a:t>플랫폼 구축 완성도</a:t>
-            </a:r>
-            <a:endParaRPr lang="en-US" sz="1900" dirty="0"/>
-          </a:p>
-        </p:txBody>
-      </p:sp>
-      <p:sp>
-        <p:nvSpPr>
-          <p:cNvPr id="37" name="o178"/>
-          <p:cNvSpPr txBox="1"/>
-          <p:nvPr/>
-        </p:nvSpPr>
-        <p:spPr>
-          <a:xfrm>
-            <a:off x="6457950" y="3695700"/>
-            <a:ext cx="3429000" cy="190500"/>
-          </a:xfrm>
-          <a:prstGeom prst="rect">
-            <a:avLst/>
-          </a:prstGeom>
-          <a:noFill/>
-          <a:ln/>
-        </p:spPr>
-        <p:txBody>
-          <a:bodyPr wrap="square" lIns="0" tIns="0" rIns="0" bIns="0" rtlCol="0" anchor="t"/>
-          <a:lstStyle/>
-          <a:p>
-            <a:pPr indent="0" marL="0">
-              <a:buNone/>
-            </a:pPr>
-            <a:r>
-              <a:rPr lang="en-US" sz="1200" dirty="0">
-                <a:solidFill>
-                  <a:srgbClr val="636366"/>
-                </a:solidFill>
-                <a:latin typeface="Noto Sans KR" pitchFamily="34" charset="0"/>
-                <a:ea typeface="Noto Sans KR" pitchFamily="34" charset="-122"/>
-                <a:cs typeface="Noto Sans KR" pitchFamily="34" charset="-120"/>
-              </a:rPr>
-              <a:t>정상 작동 기능 ÷ 계획 기능</a:t>
-            </a:r>
-            <a:endParaRPr lang="en-US" sz="1200" dirty="0"/>
-          </a:p>
-        </p:txBody>
-      </p:sp>
-      <p:sp>
-        <p:nvSpPr>
-          <p:cNvPr id="38" name="o179"/>
-          <p:cNvSpPr txBox="1"/>
-          <p:nvPr/>
-        </p:nvSpPr>
-        <p:spPr>
-          <a:xfrm>
-            <a:off x="9982200" y="3390900"/>
-            <a:ext cx="1333500" cy="152400"/>
-          </a:xfrm>
-          <a:prstGeom prst="rect">
-            <a:avLst/>
-          </a:prstGeom>
-          <a:noFill/>
-          <a:ln/>
-        </p:spPr>
-        <p:txBody>
-          <a:bodyPr wrap="square" lIns="0" tIns="0" rIns="0" bIns="0" rtlCol="0" anchor="t"/>
-          <a:lstStyle/>
-          <a:p>
-            <a:pPr algn="r" indent="0" marL="0">
-              <a:buNone/>
-            </a:pPr>
-            <a:r>
-              <a:rPr lang="en-US" sz="1100" dirty="0">
-                <a:solidFill>
-                  <a:srgbClr val="636366"/>
-                </a:solidFill>
-                <a:latin typeface="Noto Sans KR" pitchFamily="34" charset="0"/>
-                <a:ea typeface="Noto Sans KR" pitchFamily="34" charset="-122"/>
-                <a:cs typeface="Noto Sans KR" pitchFamily="34" charset="-120"/>
-              </a:rPr>
-              <a:t>목표</a:t>
-            </a:r>
-            <a:endParaRPr lang="en-US" sz="1100" dirty="0"/>
-          </a:p>
-        </p:txBody>
-      </p:sp>
-      <p:sp>
-        <p:nvSpPr>
-          <p:cNvPr id="39" name="o180"/>
-          <p:cNvSpPr txBox="1"/>
-          <p:nvPr/>
-        </p:nvSpPr>
-        <p:spPr>
-          <a:xfrm>
-            <a:off x="9410700" y="3562350"/>
-            <a:ext cx="1905000" cy="381000"/>
-          </a:xfrm>
-          <a:prstGeom prst="rect">
-            <a:avLst/>
-          </a:prstGeom>
-          <a:noFill/>
-          <a:ln/>
-        </p:spPr>
-        <p:txBody>
-          <a:bodyPr wrap="square" lIns="0" tIns="0" rIns="0" bIns="0" rtlCol="0" anchor="t"/>
-          <a:lstStyle/>
-          <a:p>
-            <a:pPr algn="r" indent="0" marL="0">
-              <a:buNone/>
-            </a:pPr>
-            <a:r>
-              <a:rPr lang="en-US" sz="2600" b="1" dirty="0">
-                <a:solidFill>
-                  <a:srgbClr val="0A1F44"/>
-                </a:solidFill>
-                <a:latin typeface="Inter" pitchFamily="34" charset="0"/>
-                <a:ea typeface="Inter" pitchFamily="34" charset="-122"/>
-                <a:cs typeface="Inter" pitchFamily="34" charset="-120"/>
-              </a:rPr>
-              <a:t>6 / 6</a:t>
-            </a:r>
-            <a:endParaRPr lang="en-US" sz="2600" dirty="0"/>
-          </a:p>
-        </p:txBody>
-      </p:sp>
-      <p:sp>
-        <p:nvSpPr>
-          <p:cNvPr id="40" name="o181"/>
-          <p:cNvSpPr txBox="1"/>
-          <p:nvPr/>
-        </p:nvSpPr>
-        <p:spPr>
-          <a:xfrm>
-            <a:off x="609600" y="4381500"/>
-            <a:ext cx="2857500" cy="190500"/>
-          </a:xfrm>
-          <a:prstGeom prst="rect">
-            <a:avLst/>
-          </a:prstGeom>
-          <a:noFill/>
-          <a:ln/>
-        </p:spPr>
-        <p:txBody>
-          <a:bodyPr wrap="square" lIns="0" tIns="0" rIns="0" bIns="0" rtlCol="0" anchor="t"/>
-          <a:lstStyle/>
-          <a:p>
-            <a:pPr indent="0" marL="0">
-              <a:buNone/>
-            </a:pPr>
-            <a:r>
-              <a:rPr lang="en-US" sz="1300" b="1" dirty="0">
-                <a:solidFill>
-                  <a:srgbClr val="636366"/>
-                </a:solidFill>
-                <a:latin typeface="Noto Sans KR" pitchFamily="34" charset="0"/>
-                <a:ea typeface="Noto Sans KR" pitchFamily="34" charset="-122"/>
-                <a:cs typeface="Noto Sans KR" pitchFamily="34" charset="-120"/>
-              </a:rPr>
-              <a:t>자료수집</a:t>
-            </a:r>
-            <a:endParaRPr lang="en-US" sz="1300" dirty="0"/>
-          </a:p>
-        </p:txBody>
-      </p:sp>
-      <p:sp>
-        <p:nvSpPr>
-          <p:cNvPr id="41" name="o182"/>
-          <p:cNvSpPr/>
-          <p:nvPr/>
-        </p:nvSpPr>
-        <p:spPr>
-          <a:xfrm>
-            <a:off x="609600" y="4648200"/>
-            <a:ext cx="3530600" cy="1600200"/>
-          </a:xfrm>
-          <a:prstGeom prst="roundRect">
-            <a:avLst>
-              <a:gd name="adj" fmla="val 11905"/>
-            </a:avLst>
-          </a:prstGeom>
-          <a:solidFill>
-            <a:srgbClr val="F5F5F7"/>
-          </a:solidFill>
-          <a:ln/>
-        </p:spPr>
-      </p:sp>
-      <p:sp>
-        <p:nvSpPr>
-          <p:cNvPr id="42" name="o183"/>
-          <p:cNvSpPr txBox="1"/>
-          <p:nvPr/>
-        </p:nvSpPr>
-        <p:spPr>
-          <a:xfrm>
-            <a:off x="876300" y="4857750"/>
-            <a:ext cx="2997200" cy="171450"/>
-          </a:xfrm>
-          <a:prstGeom prst="rect">
-            <a:avLst/>
-          </a:prstGeom>
-          <a:noFill/>
-          <a:ln/>
-        </p:spPr>
-        <p:txBody>
-          <a:bodyPr wrap="square" lIns="0" tIns="0" rIns="0" bIns="0" rtlCol="0" anchor="t"/>
-          <a:lstStyle/>
-          <a:p>
-            <a:pPr indent="0" marL="0">
-              <a:buNone/>
-            </a:pPr>
-            <a:r>
-              <a:rPr lang="en-US" sz="1200" dirty="0">
-                <a:solidFill>
-                  <a:srgbClr val="636366"/>
-                </a:solidFill>
-                <a:latin typeface="Noto Sans KR" pitchFamily="34" charset="0"/>
-                <a:ea typeface="Noto Sans KR" pitchFamily="34" charset="-122"/>
-                <a:cs typeface="Noto Sans KR" pitchFamily="34" charset="-120"/>
-              </a:rPr>
-              <a:t>개선 전 · 대조 전수조사</a:t>
-            </a:r>
-            <a:endParaRPr lang="en-US" sz="1200" dirty="0"/>
-          </a:p>
-        </p:txBody>
-      </p:sp>
-      <p:sp>
-        <p:nvSpPr>
-          <p:cNvPr id="43" name="o184"/>
-          <p:cNvSpPr txBox="1"/>
-          <p:nvPr/>
-        </p:nvSpPr>
-        <p:spPr>
-          <a:xfrm>
-            <a:off x="876300" y="5105400"/>
-            <a:ext cx="2997200" cy="419100"/>
-          </a:xfrm>
-          <a:prstGeom prst="rect">
-            <a:avLst/>
-          </a:prstGeom>
-          <a:noFill/>
-          <a:ln/>
-        </p:spPr>
-        <p:txBody>
-          <a:bodyPr wrap="square" lIns="0" tIns="0" rIns="0" bIns="0" rtlCol="0" anchor="t"/>
-          <a:lstStyle/>
-          <a:p>
-            <a:pPr indent="0" marL="0">
-              <a:buNone/>
-            </a:pPr>
-            <a:r>
-              <a:rPr lang="en-US" sz="3000" b="1" dirty="0">
-                <a:solidFill>
-                  <a:srgbClr val="1D1D1F"/>
-                </a:solidFill>
-                <a:latin typeface="Inter" pitchFamily="34" charset="0"/>
-                <a:ea typeface="Inter" pitchFamily="34" charset="-122"/>
-                <a:cs typeface="Inter" pitchFamily="34" charset="-120"/>
-              </a:rPr>
-              <a:t>2025.01–12</a:t>
-            </a:r>
-            <a:endParaRPr lang="en-US" sz="3000" dirty="0"/>
-          </a:p>
-        </p:txBody>
-      </p:sp>
-      <p:sp>
-        <p:nvSpPr>
-          <p:cNvPr id="44" name="o185"/>
-          <p:cNvSpPr txBox="1"/>
-          <p:nvPr/>
-        </p:nvSpPr>
-        <p:spPr>
-          <a:xfrm>
-            <a:off x="876300" y="5676900"/>
-            <a:ext cx="2997200" cy="381000"/>
-          </a:xfrm>
-          <a:prstGeom prst="rect">
-            <a:avLst/>
-          </a:prstGeom>
-          <a:noFill/>
-          <a:ln/>
-        </p:spPr>
-        <p:txBody>
-          <a:bodyPr wrap="square" lIns="0" tIns="0" rIns="0" bIns="0" rtlCol="0" anchor="t"/>
-          <a:lstStyle/>
-          <a:p>
-            <a:pPr indent="0" marL="0">
-              <a:lnSpc>
-                <a:spcPct val="135000"/>
-              </a:lnSpc>
-              <a:buNone/>
-            </a:pPr>
-            <a:r>
-              <a:rPr lang="en-US" sz="1200" dirty="0">
-                <a:solidFill>
-                  <a:srgbClr val="636366"/>
-                </a:solidFill>
-                <a:latin typeface="Noto Sans KR" pitchFamily="34" charset="0"/>
-                <a:ea typeface="Noto Sans KR" pitchFamily="34" charset="-122"/>
-                <a:cs typeface="Noto Sans KR" pitchFamily="34" charset="-120"/>
-              </a:rPr>
-              <a:t>입사자 명단 ↔ 교육일지 106명 · 출력 업무 94건</a:t>
-            </a:r>
-            <a:endParaRPr lang="en-US" sz="1200" dirty="0"/>
-          </a:p>
-        </p:txBody>
-      </p:sp>
-      <p:sp>
-        <p:nvSpPr>
-          <p:cNvPr id="45" name="o186"/>
-          <p:cNvSpPr/>
-          <p:nvPr/>
-        </p:nvSpPr>
-        <p:spPr>
-          <a:xfrm>
-            <a:off x="4330700" y="4648200"/>
-            <a:ext cx="3530600" cy="1600200"/>
-          </a:xfrm>
-          <a:prstGeom prst="roundRect">
-            <a:avLst>
-              <a:gd name="adj" fmla="val 11905"/>
-            </a:avLst>
-          </a:prstGeom>
-          <a:solidFill>
-            <a:srgbClr val="F5F5F7"/>
-          </a:solidFill>
-          <a:ln/>
-        </p:spPr>
-      </p:sp>
-      <p:sp>
-        <p:nvSpPr>
-          <p:cNvPr id="46" name="o187"/>
-          <p:cNvSpPr txBox="1"/>
-          <p:nvPr/>
-        </p:nvSpPr>
-        <p:spPr>
-          <a:xfrm>
-            <a:off x="4597400" y="4857750"/>
-            <a:ext cx="2997200" cy="171450"/>
-          </a:xfrm>
-          <a:prstGeom prst="rect">
-            <a:avLst/>
-          </a:prstGeom>
-          <a:noFill/>
-          <a:ln/>
-        </p:spPr>
-        <p:txBody>
-          <a:bodyPr wrap="square" lIns="0" tIns="0" rIns="0" bIns="0" rtlCol="0" anchor="t"/>
-          <a:lstStyle/>
-          <a:p>
-            <a:pPr indent="0" marL="0">
-              <a:buNone/>
-            </a:pPr>
-            <a:r>
-              <a:rPr lang="en-US" sz="1200" dirty="0">
-                <a:solidFill>
-                  <a:srgbClr val="636366"/>
-                </a:solidFill>
-                <a:latin typeface="Noto Sans KR" pitchFamily="34" charset="0"/>
-                <a:ea typeface="Noto Sans KR" pitchFamily="34" charset="-122"/>
-                <a:cs typeface="Noto Sans KR" pitchFamily="34" charset="-120"/>
-              </a:rPr>
-              <a:t>개선 전 · 직접 관찰</a:t>
-            </a:r>
-            <a:endParaRPr lang="en-US" sz="1200" dirty="0"/>
-          </a:p>
-        </p:txBody>
-      </p:sp>
-      <p:sp>
-        <p:nvSpPr>
-          <p:cNvPr id="47" name="o188"/>
-          <p:cNvSpPr txBox="1"/>
-          <p:nvPr/>
-        </p:nvSpPr>
-        <p:spPr>
-          <a:xfrm>
-            <a:off x="4597400" y="5105400"/>
-            <a:ext cx="2997200" cy="419100"/>
-          </a:xfrm>
-          <a:prstGeom prst="rect">
-            <a:avLst/>
-          </a:prstGeom>
-          <a:noFill/>
-          <a:ln/>
-        </p:spPr>
-        <p:txBody>
-          <a:bodyPr wrap="square" lIns="0" tIns="0" rIns="0" bIns="0" rtlCol="0" anchor="t"/>
-          <a:lstStyle/>
-          <a:p>
-            <a:pPr indent="0" marL="0">
-              <a:buNone/>
-            </a:pPr>
-            <a:r>
-              <a:rPr lang="en-US" sz="3000" b="1" dirty="0">
-                <a:solidFill>
-                  <a:srgbClr val="1D1D1F"/>
-                </a:solidFill>
-                <a:latin typeface="Inter" pitchFamily="34" charset="0"/>
-                <a:ea typeface="Inter" pitchFamily="34" charset="-122"/>
-                <a:cs typeface="Inter" pitchFamily="34" charset="-120"/>
-              </a:rPr>
-              <a:t>2025.01</a:t>
-            </a:r>
-            <a:endParaRPr lang="en-US" sz="3000" dirty="0"/>
-          </a:p>
-        </p:txBody>
-      </p:sp>
-      <p:sp>
-        <p:nvSpPr>
-          <p:cNvPr id="48" name="o189"/>
-          <p:cNvSpPr txBox="1"/>
-          <p:nvPr/>
-        </p:nvSpPr>
-        <p:spPr>
-          <a:xfrm>
-            <a:off x="4597400" y="5676900"/>
-            <a:ext cx="2997200" cy="381000"/>
-          </a:xfrm>
-          <a:prstGeom prst="rect">
-            <a:avLst/>
-          </a:prstGeom>
-          <a:noFill/>
-          <a:ln/>
-        </p:spPr>
-        <p:txBody>
-          <a:bodyPr wrap="square" lIns="0" tIns="0" rIns="0" bIns="0" rtlCol="0" anchor="t"/>
-          <a:lstStyle/>
-          <a:p>
-            <a:pPr indent="0" marL="0">
-              <a:lnSpc>
-                <a:spcPct val="135000"/>
-              </a:lnSpc>
-              <a:buNone/>
-            </a:pPr>
-            <a:r>
-              <a:rPr lang="en-US" sz="1200" dirty="0">
-                <a:solidFill>
-                  <a:srgbClr val="636366"/>
-                </a:solidFill>
-                <a:latin typeface="Noto Sans KR" pitchFamily="34" charset="0"/>
-                <a:ea typeface="Noto Sans KR" pitchFamily="34" charset="-122"/>
-                <a:cs typeface="Noto Sans KR" pitchFamily="34" charset="-120"/>
-              </a:rPr>
-              <a:t>세부 행동 단위별 소요시간 실측 (Time Study)</a:t>
-            </a:r>
-            <a:endParaRPr lang="en-US" sz="1200" dirty="0"/>
-          </a:p>
-        </p:txBody>
-      </p:sp>
-      <p:sp>
-        <p:nvSpPr>
-          <p:cNvPr id="49" name="o190"/>
-          <p:cNvSpPr/>
-          <p:nvPr/>
-        </p:nvSpPr>
-        <p:spPr>
-          <a:xfrm>
-            <a:off x="8051800" y="4648200"/>
-            <a:ext cx="3530600" cy="1600200"/>
-          </a:xfrm>
-          <a:prstGeom prst="roundRect">
-            <a:avLst>
-              <a:gd name="adj" fmla="val 11905"/>
-            </a:avLst>
-          </a:prstGeom>
-          <a:solidFill>
-            <a:srgbClr val="F5F5F7"/>
-          </a:solidFill>
-          <a:ln/>
-        </p:spPr>
-      </p:sp>
-      <p:sp>
-        <p:nvSpPr>
-          <p:cNvPr id="50" name="o191"/>
-          <p:cNvSpPr txBox="1"/>
-          <p:nvPr/>
-        </p:nvSpPr>
-        <p:spPr>
-          <a:xfrm>
-            <a:off x="8318500" y="4857750"/>
-            <a:ext cx="2997200" cy="171450"/>
-          </a:xfrm>
-          <a:prstGeom prst="rect">
-            <a:avLst/>
-          </a:prstGeom>
-          <a:noFill/>
-          <a:ln/>
-        </p:spPr>
-        <p:txBody>
-          <a:bodyPr wrap="square" lIns="0" tIns="0" rIns="0" bIns="0" rtlCol="0" anchor="t"/>
-          <a:lstStyle/>
-          <a:p>
-            <a:pPr indent="0" marL="0">
-              <a:buNone/>
-            </a:pPr>
-            <a:r>
-              <a:rPr lang="en-US" sz="1200" dirty="0">
-                <a:solidFill>
-                  <a:srgbClr val="636366"/>
-                </a:solidFill>
-                <a:latin typeface="Noto Sans KR" pitchFamily="34" charset="0"/>
-                <a:ea typeface="Noto Sans KR" pitchFamily="34" charset="-122"/>
-                <a:cs typeface="Noto Sans KR" pitchFamily="34" charset="-120"/>
-              </a:rPr>
-              <a:t>개선 후 · 플랫폼 DB</a:t>
-            </a:r>
-            <a:endParaRPr lang="en-US" sz="1200" dirty="0"/>
-          </a:p>
-        </p:txBody>
-      </p:sp>
-      <p:sp>
-        <p:nvSpPr>
-          <p:cNvPr id="51" name="o192"/>
-          <p:cNvSpPr txBox="1"/>
-          <p:nvPr/>
-        </p:nvSpPr>
-        <p:spPr>
-          <a:xfrm>
-            <a:off x="8318500" y="5105400"/>
-            <a:ext cx="2997200" cy="419100"/>
-          </a:xfrm>
-          <a:prstGeom prst="rect">
-            <a:avLst/>
-          </a:prstGeom>
-          <a:noFill/>
-          <a:ln/>
-        </p:spPr>
-        <p:txBody>
-          <a:bodyPr wrap="square" lIns="0" tIns="0" rIns="0" bIns="0" rtlCol="0" anchor="t"/>
-          <a:lstStyle/>
-          <a:p>
-            <a:pPr indent="0" marL="0">
-              <a:buNone/>
-            </a:pPr>
-            <a:r>
-              <a:rPr lang="en-US" sz="3000" b="1" dirty="0">
-                <a:solidFill>
-                  <a:srgbClr val="1D1D1F"/>
-                </a:solidFill>
-                <a:latin typeface="Inter" pitchFamily="34" charset="0"/>
-                <a:ea typeface="Inter" pitchFamily="34" charset="-122"/>
-                <a:cs typeface="Inter" pitchFamily="34" charset="-120"/>
-              </a:rPr>
-              <a:t>2026.05–07</a:t>
-            </a:r>
-            <a:endParaRPr lang="en-US" sz="3000" dirty="0"/>
-          </a:p>
-        </p:txBody>
-      </p:sp>
-      <p:sp>
-        <p:nvSpPr>
-          <p:cNvPr id="52" name="o193"/>
-          <p:cNvSpPr txBox="1"/>
-          <p:nvPr/>
-        </p:nvSpPr>
-        <p:spPr>
-          <a:xfrm>
-            <a:off x="8318500" y="5676900"/>
-            <a:ext cx="2997200" cy="381000"/>
-          </a:xfrm>
-          <a:prstGeom prst="rect">
-            <a:avLst/>
-          </a:prstGeom>
-          <a:noFill/>
-          <a:ln/>
-        </p:spPr>
-        <p:txBody>
-          <a:bodyPr wrap="square" lIns="0" tIns="0" rIns="0" bIns="0" rtlCol="0" anchor="t"/>
-          <a:lstStyle/>
-          <a:p>
-            <a:pPr indent="0" marL="0">
-              <a:lnSpc>
-                <a:spcPct val="135000"/>
-              </a:lnSpc>
-              <a:buNone/>
-            </a:pPr>
-            <a:r>
-              <a:rPr lang="en-US" sz="1200" dirty="0">
-                <a:solidFill>
-                  <a:srgbClr val="636366"/>
-                </a:solidFill>
-                <a:latin typeface="Noto Sans KR" pitchFamily="34" charset="0"/>
-                <a:ea typeface="Noto Sans KR" pitchFamily="34" charset="-122"/>
-                <a:cs typeface="Noto Sans KR" pitchFamily="34" charset="-120"/>
-              </a:rPr>
-              <a:t>교육 33건 · 디지털 업무 52건 자동 집계</a:t>
+                  <a:srgbClr val="A9B8D0"/>
+                </a:solidFill>
+                <a:latin typeface="Noto Sans KR" pitchFamily="34" charset="0"/>
+                <a:ea typeface="Noto Sans KR" pitchFamily="34" charset="-122"/>
+                <a:cs typeface="Noto Sans KR" pitchFamily="34" charset="-120"/>
+              </a:rPr>
+              <a:t>기준값 → 지표 ② 페이퍼리스 전환율</a:t>
             </a:r>
             <a:endParaRPr lang="en-US" sz="1200" dirty="0"/>
           </a:p>
@@ -8635,7 +8934,7 @@
       </p:grpSpPr>
       <p:sp>
         <p:nvSpPr>
-          <p:cNvPr id="2" name="o194"/>
+          <p:cNvPr id="2" name="o207"/>
           <p:cNvSpPr txBox="1"/>
           <p:nvPr/>
         </p:nvSpPr>
@@ -8666,7 +8965,7 @@
                 <a:ea typeface="Noto Sans KR" pitchFamily="34" charset="-122"/>
                 <a:cs typeface="Noto Sans KR" pitchFamily="34" charset="-120"/>
               </a:rPr>
-              <a:t>PLAN · 현황 분석 ①</a:t>
+              <a:t>PLAN · 현황 분석 ②</a:t>
             </a:r>
             <a:endParaRPr lang="en-US" sz="1000" dirty="0"/>
           </a:p>
@@ -8674,7 +8973,7 @@
       </p:sp>
       <p:sp>
         <p:nvSpPr>
-          <p:cNvPr id="3" name="o195"/>
+          <p:cNvPr id="3" name="o208"/>
           <p:cNvSpPr txBox="1"/>
           <p:nvPr/>
         </p:nvSpPr>
@@ -8713,7 +9012,7 @@
       </p:sp>
       <p:sp>
         <p:nvSpPr>
-          <p:cNvPr id="4" name="o196"/>
+          <p:cNvPr id="4" name="o209"/>
           <p:cNvSpPr/>
           <p:nvPr/>
         </p:nvSpPr>
@@ -8733,7 +9032,7 @@
       </p:sp>
       <p:sp>
         <p:nvSpPr>
-          <p:cNvPr id="5" name="o197"/>
+          <p:cNvPr id="5" name="o210"/>
           <p:cNvSpPr txBox="1"/>
           <p:nvPr/>
         </p:nvSpPr>
@@ -8772,7 +9071,7 @@
       </p:sp>
       <p:sp>
         <p:nvSpPr>
-          <p:cNvPr id="6" name="o198"/>
+          <p:cNvPr id="6" name="o211"/>
           <p:cNvSpPr txBox="1"/>
           <p:nvPr/>
         </p:nvSpPr>
@@ -8811,7 +9110,7 @@
       </p:sp>
       <p:sp>
         <p:nvSpPr>
-          <p:cNvPr id="7" name="o199"/>
+          <p:cNvPr id="7" name="o212"/>
           <p:cNvSpPr txBox="1"/>
           <p:nvPr/>
         </p:nvSpPr>
@@ -8850,7 +9149,7 @@
       </p:sp>
       <p:sp>
         <p:nvSpPr>
-          <p:cNvPr id="8" name="o200"/>
+          <p:cNvPr id="8" name="o213"/>
           <p:cNvSpPr txBox="1"/>
           <p:nvPr/>
         </p:nvSpPr>
@@ -8881,7 +9180,7 @@
                 <a:ea typeface="Noto Sans KR" pitchFamily="34" charset="-122"/>
                 <a:cs typeface="Noto Sans KR" pitchFamily="34" charset="-120"/>
               </a:rPr>
-              <a:t>모든 기록이 종이에 있어, 교육 6건 중 1건이 누락됐다</a:t>
+              <a:t>교육 1건에 33분 48초, 그중 78%는 기다림과 이동이었다</a:t>
             </a:r>
             <a:endParaRPr lang="en-US" sz="2800" dirty="0"/>
           </a:p>
@@ -8889,7 +9188,7 @@
       </p:sp>
       <p:sp>
         <p:nvSpPr>
-          <p:cNvPr id="9" name="o201"/>
+          <p:cNvPr id="9" name="o214"/>
           <p:cNvSpPr txBox="1"/>
           <p:nvPr/>
         </p:nvSpPr>
@@ -8920,7 +9219,7 @@
                 <a:ea typeface="Noto Sans KR" pitchFamily="34" charset="-122"/>
                 <a:cs typeface="Noto Sans KR" pitchFamily="34" charset="-120"/>
               </a:rPr>
-              <a:t>2025년 1–12월 신규 입사자 106명 교육일지 대조 전수조사</a:t>
+              <a:t>2025년 1월 세부 행동 단위별 소요시간 실측 (교육 진행 시간 제외)</a:t>
             </a:r>
             <a:endParaRPr lang="en-US" sz="1500" dirty="0"/>
           </a:p>
@@ -8928,7 +9227,7 @@
       </p:sp>
       <p:sp>
         <p:nvSpPr>
-          <p:cNvPr id="10" name="o202"/>
+          <p:cNvPr id="10" name="o215"/>
           <p:cNvSpPr txBox="1"/>
           <p:nvPr/>
         </p:nvSpPr>
@@ -8967,7 +9266,7 @@
       </p:sp>
       <p:sp>
         <p:nvSpPr>
-          <p:cNvPr id="11" name="o203"/>
+          <p:cNvPr id="11" name="o216"/>
           <p:cNvSpPr txBox="1"/>
           <p:nvPr/>
         </p:nvSpPr>
@@ -9006,18 +9305,157 @@
       </p:sp>
       <p:sp>
         <p:nvSpPr>
-          <p:cNvPr id="12" name="o204"/>
+          <p:cNvPr id="12" name="o217"/>
           <p:cNvSpPr/>
           <p:nvPr/>
         </p:nvSpPr>
         <p:spPr>
           <a:xfrm>
             <a:off x="609600" y="1600200"/>
-            <a:ext cx="7086600" cy="4648200"/>
+            <a:ext cx="3530600" cy="2095500"/>
           </a:xfrm>
           <a:prstGeom prst="roundRect">
             <a:avLst>
-              <a:gd name="adj" fmla="val 4098"/>
+              <a:gd name="adj" fmla="val 10909"/>
+            </a:avLst>
+          </a:prstGeom>
+          <a:solidFill>
+            <a:srgbClr val="0A1F44"/>
+          </a:solidFill>
+          <a:ln/>
+        </p:spPr>
+      </p:sp>
+      <p:sp>
+        <p:nvSpPr>
+          <p:cNvPr id="13" name="o218"/>
+          <p:cNvSpPr txBox="1"/>
+          <p:nvPr/>
+        </p:nvSpPr>
+        <p:spPr>
+          <a:xfrm>
+            <a:off x="914400" y="1847850"/>
+            <a:ext cx="2921000" cy="190500"/>
+          </a:xfrm>
+          <a:prstGeom prst="rect">
+            <a:avLst/>
+          </a:prstGeom>
+          <a:noFill/>
+          <a:ln/>
+        </p:spPr>
+        <p:txBody>
+          <a:bodyPr wrap="square" lIns="0" tIns="0" rIns="0" bIns="0" rtlCol="0" anchor="t"/>
+          <a:lstStyle/>
+          <a:p>
+            <a:pPr indent="0" marL="0">
+              <a:buNone/>
+            </a:pPr>
+            <a:r>
+              <a:rPr lang="en-US" sz="1300" dirty="0">
+                <a:solidFill>
+                  <a:srgbClr val="A9B8D0"/>
+                </a:solidFill>
+                <a:latin typeface="Noto Sans KR" pitchFamily="34" charset="0"/>
+                <a:ea typeface="Noto Sans KR" pitchFamily="34" charset="-122"/>
+                <a:cs typeface="Noto Sans KR" pitchFamily="34" charset="-120"/>
+              </a:rPr>
+              <a:t>특별안전보건교육 1건</a:t>
+            </a:r>
+            <a:endParaRPr lang="en-US" sz="1300" dirty="0"/>
+          </a:p>
+        </p:txBody>
+      </p:sp>
+      <p:sp>
+        <p:nvSpPr>
+          <p:cNvPr id="14" name="o219"/>
+          <p:cNvSpPr txBox="1"/>
+          <p:nvPr/>
+        </p:nvSpPr>
+        <p:spPr>
+          <a:xfrm>
+            <a:off x="914400" y="2152650"/>
+            <a:ext cx="3149600" cy="762000"/>
+          </a:xfrm>
+          <a:prstGeom prst="rect">
+            <a:avLst/>
+          </a:prstGeom>
+          <a:noFill/>
+          <a:ln/>
+        </p:spPr>
+        <p:txBody>
+          <a:bodyPr wrap="square" lIns="0" tIns="0" rIns="0" bIns="0" rtlCol="0" anchor="t"/>
+          <a:lstStyle/>
+          <a:p>
+            <a:pPr indent="0" marL="0">
+              <a:buNone/>
+            </a:pPr>
+            <a:r>
+              <a:rPr lang="en-US" sz="4400" b="1" dirty="0">
+                <a:solidFill>
+                  <a:srgbClr val="FFFFFF"/>
+                </a:solidFill>
+                <a:latin typeface="Inter" pitchFamily="34" charset="0"/>
+                <a:ea typeface="Inter" pitchFamily="34" charset="-122"/>
+                <a:cs typeface="Inter" pitchFamily="34" charset="-120"/>
+              </a:rPr>
+              <a:t>33분 48초</a:t>
+            </a:r>
+            <a:endParaRPr lang="en-US" sz="4400" dirty="0"/>
+          </a:p>
+        </p:txBody>
+      </p:sp>
+      <p:sp>
+        <p:nvSpPr>
+          <p:cNvPr id="15" name="o220"/>
+          <p:cNvSpPr txBox="1"/>
+          <p:nvPr/>
+        </p:nvSpPr>
+        <p:spPr>
+          <a:xfrm>
+            <a:off x="914400" y="3143250"/>
+            <a:ext cx="2921000" cy="342900"/>
+          </a:xfrm>
+          <a:prstGeom prst="rect">
+            <a:avLst/>
+          </a:prstGeom>
+          <a:noFill/>
+          <a:ln/>
+        </p:spPr>
+        <p:txBody>
+          <a:bodyPr wrap="square" lIns="0" tIns="0" rIns="0" bIns="0" rtlCol="0" anchor="t"/>
+          <a:lstStyle/>
+          <a:p>
+            <a:pPr indent="0" marL="0">
+              <a:buNone/>
+            </a:pPr>
+            <a:r>
+              <a:rPr lang="en-US" sz="1200" dirty="0">
+                <a:solidFill>
+                  <a:srgbClr val="A9B8D0"/>
+                </a:solidFill>
+                <a:latin typeface="Noto Sans KR" pitchFamily="34" charset="0"/>
+                <a:ea typeface="Noto Sans KR" pitchFamily="34" charset="-122"/>
+                <a:cs typeface="Noto Sans KR" pitchFamily="34" charset="-120"/>
+              </a:rPr>
+              <a:t>작성 · 서명 · 제출 · 결재 · 보관</a:t>
+            </a:r>
+            <a:endParaRPr lang="en-US" sz="1200" dirty="0"/>
+          </a:p>
+        </p:txBody>
+      </p:sp>
+      <p:sp>
+        <p:nvSpPr>
+          <p:cNvPr id="16" name="o221"/>
+          <p:cNvSpPr/>
+          <p:nvPr/>
+        </p:nvSpPr>
+        <p:spPr>
+          <a:xfrm>
+            <a:off x="4330700" y="1600200"/>
+            <a:ext cx="3530600" cy="2095500"/>
+          </a:xfrm>
+          <a:prstGeom prst="roundRect">
+            <a:avLst>
+              <a:gd name="adj" fmla="val 10909"/>
             </a:avLst>
           </a:prstGeom>
           <a:solidFill>
@@ -9028,239 +9466,331 @@
       </p:sp>
       <p:sp>
         <p:nvSpPr>
-          <p:cNvPr id="13" name="o205"/>
-          <p:cNvSpPr txBox="1"/>
-          <p:nvPr/>
-        </p:nvSpPr>
-        <p:spPr>
-          <a:xfrm>
-            <a:off x="914400" y="1828800"/>
-            <a:ext cx="3810000" cy="209550"/>
-          </a:xfrm>
-          <a:prstGeom prst="rect">
-            <a:avLst/>
-          </a:prstGeom>
-          <a:noFill/>
-          <a:ln/>
-        </p:spPr>
-        <p:txBody>
-          <a:bodyPr wrap="square" lIns="0" tIns="0" rIns="0" bIns="0" rtlCol="0" anchor="t"/>
-          <a:lstStyle/>
-          <a:p>
-            <a:pPr indent="0" marL="0">
-              <a:buNone/>
-            </a:pPr>
-            <a:r>
-              <a:rPr lang="en-US" sz="1500" b="1" dirty="0">
-                <a:solidFill>
-                  <a:srgbClr val="1D1D1F"/>
-                </a:solidFill>
-                <a:latin typeface="Noto Sans KR" pitchFamily="34" charset="0"/>
-                <a:ea typeface="Noto Sans KR" pitchFamily="34" charset="-122"/>
-                <a:cs typeface="Noto Sans KR" pitchFamily="34" charset="-120"/>
-              </a:rPr>
-              <a:t>월별 법정교육 이행률</a:t>
-            </a:r>
-            <a:endParaRPr lang="en-US" sz="1500" dirty="0"/>
-          </a:p>
-        </p:txBody>
-      </p:sp>
-      <p:sp>
-        <p:nvSpPr>
-          <p:cNvPr id="14" name="o206"/>
-          <p:cNvSpPr txBox="1"/>
-          <p:nvPr/>
-        </p:nvSpPr>
-        <p:spPr>
-          <a:xfrm>
-            <a:off x="4762500" y="1847850"/>
-            <a:ext cx="2667000" cy="190500"/>
-          </a:xfrm>
-          <a:prstGeom prst="rect">
-            <a:avLst/>
-          </a:prstGeom>
-          <a:noFill/>
-          <a:ln/>
-        </p:spPr>
-        <p:txBody>
-          <a:bodyPr wrap="square" lIns="0" tIns="0" rIns="0" bIns="0" rtlCol="0" anchor="t"/>
-          <a:lstStyle/>
-          <a:p>
-            <a:pPr algn="r" indent="0" marL="0">
-              <a:buNone/>
-            </a:pPr>
-            <a:r>
-              <a:rPr lang="en-US" sz="1100" b="1" dirty="0">
-                <a:solidFill>
-                  <a:srgbClr val="B33F00"/>
-                </a:solidFill>
-                <a:latin typeface="Noto Sans KR" pitchFamily="34" charset="0"/>
-                <a:ea typeface="Noto Sans KR" pitchFamily="34" charset="-122"/>
-                <a:cs typeface="Noto Sans KR" pitchFamily="34" charset="-120"/>
-              </a:rPr>
-              <a:t>주황 = 누락이 있었던 달</a:t>
-            </a:r>
-            <a:endParaRPr lang="en-US" sz="1100" dirty="0"/>
-          </a:p>
-        </p:txBody>
-      </p:sp>
-      <p:sp>
-        <p:nvSpPr>
-          <p:cNvPr id="15" name="o207"/>
-          <p:cNvSpPr/>
-          <p:nvPr/>
-        </p:nvSpPr>
-        <p:spPr>
-          <a:xfrm>
-            <a:off x="1333500" y="5581650"/>
-            <a:ext cx="6096000" cy="0"/>
-          </a:xfrm>
-          <a:prstGeom prst="line">
-            <a:avLst/>
-          </a:prstGeom>
-          <a:noFill/>
-          <a:ln w="9525">
-            <a:solidFill>
-              <a:srgbClr val="E5E5EA"/>
-            </a:solidFill>
-            <a:prstDash val="solid"/>
-          </a:ln>
-        </p:spPr>
-      </p:sp>
-      <p:sp>
-        <p:nvSpPr>
-          <p:cNvPr id="16" name="o208"/>
-          <p:cNvSpPr txBox="1"/>
-          <p:nvPr/>
-        </p:nvSpPr>
-        <p:spPr>
-          <a:xfrm>
-            <a:off x="914400" y="5505450"/>
-            <a:ext cx="342900" cy="152400"/>
-          </a:xfrm>
-          <a:prstGeom prst="rect">
-            <a:avLst/>
-          </a:prstGeom>
-          <a:noFill/>
-          <a:ln/>
-        </p:spPr>
-        <p:txBody>
-          <a:bodyPr wrap="square" lIns="0" tIns="0" rIns="0" bIns="0" rtlCol="0" anchor="t"/>
-          <a:lstStyle/>
-          <a:p>
-            <a:pPr algn="r" indent="0" marL="0">
-              <a:buNone/>
-            </a:pPr>
-            <a:r>
-              <a:rPr lang="en-US" sz="900" dirty="0">
+          <p:cNvPr id="17" name="o222"/>
+          <p:cNvSpPr txBox="1"/>
+          <p:nvPr/>
+        </p:nvSpPr>
+        <p:spPr>
+          <a:xfrm>
+            <a:off x="4635500" y="1847850"/>
+            <a:ext cx="2921000" cy="190500"/>
+          </a:xfrm>
+          <a:prstGeom prst="rect">
+            <a:avLst/>
+          </a:prstGeom>
+          <a:noFill/>
+          <a:ln/>
+        </p:spPr>
+        <p:txBody>
+          <a:bodyPr wrap="square" lIns="0" tIns="0" rIns="0" bIns="0" rtlCol="0" anchor="t"/>
+          <a:lstStyle/>
+          <a:p>
+            <a:pPr indent="0" marL="0">
+              <a:buNone/>
+            </a:pPr>
+            <a:r>
+              <a:rPr lang="en-US" sz="1300" dirty="0">
                 <a:solidFill>
                   <a:srgbClr val="636366"/>
+                </a:solidFill>
+                <a:latin typeface="Noto Sans KR" pitchFamily="34" charset="0"/>
+                <a:ea typeface="Noto Sans KR" pitchFamily="34" charset="-122"/>
+                <a:cs typeface="Noto Sans KR" pitchFamily="34" charset="-120"/>
+              </a:rPr>
+              <a:t>기다림 + 이동</a:t>
+            </a:r>
+            <a:endParaRPr lang="en-US" sz="1300" dirty="0"/>
+          </a:p>
+        </p:txBody>
+      </p:sp>
+      <p:sp>
+        <p:nvSpPr>
+          <p:cNvPr id="18" name="o223"/>
+          <p:cNvSpPr txBox="1"/>
+          <p:nvPr/>
+        </p:nvSpPr>
+        <p:spPr>
+          <a:xfrm>
+            <a:off x="4635500" y="2152650"/>
+            <a:ext cx="3149600" cy="762000"/>
+          </a:xfrm>
+          <a:prstGeom prst="rect">
+            <a:avLst/>
+          </a:prstGeom>
+          <a:noFill/>
+          <a:ln/>
+        </p:spPr>
+        <p:txBody>
+          <a:bodyPr wrap="square" lIns="0" tIns="0" rIns="0" bIns="0" rtlCol="0" anchor="t"/>
+          <a:lstStyle/>
+          <a:p>
+            <a:pPr indent="0" marL="0">
+              <a:buNone/>
+            </a:pPr>
+            <a:r>
+              <a:rPr lang="en-US" sz="4400" b="1" dirty="0">
+                <a:solidFill>
+                  <a:srgbClr val="0A1F44"/>
                 </a:solidFill>
                 <a:latin typeface="Inter" pitchFamily="34" charset="0"/>
                 <a:ea typeface="Inter" pitchFamily="34" charset="-122"/>
                 <a:cs typeface="Inter" pitchFamily="34" charset="-120"/>
               </a:rPr>
-              <a:t>0%</a:t>
-            </a:r>
-            <a:endParaRPr lang="en-US" sz="900" dirty="0"/>
-          </a:p>
-        </p:txBody>
-      </p:sp>
-      <p:sp>
-        <p:nvSpPr>
-          <p:cNvPr id="17" name="o209"/>
+              <a:t>78%</a:t>
+            </a:r>
+            <a:endParaRPr lang="en-US" sz="4400" dirty="0"/>
+          </a:p>
+        </p:txBody>
+      </p:sp>
+      <p:sp>
+        <p:nvSpPr>
+          <p:cNvPr id="19" name="o224"/>
+          <p:cNvSpPr txBox="1"/>
+          <p:nvPr/>
+        </p:nvSpPr>
+        <p:spPr>
+          <a:xfrm>
+            <a:off x="4635500" y="3143250"/>
+            <a:ext cx="2921000" cy="342900"/>
+          </a:xfrm>
+          <a:prstGeom prst="rect">
+            <a:avLst/>
+          </a:prstGeom>
+          <a:noFill/>
+          <a:ln/>
+        </p:spPr>
+        <p:txBody>
+          <a:bodyPr wrap="square" lIns="0" tIns="0" rIns="0" bIns="0" rtlCol="0" anchor="t"/>
+          <a:lstStyle/>
+          <a:p>
+            <a:pPr indent="0" marL="0">
+              <a:buNone/>
+            </a:pPr>
+            <a:r>
+              <a:rPr lang="en-US" sz="1200" dirty="0">
+                <a:solidFill>
+                  <a:srgbClr val="636366"/>
+                </a:solidFill>
+                <a:latin typeface="Noto Sans KR" pitchFamily="34" charset="0"/>
+                <a:ea typeface="Noto Sans KR" pitchFamily="34" charset="-122"/>
+                <a:cs typeface="Noto Sans KR" pitchFamily="34" charset="-120"/>
+              </a:rPr>
+              <a:t>결재 대기 19:24 + 직접 제출 7:00</a:t>
+            </a:r>
+            <a:endParaRPr lang="en-US" sz="1200" dirty="0"/>
+          </a:p>
+        </p:txBody>
+      </p:sp>
+      <p:sp>
+        <p:nvSpPr>
+          <p:cNvPr id="20" name="o225"/>
           <p:cNvSpPr/>
           <p:nvPr/>
         </p:nvSpPr>
         <p:spPr>
           <a:xfrm>
-            <a:off x="1333500" y="4152900"/>
-            <a:ext cx="6096000" cy="0"/>
-          </a:xfrm>
-          <a:prstGeom prst="line">
-            <a:avLst/>
-          </a:prstGeom>
-          <a:noFill/>
-          <a:ln w="9525">
-            <a:solidFill>
-              <a:srgbClr val="E5E5EA"/>
-            </a:solidFill>
-            <a:prstDash val="solid"/>
-          </a:ln>
-        </p:spPr>
-      </p:sp>
-      <p:sp>
-        <p:nvSpPr>
-          <p:cNvPr id="18" name="o210"/>
-          <p:cNvSpPr txBox="1"/>
-          <p:nvPr/>
-        </p:nvSpPr>
-        <p:spPr>
-          <a:xfrm>
-            <a:off x="914400" y="4076700"/>
-            <a:ext cx="342900" cy="152400"/>
-          </a:xfrm>
-          <a:prstGeom prst="rect">
-            <a:avLst/>
-          </a:prstGeom>
-          <a:noFill/>
-          <a:ln/>
-        </p:spPr>
-        <p:txBody>
-          <a:bodyPr wrap="square" lIns="0" tIns="0" rIns="0" bIns="0" rtlCol="0" anchor="t"/>
-          <a:lstStyle/>
-          <a:p>
-            <a:pPr algn="r" indent="0" marL="0">
-              <a:buNone/>
-            </a:pPr>
-            <a:r>
-              <a:rPr lang="en-US" sz="900" dirty="0">
+            <a:off x="8051800" y="1600200"/>
+            <a:ext cx="3530600" cy="2095500"/>
+          </a:xfrm>
+          <a:prstGeom prst="roundRect">
+            <a:avLst>
+              <a:gd name="adj" fmla="val 10909"/>
+            </a:avLst>
+          </a:prstGeom>
+          <a:solidFill>
+            <a:srgbClr val="F5F5F7"/>
+          </a:solidFill>
+          <a:ln/>
+        </p:spPr>
+      </p:sp>
+      <p:sp>
+        <p:nvSpPr>
+          <p:cNvPr id="21" name="o226"/>
+          <p:cNvSpPr txBox="1"/>
+          <p:nvPr/>
+        </p:nvSpPr>
+        <p:spPr>
+          <a:xfrm>
+            <a:off x="8356600" y="1847850"/>
+            <a:ext cx="2921000" cy="190500"/>
+          </a:xfrm>
+          <a:prstGeom prst="rect">
+            <a:avLst/>
+          </a:prstGeom>
+          <a:noFill/>
+          <a:ln/>
+        </p:spPr>
+        <p:txBody>
+          <a:bodyPr wrap="square" lIns="0" tIns="0" rIns="0" bIns="0" rtlCol="0" anchor="t"/>
+          <a:lstStyle/>
+          <a:p>
+            <a:pPr indent="0" marL="0">
+              <a:buNone/>
+            </a:pPr>
+            <a:r>
+              <a:rPr lang="en-US" sz="1300" dirty="0">
                 <a:solidFill>
                   <a:srgbClr val="636366"/>
+                </a:solidFill>
+                <a:latin typeface="Noto Sans KR" pitchFamily="34" charset="0"/>
+                <a:ea typeface="Noto Sans KR" pitchFamily="34" charset="-122"/>
+                <a:cs typeface="Noto Sans KR" pitchFamily="34" charset="-120"/>
+              </a:rPr>
+              <a:t>MSDS 교육 1건</a:t>
+            </a:r>
+            <a:endParaRPr lang="en-US" sz="1300" dirty="0"/>
+          </a:p>
+        </p:txBody>
+      </p:sp>
+      <p:sp>
+        <p:nvSpPr>
+          <p:cNvPr id="22" name="o227"/>
+          <p:cNvSpPr txBox="1"/>
+          <p:nvPr/>
+        </p:nvSpPr>
+        <p:spPr>
+          <a:xfrm>
+            <a:off x="8356600" y="2152650"/>
+            <a:ext cx="3149600" cy="762000"/>
+          </a:xfrm>
+          <a:prstGeom prst="rect">
+            <a:avLst/>
+          </a:prstGeom>
+          <a:noFill/>
+          <a:ln/>
+        </p:spPr>
+        <p:txBody>
+          <a:bodyPr wrap="square" lIns="0" tIns="0" rIns="0" bIns="0" rtlCol="0" anchor="t"/>
+          <a:lstStyle/>
+          <a:p>
+            <a:pPr indent="0" marL="0">
+              <a:buNone/>
+            </a:pPr>
+            <a:r>
+              <a:rPr lang="en-US" sz="4400" b="1" dirty="0">
+                <a:solidFill>
+                  <a:srgbClr val="0A1F44"/>
                 </a:solidFill>
                 <a:latin typeface="Inter" pitchFamily="34" charset="0"/>
                 <a:ea typeface="Inter" pitchFamily="34" charset="-122"/>
                 <a:cs typeface="Inter" pitchFamily="34" charset="-120"/>
               </a:rPr>
-              <a:t>50%</a:t>
-            </a:r>
-            <a:endParaRPr lang="en-US" sz="900" dirty="0"/>
-          </a:p>
-        </p:txBody>
-      </p:sp>
-      <p:sp>
-        <p:nvSpPr>
-          <p:cNvPr id="19" name="o211"/>
+              <a:t>4분 18초</a:t>
+            </a:r>
+            <a:endParaRPr lang="en-US" sz="4400" dirty="0"/>
+          </a:p>
+        </p:txBody>
+      </p:sp>
+      <p:sp>
+        <p:nvSpPr>
+          <p:cNvPr id="23" name="o228"/>
+          <p:cNvSpPr txBox="1"/>
+          <p:nvPr/>
+        </p:nvSpPr>
+        <p:spPr>
+          <a:xfrm>
+            <a:off x="8356600" y="3143250"/>
+            <a:ext cx="2921000" cy="342900"/>
+          </a:xfrm>
+          <a:prstGeom prst="rect">
+            <a:avLst/>
+          </a:prstGeom>
+          <a:noFill/>
+          <a:ln/>
+        </p:spPr>
+        <p:txBody>
+          <a:bodyPr wrap="square" lIns="0" tIns="0" rIns="0" bIns="0" rtlCol="0" anchor="t"/>
+          <a:lstStyle/>
+          <a:p>
+            <a:pPr indent="0" marL="0">
+              <a:buNone/>
+            </a:pPr>
+            <a:r>
+              <a:rPr lang="en-US" sz="1200" dirty="0">
+                <a:solidFill>
+                  <a:srgbClr val="636366"/>
+                </a:solidFill>
+                <a:latin typeface="Noto Sans KR" pitchFamily="34" charset="0"/>
+                <a:ea typeface="Noto Sans KR" pitchFamily="34" charset="-122"/>
+                <a:cs typeface="Noto Sans KR" pitchFamily="34" charset="-120"/>
+              </a:rPr>
+              <a:t>자료 검색이 절반 (2:09)</a:t>
+            </a:r>
+            <a:endParaRPr lang="en-US" sz="1200" dirty="0"/>
+          </a:p>
+        </p:txBody>
+      </p:sp>
+      <p:sp>
+        <p:nvSpPr>
+          <p:cNvPr id="24" name="o229"/>
           <p:cNvSpPr/>
           <p:nvPr/>
         </p:nvSpPr>
         <p:spPr>
           <a:xfrm>
-            <a:off x="1333500" y="2724150"/>
-            <a:ext cx="6096000" cy="0"/>
-          </a:xfrm>
-          <a:prstGeom prst="line">
-            <a:avLst/>
-          </a:prstGeom>
-          <a:noFill/>
-          <a:ln w="9525">
-            <a:solidFill>
-              <a:srgbClr val="E5E5EA"/>
-            </a:solidFill>
-            <a:prstDash val="solid"/>
-          </a:ln>
-        </p:spPr>
-      </p:sp>
-      <p:sp>
-        <p:nvSpPr>
-          <p:cNvPr id="20" name="o212"/>
-          <p:cNvSpPr txBox="1"/>
-          <p:nvPr/>
-        </p:nvSpPr>
-        <p:spPr>
-          <a:xfrm>
-            <a:off x="914400" y="2647950"/>
-            <a:ext cx="342900" cy="152400"/>
+            <a:off x="609600" y="3886200"/>
+            <a:ext cx="10972800" cy="2362200"/>
+          </a:xfrm>
+          <a:prstGeom prst="roundRect">
+            <a:avLst>
+              <a:gd name="adj" fmla="val 9677"/>
+            </a:avLst>
+          </a:prstGeom>
+          <a:solidFill>
+            <a:srgbClr val="F5F5F7"/>
+          </a:solidFill>
+          <a:ln/>
+        </p:spPr>
+      </p:sp>
+      <p:sp>
+        <p:nvSpPr>
+          <p:cNvPr id="25" name="o230"/>
+          <p:cNvSpPr txBox="1"/>
+          <p:nvPr/>
+        </p:nvSpPr>
+        <p:spPr>
+          <a:xfrm>
+            <a:off x="952500" y="4114800"/>
+            <a:ext cx="5715000" cy="228600"/>
+          </a:xfrm>
+          <a:prstGeom prst="rect">
+            <a:avLst/>
+          </a:prstGeom>
+          <a:noFill/>
+          <a:ln/>
+        </p:spPr>
+        <p:txBody>
+          <a:bodyPr wrap="square" lIns="0" tIns="0" rIns="0" bIns="0" rtlCol="0" anchor="t"/>
+          <a:lstStyle/>
+          <a:p>
+            <a:pPr indent="0" marL="0">
+              <a:buNone/>
+            </a:pPr>
+            <a:r>
+              <a:rPr lang="en-US" sz="1600" b="1" dirty="0">
+                <a:solidFill>
+                  <a:srgbClr val="1D1D1F"/>
+                </a:solidFill>
+                <a:latin typeface="Noto Sans KR" pitchFamily="34" charset="0"/>
+                <a:ea typeface="Noto Sans KR" pitchFamily="34" charset="-122"/>
+                <a:cs typeface="Noto Sans KR" pitchFamily="34" charset="-120"/>
+              </a:rPr>
+              <a:t>33분 48초는 어디에 쓰였나</a:t>
+            </a:r>
+            <a:endParaRPr lang="en-US" sz="1600" dirty="0"/>
+          </a:p>
+        </p:txBody>
+      </p:sp>
+      <p:sp>
+        <p:nvSpPr>
+          <p:cNvPr id="26" name="o231"/>
+          <p:cNvSpPr txBox="1"/>
+          <p:nvPr/>
+        </p:nvSpPr>
+        <p:spPr>
+          <a:xfrm>
+            <a:off x="6667500" y="4114800"/>
+            <a:ext cx="4572000" cy="228600"/>
           </a:xfrm>
           <a:prstGeom prst="rect">
             <a:avLst/>
@@ -9276,691 +9806,463 @@
               <a:buNone/>
             </a:pPr>
             <a:r>
-              <a:rPr lang="en-US" sz="900" dirty="0">
-                <a:solidFill>
-                  <a:srgbClr val="636366"/>
+              <a:rPr lang="en-US" sz="1300" b="1" dirty="0">
+                <a:solidFill>
+                  <a:srgbClr val="0A1F44"/>
+                </a:solidFill>
+                <a:latin typeface="Noto Sans KR" pitchFamily="34" charset="0"/>
+                <a:ea typeface="Noto Sans KR" pitchFamily="34" charset="-122"/>
+                <a:cs typeface="Noto Sans KR" pitchFamily="34" charset="-120"/>
+              </a:rPr>
+              <a:t>두 단계만 없애면 78%</a:t>
+            </a:r>
+            <a:endParaRPr lang="en-US" sz="1300" dirty="0"/>
+          </a:p>
+        </p:txBody>
+      </p:sp>
+      <p:sp>
+        <p:nvSpPr>
+          <p:cNvPr id="27" name="o232"/>
+          <p:cNvSpPr/>
+          <p:nvPr/>
+        </p:nvSpPr>
+        <p:spPr>
+          <a:xfrm>
+            <a:off x="952500" y="4533900"/>
+            <a:ext cx="5847223" cy="609600"/>
+          </a:xfrm>
+          <a:prstGeom prst="roundRect">
+            <a:avLst>
+              <a:gd name="adj" fmla="val 15625"/>
+            </a:avLst>
+          </a:prstGeom>
+          <a:solidFill>
+            <a:srgbClr val="0A1F44"/>
+          </a:solidFill>
+          <a:ln/>
+        </p:spPr>
+      </p:sp>
+      <p:sp>
+        <p:nvSpPr>
+          <p:cNvPr id="28" name="o233"/>
+          <p:cNvSpPr txBox="1"/>
+          <p:nvPr/>
+        </p:nvSpPr>
+        <p:spPr>
+          <a:xfrm>
+            <a:off x="1123950" y="4533900"/>
+            <a:ext cx="5561473" cy="609600"/>
+          </a:xfrm>
+          <a:prstGeom prst="rect">
+            <a:avLst/>
+          </a:prstGeom>
+          <a:noFill/>
+          <a:ln/>
+        </p:spPr>
+        <p:txBody>
+          <a:bodyPr wrap="square" lIns="0" tIns="0" rIns="0" bIns="0" rtlCol="0" anchor="ctr"/>
+          <a:lstStyle/>
+          <a:p>
+            <a:pPr indent="0" marL="0">
+              <a:buNone/>
+            </a:pPr>
+            <a:r>
+              <a:rPr lang="en-US" sz="2200" b="1" dirty="0">
+                <a:solidFill>
+                  <a:srgbClr val="FFFFFF"/>
                 </a:solidFill>
                 <a:latin typeface="Inter" pitchFamily="34" charset="0"/>
                 <a:ea typeface="Inter" pitchFamily="34" charset="-122"/>
                 <a:cs typeface="Inter" pitchFamily="34" charset="-120"/>
               </a:rPr>
-              <a:t>100%</a:t>
-            </a:r>
-            <a:endParaRPr lang="en-US" sz="900" dirty="0"/>
-          </a:p>
-        </p:txBody>
-      </p:sp>
-      <p:sp>
-        <p:nvSpPr>
-          <p:cNvPr id="21" name="o213"/>
-          <p:cNvSpPr/>
-          <p:nvPr/>
-        </p:nvSpPr>
-        <p:spPr>
-          <a:xfrm>
-            <a:off x="1333500" y="2724150"/>
-            <a:ext cx="6096000" cy="0"/>
-          </a:xfrm>
-          <a:prstGeom prst="line">
-            <a:avLst/>
-          </a:prstGeom>
-          <a:noFill/>
-          <a:ln w="12700">
-            <a:solidFill>
-              <a:srgbClr val="0A1F44"/>
-            </a:solidFill>
-            <a:prstDash val="dash"/>
-          </a:ln>
-        </p:spPr>
-      </p:sp>
-      <p:sp>
-        <p:nvSpPr>
-          <p:cNvPr id="22" name="o214"/>
-          <p:cNvSpPr txBox="1"/>
-          <p:nvPr/>
-        </p:nvSpPr>
-        <p:spPr>
-          <a:xfrm>
-            <a:off x="6572250" y="2514600"/>
-            <a:ext cx="857250" cy="152400"/>
-          </a:xfrm>
-          <a:prstGeom prst="rect">
-            <a:avLst/>
-          </a:prstGeom>
-          <a:noFill/>
-          <a:ln/>
-        </p:spPr>
-        <p:txBody>
-          <a:bodyPr wrap="square" lIns="0" tIns="0" rIns="0" bIns="0" rtlCol="0" anchor="t"/>
-          <a:lstStyle/>
-          <a:p>
-            <a:pPr algn="r" indent="0" marL="0">
-              <a:buNone/>
-            </a:pPr>
-            <a:r>
-              <a:rPr lang="en-US" sz="1000" b="1" dirty="0">
-                <a:solidFill>
-                  <a:srgbClr val="0A1F44"/>
-                </a:solidFill>
-                <a:latin typeface="Noto Sans KR" pitchFamily="34" charset="0"/>
-                <a:ea typeface="Noto Sans KR" pitchFamily="34" charset="-122"/>
-                <a:cs typeface="Noto Sans KR" pitchFamily="34" charset="-120"/>
-              </a:rPr>
-              <a:t>목표 100%</a:t>
-            </a:r>
-            <a:endParaRPr lang="en-US" sz="1000" dirty="0"/>
-          </a:p>
-        </p:txBody>
-      </p:sp>
-      <p:sp>
-        <p:nvSpPr>
-          <p:cNvPr id="23" name="o215"/>
-          <p:cNvSpPr/>
-          <p:nvPr/>
-        </p:nvSpPr>
-        <p:spPr>
-          <a:xfrm>
-            <a:off x="1440180" y="3795713"/>
-            <a:ext cx="294640" cy="1785938"/>
-          </a:xfrm>
-          <a:prstGeom prst="roundRect">
-            <a:avLst>
-              <a:gd name="adj" fmla="val 19397"/>
-            </a:avLst>
-          </a:prstGeom>
-          <a:solidFill>
-            <a:srgbClr val="F56300"/>
-          </a:solidFill>
-          <a:ln/>
-        </p:spPr>
-      </p:sp>
-      <p:sp>
-        <p:nvSpPr>
-          <p:cNvPr id="24" name="o216"/>
-          <p:cNvSpPr txBox="1"/>
-          <p:nvPr/>
-        </p:nvSpPr>
-        <p:spPr>
-          <a:xfrm>
-            <a:off x="1363980" y="3624263"/>
-            <a:ext cx="447040" cy="133350"/>
-          </a:xfrm>
-          <a:prstGeom prst="rect">
-            <a:avLst/>
-          </a:prstGeom>
-          <a:noFill/>
-          <a:ln/>
-        </p:spPr>
-        <p:txBody>
-          <a:bodyPr wrap="square" lIns="0" tIns="0" rIns="0" bIns="0" rtlCol="0" anchor="t"/>
-          <a:lstStyle/>
-          <a:p>
-            <a:pPr algn="ctr" indent="0" marL="0">
-              <a:buNone/>
-            </a:pPr>
-            <a:r>
-              <a:rPr lang="en-US" sz="1000" b="1" dirty="0">
-                <a:solidFill>
-                  <a:srgbClr val="B33F00"/>
+              <a:t>57%</a:t>
+            </a:r>
+            <a:endParaRPr lang="en-US" sz="2200" dirty="0"/>
+          </a:p>
+        </p:txBody>
+      </p:sp>
+      <p:sp>
+        <p:nvSpPr>
+          <p:cNvPr id="29" name="o234"/>
+          <p:cNvSpPr txBox="1"/>
+          <p:nvPr/>
+        </p:nvSpPr>
+        <p:spPr>
+          <a:xfrm>
+            <a:off x="952500" y="5276850"/>
+            <a:ext cx="5847223" cy="190500"/>
+          </a:xfrm>
+          <a:prstGeom prst="rect">
+            <a:avLst/>
+          </a:prstGeom>
+          <a:noFill/>
+          <a:ln/>
+        </p:spPr>
+        <p:txBody>
+          <a:bodyPr wrap="square" lIns="0" tIns="0" rIns="0" bIns="0" rtlCol="0" anchor="t"/>
+          <a:lstStyle/>
+          <a:p>
+            <a:pPr indent="0" marL="0">
+              <a:buNone/>
+            </a:pPr>
+            <a:r>
+              <a:rPr lang="en-US" sz="1300" b="1" dirty="0">
+                <a:solidFill>
+                  <a:srgbClr val="1D1D1F"/>
+                </a:solidFill>
+                <a:latin typeface="Noto Sans KR" pitchFamily="34" charset="0"/>
+                <a:ea typeface="Noto Sans KR" pitchFamily="34" charset="-122"/>
+                <a:cs typeface="Noto Sans KR" pitchFamily="34" charset="-120"/>
+              </a:rPr>
+              <a:t>아날로그 내부 결재 대기</a:t>
+            </a:r>
+            <a:endParaRPr lang="en-US" sz="1300" dirty="0"/>
+          </a:p>
+        </p:txBody>
+      </p:sp>
+      <p:sp>
+        <p:nvSpPr>
+          <p:cNvPr id="30" name="o235"/>
+          <p:cNvSpPr txBox="1"/>
+          <p:nvPr/>
+        </p:nvSpPr>
+        <p:spPr>
+          <a:xfrm>
+            <a:off x="952500" y="5505450"/>
+            <a:ext cx="5847223" cy="171450"/>
+          </a:xfrm>
+          <a:prstGeom prst="rect">
+            <a:avLst/>
+          </a:prstGeom>
+          <a:noFill/>
+          <a:ln/>
+        </p:spPr>
+        <p:txBody>
+          <a:bodyPr wrap="square" lIns="0" tIns="0" rIns="0" bIns="0" rtlCol="0" anchor="t"/>
+          <a:lstStyle/>
+          <a:p>
+            <a:pPr indent="0" marL="0">
+              <a:buNone/>
+            </a:pPr>
+            <a:r>
+              <a:rPr lang="en-US" sz="1200" dirty="0">
+                <a:solidFill>
+                  <a:srgbClr val="636366"/>
                 </a:solidFill>
                 <a:latin typeface="Inter" pitchFamily="34" charset="0"/>
                 <a:ea typeface="Inter" pitchFamily="34" charset="-122"/>
                 <a:cs typeface="Inter" pitchFamily="34" charset="-120"/>
               </a:rPr>
-              <a:t>63</a:t>
-            </a:r>
-            <a:endParaRPr lang="en-US" sz="1000" dirty="0"/>
-          </a:p>
-        </p:txBody>
-      </p:sp>
-      <p:sp>
-        <p:nvSpPr>
-          <p:cNvPr id="25" name="o217"/>
-          <p:cNvSpPr txBox="1"/>
-          <p:nvPr/>
-        </p:nvSpPr>
-        <p:spPr>
-          <a:xfrm>
-            <a:off x="1363980" y="5657850"/>
-            <a:ext cx="447040" cy="133350"/>
-          </a:xfrm>
-          <a:prstGeom prst="rect">
-            <a:avLst/>
-          </a:prstGeom>
-          <a:noFill/>
-          <a:ln/>
-        </p:spPr>
-        <p:txBody>
-          <a:bodyPr wrap="square" lIns="0" tIns="0" rIns="0" bIns="0" rtlCol="0" anchor="t"/>
-          <a:lstStyle/>
-          <a:p>
-            <a:pPr algn="ctr" indent="0" marL="0">
-              <a:buNone/>
-            </a:pPr>
-            <a:r>
-              <a:rPr lang="en-US" sz="1000" dirty="0">
-                <a:solidFill>
-                  <a:srgbClr val="636366"/>
-                </a:solidFill>
-                <a:latin typeface="Noto Sans KR" pitchFamily="34" charset="0"/>
-                <a:ea typeface="Noto Sans KR" pitchFamily="34" charset="-122"/>
-                <a:cs typeface="Noto Sans KR" pitchFamily="34" charset="-120"/>
-              </a:rPr>
-              <a:t>1월</a:t>
-            </a:r>
-            <a:endParaRPr lang="en-US" sz="1000" dirty="0"/>
-          </a:p>
-        </p:txBody>
-      </p:sp>
-      <p:sp>
-        <p:nvSpPr>
-          <p:cNvPr id="26" name="o218"/>
+              <a:t>19분 24초</a:t>
+            </a:r>
+            <a:endParaRPr lang="en-US" sz="1200" dirty="0"/>
+          </a:p>
+        </p:txBody>
+      </p:sp>
+      <p:sp>
+        <p:nvSpPr>
+          <p:cNvPr id="31" name="o236"/>
           <p:cNvSpPr/>
           <p:nvPr/>
         </p:nvSpPr>
         <p:spPr>
           <a:xfrm>
-            <a:off x="1948180" y="3041650"/>
-            <a:ext cx="294640" cy="2540000"/>
+            <a:off x="6856873" y="4533900"/>
+            <a:ext cx="2073294" cy="609600"/>
           </a:xfrm>
           <a:prstGeom prst="roundRect">
             <a:avLst>
-              <a:gd name="adj" fmla="val 19397"/>
+              <a:gd name="adj" fmla="val 15625"/>
             </a:avLst>
           </a:prstGeom>
           <a:solidFill>
-            <a:srgbClr val="F56300"/>
+            <a:srgbClr val="4F6A96"/>
           </a:solidFill>
           <a:ln/>
         </p:spPr>
       </p:sp>
       <p:sp>
         <p:nvSpPr>
-          <p:cNvPr id="27" name="o219"/>
-          <p:cNvSpPr txBox="1"/>
-          <p:nvPr/>
-        </p:nvSpPr>
-        <p:spPr>
-          <a:xfrm>
-            <a:off x="1871980" y="2870200"/>
-            <a:ext cx="447040" cy="133350"/>
-          </a:xfrm>
-          <a:prstGeom prst="rect">
-            <a:avLst/>
-          </a:prstGeom>
-          <a:noFill/>
-          <a:ln/>
-        </p:spPr>
-        <p:txBody>
-          <a:bodyPr wrap="square" lIns="0" tIns="0" rIns="0" bIns="0" rtlCol="0" anchor="t"/>
-          <a:lstStyle/>
-          <a:p>
-            <a:pPr algn="ctr" indent="0" marL="0">
-              <a:buNone/>
-            </a:pPr>
-            <a:r>
-              <a:rPr lang="en-US" sz="1000" b="1" dirty="0">
-                <a:solidFill>
-                  <a:srgbClr val="B33F00"/>
+          <p:cNvPr id="32" name="o237"/>
+          <p:cNvSpPr txBox="1"/>
+          <p:nvPr/>
+        </p:nvSpPr>
+        <p:spPr>
+          <a:xfrm>
+            <a:off x="7028323" y="4533900"/>
+            <a:ext cx="1787544" cy="609600"/>
+          </a:xfrm>
+          <a:prstGeom prst="rect">
+            <a:avLst/>
+          </a:prstGeom>
+          <a:noFill/>
+          <a:ln/>
+        </p:spPr>
+        <p:txBody>
+          <a:bodyPr wrap="square" lIns="0" tIns="0" rIns="0" bIns="0" rtlCol="0" anchor="ctr"/>
+          <a:lstStyle/>
+          <a:p>
+            <a:pPr indent="0" marL="0">
+              <a:buNone/>
+            </a:pPr>
+            <a:r>
+              <a:rPr lang="en-US" sz="2200" b="1" dirty="0">
+                <a:solidFill>
+                  <a:srgbClr val="FFFFFF"/>
                 </a:solidFill>
                 <a:latin typeface="Inter" pitchFamily="34" charset="0"/>
                 <a:ea typeface="Inter" pitchFamily="34" charset="-122"/>
                 <a:cs typeface="Inter" pitchFamily="34" charset="-120"/>
               </a:rPr>
-              <a:t>89</a:t>
-            </a:r>
-            <a:endParaRPr lang="en-US" sz="1000" dirty="0"/>
-          </a:p>
-        </p:txBody>
-      </p:sp>
-      <p:sp>
-        <p:nvSpPr>
-          <p:cNvPr id="28" name="o220"/>
-          <p:cNvSpPr txBox="1"/>
-          <p:nvPr/>
-        </p:nvSpPr>
-        <p:spPr>
-          <a:xfrm>
-            <a:off x="1871980" y="5657850"/>
-            <a:ext cx="447040" cy="133350"/>
-          </a:xfrm>
-          <a:prstGeom prst="rect">
-            <a:avLst/>
-          </a:prstGeom>
-          <a:noFill/>
-          <a:ln/>
-        </p:spPr>
-        <p:txBody>
-          <a:bodyPr wrap="square" lIns="0" tIns="0" rIns="0" bIns="0" rtlCol="0" anchor="t"/>
-          <a:lstStyle/>
-          <a:p>
-            <a:pPr algn="ctr" indent="0" marL="0">
-              <a:buNone/>
-            </a:pPr>
-            <a:r>
-              <a:rPr lang="en-US" sz="1000" dirty="0">
+              <a:t>21%</a:t>
+            </a:r>
+            <a:endParaRPr lang="en-US" sz="2200" dirty="0"/>
+          </a:p>
+        </p:txBody>
+      </p:sp>
+      <p:sp>
+        <p:nvSpPr>
+          <p:cNvPr id="33" name="o238"/>
+          <p:cNvSpPr txBox="1"/>
+          <p:nvPr/>
+        </p:nvSpPr>
+        <p:spPr>
+          <a:xfrm>
+            <a:off x="6856873" y="5276850"/>
+            <a:ext cx="2073294" cy="190500"/>
+          </a:xfrm>
+          <a:prstGeom prst="rect">
+            <a:avLst/>
+          </a:prstGeom>
+          <a:noFill/>
+          <a:ln/>
+        </p:spPr>
+        <p:txBody>
+          <a:bodyPr wrap="square" lIns="0" tIns="0" rIns="0" bIns="0" rtlCol="0" anchor="t"/>
+          <a:lstStyle/>
+          <a:p>
+            <a:pPr indent="0" marL="0">
+              <a:buNone/>
+            </a:pPr>
+            <a:r>
+              <a:rPr lang="en-US" sz="1300" b="1" dirty="0">
+                <a:solidFill>
+                  <a:srgbClr val="1D1D1F"/>
+                </a:solidFill>
+                <a:latin typeface="Noto Sans KR" pitchFamily="34" charset="0"/>
+                <a:ea typeface="Noto Sans KR" pitchFamily="34" charset="-122"/>
+                <a:cs typeface="Noto Sans KR" pitchFamily="34" charset="-120"/>
+              </a:rPr>
+              <a:t>직접 제출 (이동)</a:t>
+            </a:r>
+            <a:endParaRPr lang="en-US" sz="1300" dirty="0"/>
+          </a:p>
+        </p:txBody>
+      </p:sp>
+      <p:sp>
+        <p:nvSpPr>
+          <p:cNvPr id="34" name="o239"/>
+          <p:cNvSpPr txBox="1"/>
+          <p:nvPr/>
+        </p:nvSpPr>
+        <p:spPr>
+          <a:xfrm>
+            <a:off x="6856873" y="5505450"/>
+            <a:ext cx="2073294" cy="171450"/>
+          </a:xfrm>
+          <a:prstGeom prst="rect">
+            <a:avLst/>
+          </a:prstGeom>
+          <a:noFill/>
+          <a:ln/>
+        </p:spPr>
+        <p:txBody>
+          <a:bodyPr wrap="square" lIns="0" tIns="0" rIns="0" bIns="0" rtlCol="0" anchor="t"/>
+          <a:lstStyle/>
+          <a:p>
+            <a:pPr indent="0" marL="0">
+              <a:buNone/>
+            </a:pPr>
+            <a:r>
+              <a:rPr lang="en-US" sz="1200" dirty="0">
                 <a:solidFill>
                   <a:srgbClr val="636366"/>
-                </a:solidFill>
-                <a:latin typeface="Noto Sans KR" pitchFamily="34" charset="0"/>
-                <a:ea typeface="Noto Sans KR" pitchFamily="34" charset="-122"/>
-                <a:cs typeface="Noto Sans KR" pitchFamily="34" charset="-120"/>
-              </a:rPr>
-              <a:t>2월</a:t>
-            </a:r>
-            <a:endParaRPr lang="en-US" sz="1000" dirty="0"/>
-          </a:p>
-        </p:txBody>
-      </p:sp>
-      <p:sp>
-        <p:nvSpPr>
-          <p:cNvPr id="29" name="o221"/>
-          <p:cNvSpPr/>
-          <p:nvPr/>
-        </p:nvSpPr>
-        <p:spPr>
-          <a:xfrm>
-            <a:off x="2456180" y="3041650"/>
-            <a:ext cx="294640" cy="2540000"/>
-          </a:xfrm>
-          <a:prstGeom prst="roundRect">
-            <a:avLst>
-              <a:gd name="adj" fmla="val 19397"/>
-            </a:avLst>
-          </a:prstGeom>
-          <a:solidFill>
-            <a:srgbClr val="F56300"/>
-          </a:solidFill>
-          <a:ln/>
-        </p:spPr>
-      </p:sp>
-      <p:sp>
-        <p:nvSpPr>
-          <p:cNvPr id="30" name="o222"/>
-          <p:cNvSpPr txBox="1"/>
-          <p:nvPr/>
-        </p:nvSpPr>
-        <p:spPr>
-          <a:xfrm>
-            <a:off x="2379980" y="2870200"/>
-            <a:ext cx="447040" cy="133350"/>
-          </a:xfrm>
-          <a:prstGeom prst="rect">
-            <a:avLst/>
-          </a:prstGeom>
-          <a:noFill/>
-          <a:ln/>
-        </p:spPr>
-        <p:txBody>
-          <a:bodyPr wrap="square" lIns="0" tIns="0" rIns="0" bIns="0" rtlCol="0" anchor="t"/>
-          <a:lstStyle/>
-          <a:p>
-            <a:pPr algn="ctr" indent="0" marL="0">
-              <a:buNone/>
-            </a:pPr>
-            <a:r>
-              <a:rPr lang="en-US" sz="1000" b="1" dirty="0">
-                <a:solidFill>
-                  <a:srgbClr val="B33F00"/>
                 </a:solidFill>
                 <a:latin typeface="Inter" pitchFamily="34" charset="0"/>
                 <a:ea typeface="Inter" pitchFamily="34" charset="-122"/>
                 <a:cs typeface="Inter" pitchFamily="34" charset="-120"/>
               </a:rPr>
-              <a:t>89</a:t>
-            </a:r>
-            <a:endParaRPr lang="en-US" sz="1000" dirty="0"/>
-          </a:p>
-        </p:txBody>
-      </p:sp>
-      <p:sp>
-        <p:nvSpPr>
-          <p:cNvPr id="31" name="o223"/>
-          <p:cNvSpPr txBox="1"/>
-          <p:nvPr/>
-        </p:nvSpPr>
-        <p:spPr>
-          <a:xfrm>
-            <a:off x="2379980" y="5657850"/>
-            <a:ext cx="447040" cy="133350"/>
-          </a:xfrm>
-          <a:prstGeom prst="rect">
-            <a:avLst/>
-          </a:prstGeom>
-          <a:noFill/>
-          <a:ln/>
-        </p:spPr>
-        <p:txBody>
-          <a:bodyPr wrap="square" lIns="0" tIns="0" rIns="0" bIns="0" rtlCol="0" anchor="t"/>
-          <a:lstStyle/>
-          <a:p>
-            <a:pPr algn="ctr" indent="0" marL="0">
-              <a:buNone/>
-            </a:pPr>
-            <a:r>
-              <a:rPr lang="en-US" sz="1000" dirty="0">
-                <a:solidFill>
-                  <a:srgbClr val="636366"/>
-                </a:solidFill>
-                <a:latin typeface="Noto Sans KR" pitchFamily="34" charset="0"/>
-                <a:ea typeface="Noto Sans KR" pitchFamily="34" charset="-122"/>
-                <a:cs typeface="Noto Sans KR" pitchFamily="34" charset="-120"/>
-              </a:rPr>
-              <a:t>3월</a:t>
-            </a:r>
-            <a:endParaRPr lang="en-US" sz="1000" dirty="0"/>
-          </a:p>
-        </p:txBody>
-      </p:sp>
-      <p:sp>
-        <p:nvSpPr>
-          <p:cNvPr id="32" name="o224"/>
+              <a:t>7분 00초</a:t>
+            </a:r>
+            <a:endParaRPr lang="en-US" sz="1200" dirty="0"/>
+          </a:p>
+        </p:txBody>
+      </p:sp>
+      <p:sp>
+        <p:nvSpPr>
+          <p:cNvPr id="35" name="o240"/>
           <p:cNvSpPr/>
           <p:nvPr/>
         </p:nvSpPr>
         <p:spPr>
           <a:xfrm>
-            <a:off x="2964180" y="2724150"/>
-            <a:ext cx="294640" cy="2857500"/>
+            <a:off x="8987317" y="4533900"/>
+            <a:ext cx="2252183" cy="609600"/>
           </a:xfrm>
           <a:prstGeom prst="roundRect">
             <a:avLst>
-              <a:gd name="adj" fmla="val 19397"/>
+              <a:gd name="adj" fmla="val 15625"/>
             </a:avLst>
           </a:prstGeom>
           <a:solidFill>
-            <a:srgbClr val="C7C7CC"/>
+            <a:srgbClr val="C9D3E3"/>
           </a:solidFill>
           <a:ln/>
         </p:spPr>
       </p:sp>
       <p:sp>
         <p:nvSpPr>
-          <p:cNvPr id="33" name="o225"/>
-          <p:cNvSpPr txBox="1"/>
-          <p:nvPr/>
-        </p:nvSpPr>
-        <p:spPr>
-          <a:xfrm>
-            <a:off x="2887980" y="5657850"/>
-            <a:ext cx="447040" cy="133350"/>
-          </a:xfrm>
-          <a:prstGeom prst="rect">
-            <a:avLst/>
-          </a:prstGeom>
-          <a:noFill/>
-          <a:ln/>
-        </p:spPr>
-        <p:txBody>
-          <a:bodyPr wrap="square" lIns="0" tIns="0" rIns="0" bIns="0" rtlCol="0" anchor="t"/>
-          <a:lstStyle/>
-          <a:p>
-            <a:pPr algn="ctr" indent="0" marL="0">
-              <a:buNone/>
-            </a:pPr>
-            <a:r>
-              <a:rPr lang="en-US" sz="1000" dirty="0">
-                <a:solidFill>
-                  <a:srgbClr val="636366"/>
-                </a:solidFill>
-                <a:latin typeface="Noto Sans KR" pitchFamily="34" charset="0"/>
-                <a:ea typeface="Noto Sans KR" pitchFamily="34" charset="-122"/>
-                <a:cs typeface="Noto Sans KR" pitchFamily="34" charset="-120"/>
-              </a:rPr>
-              <a:t>4월</a:t>
-            </a:r>
-            <a:endParaRPr lang="en-US" sz="1000" dirty="0"/>
-          </a:p>
-        </p:txBody>
-      </p:sp>
-      <p:sp>
-        <p:nvSpPr>
-          <p:cNvPr id="34" name="o226"/>
-          <p:cNvSpPr/>
-          <p:nvPr/>
-        </p:nvSpPr>
-        <p:spPr>
-          <a:xfrm>
-            <a:off x="3472180" y="3132364"/>
-            <a:ext cx="294640" cy="2449286"/>
-          </a:xfrm>
-          <a:prstGeom prst="roundRect">
-            <a:avLst>
-              <a:gd name="adj" fmla="val 19397"/>
-            </a:avLst>
-          </a:prstGeom>
-          <a:solidFill>
-            <a:srgbClr val="F56300"/>
-          </a:solidFill>
-          <a:ln/>
-        </p:spPr>
-      </p:sp>
-      <p:sp>
-        <p:nvSpPr>
-          <p:cNvPr id="35" name="o227"/>
-          <p:cNvSpPr txBox="1"/>
-          <p:nvPr/>
-        </p:nvSpPr>
-        <p:spPr>
-          <a:xfrm>
-            <a:off x="3395980" y="2960914"/>
-            <a:ext cx="447040" cy="133350"/>
-          </a:xfrm>
-          <a:prstGeom prst="rect">
-            <a:avLst/>
-          </a:prstGeom>
-          <a:noFill/>
-          <a:ln/>
-        </p:spPr>
-        <p:txBody>
-          <a:bodyPr wrap="square" lIns="0" tIns="0" rIns="0" bIns="0" rtlCol="0" anchor="t"/>
-          <a:lstStyle/>
-          <a:p>
-            <a:pPr algn="ctr" indent="0" marL="0">
-              <a:buNone/>
-            </a:pPr>
-            <a:r>
-              <a:rPr lang="en-US" sz="1000" b="1" dirty="0">
-                <a:solidFill>
-                  <a:srgbClr val="B33F00"/>
+          <p:cNvPr id="36" name="o241"/>
+          <p:cNvSpPr txBox="1"/>
+          <p:nvPr/>
+        </p:nvSpPr>
+        <p:spPr>
+          <a:xfrm>
+            <a:off x="9158767" y="4533900"/>
+            <a:ext cx="1966433" cy="609600"/>
+          </a:xfrm>
+          <a:prstGeom prst="rect">
+            <a:avLst/>
+          </a:prstGeom>
+          <a:noFill/>
+          <a:ln/>
+        </p:spPr>
+        <p:txBody>
+          <a:bodyPr wrap="square" lIns="0" tIns="0" rIns="0" bIns="0" rtlCol="0" anchor="ctr"/>
+          <a:lstStyle/>
+          <a:p>
+            <a:pPr indent="0" marL="0">
+              <a:buNone/>
+            </a:pPr>
+            <a:r>
+              <a:rPr lang="en-US" sz="2200" b="1" dirty="0">
+                <a:solidFill>
+                  <a:srgbClr val="0A1F44"/>
                 </a:solidFill>
                 <a:latin typeface="Inter" pitchFamily="34" charset="0"/>
                 <a:ea typeface="Inter" pitchFamily="34" charset="-122"/>
                 <a:cs typeface="Inter" pitchFamily="34" charset="-120"/>
               </a:rPr>
-              <a:t>86</a:t>
-            </a:r>
-            <a:endParaRPr lang="en-US" sz="1000" dirty="0"/>
-          </a:p>
-        </p:txBody>
-      </p:sp>
-      <p:sp>
-        <p:nvSpPr>
-          <p:cNvPr id="36" name="o228"/>
-          <p:cNvSpPr txBox="1"/>
-          <p:nvPr/>
-        </p:nvSpPr>
-        <p:spPr>
-          <a:xfrm>
-            <a:off x="3395980" y="5657850"/>
-            <a:ext cx="447040" cy="133350"/>
-          </a:xfrm>
-          <a:prstGeom prst="rect">
-            <a:avLst/>
-          </a:prstGeom>
-          <a:noFill/>
-          <a:ln/>
-        </p:spPr>
-        <p:txBody>
-          <a:bodyPr wrap="square" lIns="0" tIns="0" rIns="0" bIns="0" rtlCol="0" anchor="t"/>
-          <a:lstStyle/>
-          <a:p>
-            <a:pPr algn="ctr" indent="0" marL="0">
-              <a:buNone/>
-            </a:pPr>
-            <a:r>
-              <a:rPr lang="en-US" sz="1000" dirty="0">
+              <a:t>22%</a:t>
+            </a:r>
+            <a:endParaRPr lang="en-US" sz="2200" dirty="0"/>
+          </a:p>
+        </p:txBody>
+      </p:sp>
+      <p:sp>
+        <p:nvSpPr>
+          <p:cNvPr id="37" name="o242"/>
+          <p:cNvSpPr txBox="1"/>
+          <p:nvPr/>
+        </p:nvSpPr>
+        <p:spPr>
+          <a:xfrm>
+            <a:off x="8987317" y="5276850"/>
+            <a:ext cx="2252183" cy="190500"/>
+          </a:xfrm>
+          <a:prstGeom prst="rect">
+            <a:avLst/>
+          </a:prstGeom>
+          <a:noFill/>
+          <a:ln/>
+        </p:spPr>
+        <p:txBody>
+          <a:bodyPr wrap="square" lIns="0" tIns="0" rIns="0" bIns="0" rtlCol="0" anchor="t"/>
+          <a:lstStyle/>
+          <a:p>
+            <a:pPr indent="0" marL="0">
+              <a:buNone/>
+            </a:pPr>
+            <a:r>
+              <a:rPr lang="en-US" sz="1300" b="1" dirty="0">
+                <a:solidFill>
+                  <a:srgbClr val="1D1D1F"/>
+                </a:solidFill>
+                <a:latin typeface="Noto Sans KR" pitchFamily="34" charset="0"/>
+                <a:ea typeface="Noto Sans KR" pitchFamily="34" charset="-122"/>
+                <a:cs typeface="Noto Sans KR" pitchFamily="34" charset="-120"/>
+              </a:rPr>
+              <a:t>작성 · 출력 · 서명 등</a:t>
+            </a:r>
+            <a:endParaRPr lang="en-US" sz="1300" dirty="0"/>
+          </a:p>
+        </p:txBody>
+      </p:sp>
+      <p:sp>
+        <p:nvSpPr>
+          <p:cNvPr id="38" name="o243"/>
+          <p:cNvSpPr txBox="1"/>
+          <p:nvPr/>
+        </p:nvSpPr>
+        <p:spPr>
+          <a:xfrm>
+            <a:off x="8987317" y="5505450"/>
+            <a:ext cx="2252183" cy="171450"/>
+          </a:xfrm>
+          <a:prstGeom prst="rect">
+            <a:avLst/>
+          </a:prstGeom>
+          <a:noFill/>
+          <a:ln/>
+        </p:spPr>
+        <p:txBody>
+          <a:bodyPr wrap="square" lIns="0" tIns="0" rIns="0" bIns="0" rtlCol="0" anchor="t"/>
+          <a:lstStyle/>
+          <a:p>
+            <a:pPr indent="0" marL="0">
+              <a:buNone/>
+            </a:pPr>
+            <a:r>
+              <a:rPr lang="en-US" sz="1200" dirty="0">
                 <a:solidFill>
                   <a:srgbClr val="636366"/>
-                </a:solidFill>
-                <a:latin typeface="Noto Sans KR" pitchFamily="34" charset="0"/>
-                <a:ea typeface="Noto Sans KR" pitchFamily="34" charset="-122"/>
-                <a:cs typeface="Noto Sans KR" pitchFamily="34" charset="-120"/>
-              </a:rPr>
-              <a:t>5월</a:t>
-            </a:r>
-            <a:endParaRPr lang="en-US" sz="1000" dirty="0"/>
-          </a:p>
-        </p:txBody>
-      </p:sp>
-      <p:sp>
-        <p:nvSpPr>
-          <p:cNvPr id="37" name="o229"/>
-          <p:cNvSpPr/>
-          <p:nvPr/>
-        </p:nvSpPr>
-        <p:spPr>
-          <a:xfrm>
-            <a:off x="3980180" y="2724150"/>
-            <a:ext cx="294640" cy="2857500"/>
-          </a:xfrm>
-          <a:prstGeom prst="roundRect">
-            <a:avLst>
-              <a:gd name="adj" fmla="val 19397"/>
-            </a:avLst>
-          </a:prstGeom>
-          <a:solidFill>
-            <a:srgbClr val="C7C7CC"/>
-          </a:solidFill>
-          <a:ln/>
-        </p:spPr>
-      </p:sp>
-      <p:sp>
-        <p:nvSpPr>
-          <p:cNvPr id="38" name="o230"/>
-          <p:cNvSpPr txBox="1"/>
-          <p:nvPr/>
-        </p:nvSpPr>
-        <p:spPr>
-          <a:xfrm>
-            <a:off x="3903980" y="5657850"/>
-            <a:ext cx="447040" cy="133350"/>
-          </a:xfrm>
-          <a:prstGeom prst="rect">
-            <a:avLst/>
-          </a:prstGeom>
-          <a:noFill/>
-          <a:ln/>
-        </p:spPr>
-        <p:txBody>
-          <a:bodyPr wrap="square" lIns="0" tIns="0" rIns="0" bIns="0" rtlCol="0" anchor="t"/>
-          <a:lstStyle/>
-          <a:p>
-            <a:pPr algn="ctr" indent="0" marL="0">
-              <a:buNone/>
-            </a:pPr>
-            <a:r>
-              <a:rPr lang="en-US" sz="1000" dirty="0">
-                <a:solidFill>
-                  <a:srgbClr val="636366"/>
-                </a:solidFill>
-                <a:latin typeface="Noto Sans KR" pitchFamily="34" charset="0"/>
-                <a:ea typeface="Noto Sans KR" pitchFamily="34" charset="-122"/>
-                <a:cs typeface="Noto Sans KR" pitchFamily="34" charset="-120"/>
-              </a:rPr>
-              <a:t>6월</a:t>
-            </a:r>
-            <a:endParaRPr lang="en-US" sz="1000" dirty="0"/>
-          </a:p>
-        </p:txBody>
-      </p:sp>
-      <p:sp>
-        <p:nvSpPr>
-          <p:cNvPr id="39" name="o231"/>
-          <p:cNvSpPr/>
-          <p:nvPr/>
-        </p:nvSpPr>
-        <p:spPr>
-          <a:xfrm>
-            <a:off x="4488180" y="3163765"/>
-            <a:ext cx="294640" cy="2417885"/>
-          </a:xfrm>
-          <a:prstGeom prst="roundRect">
-            <a:avLst>
-              <a:gd name="adj" fmla="val 19397"/>
-            </a:avLst>
-          </a:prstGeom>
-          <a:solidFill>
-            <a:srgbClr val="F56300"/>
-          </a:solidFill>
-          <a:ln/>
-        </p:spPr>
-      </p:sp>
-      <p:sp>
-        <p:nvSpPr>
-          <p:cNvPr id="40" name="o232"/>
-          <p:cNvSpPr txBox="1"/>
-          <p:nvPr/>
-        </p:nvSpPr>
-        <p:spPr>
-          <a:xfrm>
-            <a:off x="4411980" y="2992315"/>
-            <a:ext cx="447040" cy="133350"/>
-          </a:xfrm>
-          <a:prstGeom prst="rect">
-            <a:avLst/>
-          </a:prstGeom>
-          <a:noFill/>
-          <a:ln/>
-        </p:spPr>
-        <p:txBody>
-          <a:bodyPr wrap="square" lIns="0" tIns="0" rIns="0" bIns="0" rtlCol="0" anchor="t"/>
-          <a:lstStyle/>
-          <a:p>
-            <a:pPr algn="ctr" indent="0" marL="0">
-              <a:buNone/>
-            </a:pPr>
-            <a:r>
-              <a:rPr lang="en-US" sz="1000" b="1" dirty="0">
-                <a:solidFill>
-                  <a:srgbClr val="B33F00"/>
                 </a:solidFill>
                 <a:latin typeface="Inter" pitchFamily="34" charset="0"/>
                 <a:ea typeface="Inter" pitchFamily="34" charset="-122"/>
                 <a:cs typeface="Inter" pitchFamily="34" charset="-120"/>
               </a:rPr>
-              <a:t>85</a:t>
-            </a:r>
-            <a:endParaRPr lang="en-US" sz="1000" dirty="0"/>
-          </a:p>
-        </p:txBody>
-      </p:sp>
-      <p:sp>
-        <p:nvSpPr>
-          <p:cNvPr id="41" name="o233"/>
-          <p:cNvSpPr txBox="1"/>
-          <p:nvPr/>
-        </p:nvSpPr>
-        <p:spPr>
-          <a:xfrm>
-            <a:off x="4411980" y="5657850"/>
-            <a:ext cx="447040" cy="133350"/>
-          </a:xfrm>
-          <a:prstGeom prst="rect">
-            <a:avLst/>
-          </a:prstGeom>
-          <a:noFill/>
-          <a:ln/>
-        </p:spPr>
-        <p:txBody>
-          <a:bodyPr wrap="square" lIns="0" tIns="0" rIns="0" bIns="0" rtlCol="0" anchor="t"/>
-          <a:lstStyle/>
-          <a:p>
-            <a:pPr algn="ctr" indent="0" marL="0">
-              <a:buNone/>
-            </a:pPr>
-            <a:r>
-              <a:rPr lang="en-US" sz="1000" dirty="0">
+              <a:t>7분 24초</a:t>
+            </a:r>
+            <a:endParaRPr lang="en-US" sz="1200" dirty="0"/>
+          </a:p>
+        </p:txBody>
+      </p:sp>
+      <p:sp>
+        <p:nvSpPr>
+          <p:cNvPr id="39" name="o244"/>
+          <p:cNvSpPr txBox="1"/>
+          <p:nvPr/>
+        </p:nvSpPr>
+        <p:spPr>
+          <a:xfrm>
+            <a:off x="952500" y="5886450"/>
+            <a:ext cx="10287000" cy="190500"/>
+          </a:xfrm>
+          <a:prstGeom prst="rect">
+            <a:avLst/>
+          </a:prstGeom>
+          <a:noFill/>
+          <a:ln/>
+        </p:spPr>
+        <p:txBody>
+          <a:bodyPr wrap="square" lIns="0" tIns="0" rIns="0" bIns="0" rtlCol="0" anchor="t"/>
+          <a:lstStyle/>
+          <a:p>
+            <a:pPr indent="0" marL="0">
+              <a:buNone/>
+            </a:pPr>
+            <a:r>
+              <a:rPr lang="en-US" sz="1200" dirty="0">
                 <a:solidFill>
                   <a:srgbClr val="636366"/>
                 </a:solidFill>
@@ -9968,824 +10270,7 @@
                 <a:ea typeface="Noto Sans KR" pitchFamily="34" charset="-122"/>
                 <a:cs typeface="Noto Sans KR" pitchFamily="34" charset="-120"/>
               </a:rPr>
-              <a:t>7월</a:t>
-            </a:r>
-            <a:endParaRPr lang="en-US" sz="1000" dirty="0"/>
-          </a:p>
-        </p:txBody>
-      </p:sp>
-      <p:sp>
-        <p:nvSpPr>
-          <p:cNvPr id="42" name="o234"/>
-          <p:cNvSpPr/>
-          <p:nvPr/>
-        </p:nvSpPr>
-        <p:spPr>
-          <a:xfrm>
-            <a:off x="4996180" y="2724150"/>
-            <a:ext cx="294640" cy="2857500"/>
-          </a:xfrm>
-          <a:prstGeom prst="roundRect">
-            <a:avLst>
-              <a:gd name="adj" fmla="val 19397"/>
-            </a:avLst>
-          </a:prstGeom>
-          <a:solidFill>
-            <a:srgbClr val="C7C7CC"/>
-          </a:solidFill>
-          <a:ln/>
-        </p:spPr>
-      </p:sp>
-      <p:sp>
-        <p:nvSpPr>
-          <p:cNvPr id="43" name="o235"/>
-          <p:cNvSpPr txBox="1"/>
-          <p:nvPr/>
-        </p:nvSpPr>
-        <p:spPr>
-          <a:xfrm>
-            <a:off x="4919980" y="5657850"/>
-            <a:ext cx="447040" cy="133350"/>
-          </a:xfrm>
-          <a:prstGeom prst="rect">
-            <a:avLst/>
-          </a:prstGeom>
-          <a:noFill/>
-          <a:ln/>
-        </p:spPr>
-        <p:txBody>
-          <a:bodyPr wrap="square" lIns="0" tIns="0" rIns="0" bIns="0" rtlCol="0" anchor="t"/>
-          <a:lstStyle/>
-          <a:p>
-            <a:pPr algn="ctr" indent="0" marL="0">
-              <a:buNone/>
-            </a:pPr>
-            <a:r>
-              <a:rPr lang="en-US" sz="1000" dirty="0">
-                <a:solidFill>
-                  <a:srgbClr val="636366"/>
-                </a:solidFill>
-                <a:latin typeface="Noto Sans KR" pitchFamily="34" charset="0"/>
-                <a:ea typeface="Noto Sans KR" pitchFamily="34" charset="-122"/>
-                <a:cs typeface="Noto Sans KR" pitchFamily="34" charset="-120"/>
-              </a:rPr>
-              <a:t>8월</a:t>
-            </a:r>
-            <a:endParaRPr lang="en-US" sz="1000" dirty="0"/>
-          </a:p>
-        </p:txBody>
-      </p:sp>
-      <p:sp>
-        <p:nvSpPr>
-          <p:cNvPr id="44" name="o236"/>
-          <p:cNvSpPr/>
-          <p:nvPr/>
-        </p:nvSpPr>
-        <p:spPr>
-          <a:xfrm>
-            <a:off x="5504180" y="3295650"/>
-            <a:ext cx="294640" cy="2286000"/>
-          </a:xfrm>
-          <a:prstGeom prst="roundRect">
-            <a:avLst>
-              <a:gd name="adj" fmla="val 19397"/>
-            </a:avLst>
-          </a:prstGeom>
-          <a:solidFill>
-            <a:srgbClr val="F56300"/>
-          </a:solidFill>
-          <a:ln/>
-        </p:spPr>
-      </p:sp>
-      <p:sp>
-        <p:nvSpPr>
-          <p:cNvPr id="45" name="o237"/>
-          <p:cNvSpPr txBox="1"/>
-          <p:nvPr/>
-        </p:nvSpPr>
-        <p:spPr>
-          <a:xfrm>
-            <a:off x="5427980" y="3124200"/>
-            <a:ext cx="447040" cy="133350"/>
-          </a:xfrm>
-          <a:prstGeom prst="rect">
-            <a:avLst/>
-          </a:prstGeom>
-          <a:noFill/>
-          <a:ln/>
-        </p:spPr>
-        <p:txBody>
-          <a:bodyPr wrap="square" lIns="0" tIns="0" rIns="0" bIns="0" rtlCol="0" anchor="t"/>
-          <a:lstStyle/>
-          <a:p>
-            <a:pPr algn="ctr" indent="0" marL="0">
-              <a:buNone/>
-            </a:pPr>
-            <a:r>
-              <a:rPr lang="en-US" sz="1000" b="1" dirty="0">
-                <a:solidFill>
-                  <a:srgbClr val="B33F00"/>
-                </a:solidFill>
-                <a:latin typeface="Inter" pitchFamily="34" charset="0"/>
-                <a:ea typeface="Inter" pitchFamily="34" charset="-122"/>
-                <a:cs typeface="Inter" pitchFamily="34" charset="-120"/>
-              </a:rPr>
-              <a:t>80</a:t>
-            </a:r>
-            <a:endParaRPr lang="en-US" sz="1000" dirty="0"/>
-          </a:p>
-        </p:txBody>
-      </p:sp>
-      <p:sp>
-        <p:nvSpPr>
-          <p:cNvPr id="46" name="o238"/>
-          <p:cNvSpPr txBox="1"/>
-          <p:nvPr/>
-        </p:nvSpPr>
-        <p:spPr>
-          <a:xfrm>
-            <a:off x="5427980" y="5657850"/>
-            <a:ext cx="447040" cy="133350"/>
-          </a:xfrm>
-          <a:prstGeom prst="rect">
-            <a:avLst/>
-          </a:prstGeom>
-          <a:noFill/>
-          <a:ln/>
-        </p:spPr>
-        <p:txBody>
-          <a:bodyPr wrap="square" lIns="0" tIns="0" rIns="0" bIns="0" rtlCol="0" anchor="t"/>
-          <a:lstStyle/>
-          <a:p>
-            <a:pPr algn="ctr" indent="0" marL="0">
-              <a:buNone/>
-            </a:pPr>
-            <a:r>
-              <a:rPr lang="en-US" sz="1000" dirty="0">
-                <a:solidFill>
-                  <a:srgbClr val="636366"/>
-                </a:solidFill>
-                <a:latin typeface="Noto Sans KR" pitchFamily="34" charset="0"/>
-                <a:ea typeface="Noto Sans KR" pitchFamily="34" charset="-122"/>
-                <a:cs typeface="Noto Sans KR" pitchFamily="34" charset="-120"/>
-              </a:rPr>
-              <a:t>9월</a:t>
-            </a:r>
-            <a:endParaRPr lang="en-US" sz="1000" dirty="0"/>
-          </a:p>
-        </p:txBody>
-      </p:sp>
-      <p:sp>
-        <p:nvSpPr>
-          <p:cNvPr id="47" name="o239"/>
-          <p:cNvSpPr/>
-          <p:nvPr/>
-        </p:nvSpPr>
-        <p:spPr>
-          <a:xfrm>
-            <a:off x="6012180" y="4152900"/>
-            <a:ext cx="294640" cy="1428750"/>
-          </a:xfrm>
-          <a:prstGeom prst="roundRect">
-            <a:avLst>
-              <a:gd name="adj" fmla="val 19397"/>
-            </a:avLst>
-          </a:prstGeom>
-          <a:solidFill>
-            <a:srgbClr val="F56300"/>
-          </a:solidFill>
-          <a:ln/>
-        </p:spPr>
-      </p:sp>
-      <p:sp>
-        <p:nvSpPr>
-          <p:cNvPr id="48" name="o240"/>
-          <p:cNvSpPr txBox="1"/>
-          <p:nvPr/>
-        </p:nvSpPr>
-        <p:spPr>
-          <a:xfrm>
-            <a:off x="5935980" y="3981450"/>
-            <a:ext cx="447040" cy="133350"/>
-          </a:xfrm>
-          <a:prstGeom prst="rect">
-            <a:avLst/>
-          </a:prstGeom>
-          <a:noFill/>
-          <a:ln/>
-        </p:spPr>
-        <p:txBody>
-          <a:bodyPr wrap="square" lIns="0" tIns="0" rIns="0" bIns="0" rtlCol="0" anchor="t"/>
-          <a:lstStyle/>
-          <a:p>
-            <a:pPr algn="ctr" indent="0" marL="0">
-              <a:buNone/>
-            </a:pPr>
-            <a:r>
-              <a:rPr lang="en-US" sz="1000" b="1" dirty="0">
-                <a:solidFill>
-                  <a:srgbClr val="B33F00"/>
-                </a:solidFill>
-                <a:latin typeface="Inter" pitchFamily="34" charset="0"/>
-                <a:ea typeface="Inter" pitchFamily="34" charset="-122"/>
-                <a:cs typeface="Inter" pitchFamily="34" charset="-120"/>
-              </a:rPr>
-              <a:t>50</a:t>
-            </a:r>
-            <a:endParaRPr lang="en-US" sz="1000" dirty="0"/>
-          </a:p>
-        </p:txBody>
-      </p:sp>
-      <p:sp>
-        <p:nvSpPr>
-          <p:cNvPr id="49" name="o241"/>
-          <p:cNvSpPr txBox="1"/>
-          <p:nvPr/>
-        </p:nvSpPr>
-        <p:spPr>
-          <a:xfrm>
-            <a:off x="5935980" y="5657850"/>
-            <a:ext cx="447040" cy="133350"/>
-          </a:xfrm>
-          <a:prstGeom prst="rect">
-            <a:avLst/>
-          </a:prstGeom>
-          <a:noFill/>
-          <a:ln/>
-        </p:spPr>
-        <p:txBody>
-          <a:bodyPr wrap="square" lIns="0" tIns="0" rIns="0" bIns="0" rtlCol="0" anchor="t"/>
-          <a:lstStyle/>
-          <a:p>
-            <a:pPr algn="ctr" indent="0" marL="0">
-              <a:buNone/>
-            </a:pPr>
-            <a:r>
-              <a:rPr lang="en-US" sz="1000" dirty="0">
-                <a:solidFill>
-                  <a:srgbClr val="636366"/>
-                </a:solidFill>
-                <a:latin typeface="Noto Sans KR" pitchFamily="34" charset="0"/>
-                <a:ea typeface="Noto Sans KR" pitchFamily="34" charset="-122"/>
-                <a:cs typeface="Noto Sans KR" pitchFamily="34" charset="-120"/>
-              </a:rPr>
-              <a:t>10월</a:t>
-            </a:r>
-            <a:endParaRPr lang="en-US" sz="1000" dirty="0"/>
-          </a:p>
-        </p:txBody>
-      </p:sp>
-      <p:sp>
-        <p:nvSpPr>
-          <p:cNvPr id="50" name="o242"/>
-          <p:cNvSpPr/>
-          <p:nvPr/>
-        </p:nvSpPr>
-        <p:spPr>
-          <a:xfrm>
-            <a:off x="6520180" y="3900768"/>
-            <a:ext cx="294640" cy="1680882"/>
-          </a:xfrm>
-          <a:prstGeom prst="roundRect">
-            <a:avLst>
-              <a:gd name="adj" fmla="val 19397"/>
-            </a:avLst>
-          </a:prstGeom>
-          <a:solidFill>
-            <a:srgbClr val="F56300"/>
-          </a:solidFill>
-          <a:ln/>
-        </p:spPr>
-      </p:sp>
-      <p:sp>
-        <p:nvSpPr>
-          <p:cNvPr id="51" name="o243"/>
-          <p:cNvSpPr txBox="1"/>
-          <p:nvPr/>
-        </p:nvSpPr>
-        <p:spPr>
-          <a:xfrm>
-            <a:off x="6443980" y="3729318"/>
-            <a:ext cx="447040" cy="133350"/>
-          </a:xfrm>
-          <a:prstGeom prst="rect">
-            <a:avLst/>
-          </a:prstGeom>
-          <a:noFill/>
-          <a:ln/>
-        </p:spPr>
-        <p:txBody>
-          <a:bodyPr wrap="square" lIns="0" tIns="0" rIns="0" bIns="0" rtlCol="0" anchor="t"/>
-          <a:lstStyle/>
-          <a:p>
-            <a:pPr algn="ctr" indent="0" marL="0">
-              <a:buNone/>
-            </a:pPr>
-            <a:r>
-              <a:rPr lang="en-US" sz="1000" b="1" dirty="0">
-                <a:solidFill>
-                  <a:srgbClr val="B33F00"/>
-                </a:solidFill>
-                <a:latin typeface="Inter" pitchFamily="34" charset="0"/>
-                <a:ea typeface="Inter" pitchFamily="34" charset="-122"/>
-                <a:cs typeface="Inter" pitchFamily="34" charset="-120"/>
-              </a:rPr>
-              <a:t>59</a:t>
-            </a:r>
-            <a:endParaRPr lang="en-US" sz="1000" dirty="0"/>
-          </a:p>
-        </p:txBody>
-      </p:sp>
-      <p:sp>
-        <p:nvSpPr>
-          <p:cNvPr id="52" name="o244"/>
-          <p:cNvSpPr txBox="1"/>
-          <p:nvPr/>
-        </p:nvSpPr>
-        <p:spPr>
-          <a:xfrm>
-            <a:off x="6443980" y="5657850"/>
-            <a:ext cx="447040" cy="133350"/>
-          </a:xfrm>
-          <a:prstGeom prst="rect">
-            <a:avLst/>
-          </a:prstGeom>
-          <a:noFill/>
-          <a:ln/>
-        </p:spPr>
-        <p:txBody>
-          <a:bodyPr wrap="square" lIns="0" tIns="0" rIns="0" bIns="0" rtlCol="0" anchor="t"/>
-          <a:lstStyle/>
-          <a:p>
-            <a:pPr algn="ctr" indent="0" marL="0">
-              <a:buNone/>
-            </a:pPr>
-            <a:r>
-              <a:rPr lang="en-US" sz="1000" dirty="0">
-                <a:solidFill>
-                  <a:srgbClr val="636366"/>
-                </a:solidFill>
-                <a:latin typeface="Noto Sans KR" pitchFamily="34" charset="0"/>
-                <a:ea typeface="Noto Sans KR" pitchFamily="34" charset="-122"/>
-                <a:cs typeface="Noto Sans KR" pitchFamily="34" charset="-120"/>
-              </a:rPr>
-              <a:t>11월</a:t>
-            </a:r>
-            <a:endParaRPr lang="en-US" sz="1000" dirty="0"/>
-          </a:p>
-        </p:txBody>
-      </p:sp>
-      <p:sp>
-        <p:nvSpPr>
-          <p:cNvPr id="53" name="o245"/>
-          <p:cNvSpPr/>
-          <p:nvPr/>
-        </p:nvSpPr>
-        <p:spPr>
-          <a:xfrm>
-            <a:off x="7028180" y="2724150"/>
-            <a:ext cx="294640" cy="2857500"/>
-          </a:xfrm>
-          <a:prstGeom prst="roundRect">
-            <a:avLst>
-              <a:gd name="adj" fmla="val 19397"/>
-            </a:avLst>
-          </a:prstGeom>
-          <a:solidFill>
-            <a:srgbClr val="C7C7CC"/>
-          </a:solidFill>
-          <a:ln/>
-        </p:spPr>
-      </p:sp>
-      <p:sp>
-        <p:nvSpPr>
-          <p:cNvPr id="54" name="o246"/>
-          <p:cNvSpPr txBox="1"/>
-          <p:nvPr/>
-        </p:nvSpPr>
-        <p:spPr>
-          <a:xfrm>
-            <a:off x="6951980" y="5657850"/>
-            <a:ext cx="447040" cy="133350"/>
-          </a:xfrm>
-          <a:prstGeom prst="rect">
-            <a:avLst/>
-          </a:prstGeom>
-          <a:noFill/>
-          <a:ln/>
-        </p:spPr>
-        <p:txBody>
-          <a:bodyPr wrap="square" lIns="0" tIns="0" rIns="0" bIns="0" rtlCol="0" anchor="t"/>
-          <a:lstStyle/>
-          <a:p>
-            <a:pPr algn="ctr" indent="0" marL="0">
-              <a:buNone/>
-            </a:pPr>
-            <a:r>
-              <a:rPr lang="en-US" sz="1000" dirty="0">
-                <a:solidFill>
-                  <a:srgbClr val="636366"/>
-                </a:solidFill>
-                <a:latin typeface="Noto Sans KR" pitchFamily="34" charset="0"/>
-                <a:ea typeface="Noto Sans KR" pitchFamily="34" charset="-122"/>
-                <a:cs typeface="Noto Sans KR" pitchFamily="34" charset="-120"/>
-              </a:rPr>
-              <a:t>12월</a:t>
-            </a:r>
-            <a:endParaRPr lang="en-US" sz="1000" dirty="0"/>
-          </a:p>
-        </p:txBody>
-      </p:sp>
-      <p:sp>
-        <p:nvSpPr>
-          <p:cNvPr id="55" name="o247"/>
-          <p:cNvSpPr txBox="1"/>
-          <p:nvPr/>
-        </p:nvSpPr>
-        <p:spPr>
-          <a:xfrm>
-            <a:off x="914400" y="5886450"/>
-            <a:ext cx="6667500" cy="190500"/>
-          </a:xfrm>
-          <a:prstGeom prst="rect">
-            <a:avLst/>
-          </a:prstGeom>
-          <a:noFill/>
-          <a:ln/>
-        </p:spPr>
-        <p:txBody>
-          <a:bodyPr wrap="square" lIns="0" tIns="0" rIns="0" bIns="0" rtlCol="0" anchor="t"/>
-          <a:lstStyle/>
-          <a:p>
-            <a:pPr indent="0" marL="0">
-              <a:buNone/>
-            </a:pPr>
-            <a:r>
-              <a:rPr lang="en-US" sz="1300" b="1" dirty="0">
-                <a:solidFill>
-                  <a:srgbClr val="B33F00"/>
-                </a:solidFill>
-                <a:latin typeface="Noto Sans KR" pitchFamily="34" charset="0"/>
-                <a:ea typeface="Noto Sans KR" pitchFamily="34" charset="-122"/>
-                <a:cs typeface="Noto Sans KR" pitchFamily="34" charset="-120"/>
-              </a:rPr>
-              <a:t>12개월 중 8개월에서 누락 — 특정 시기가 아니라 1년 내내 반복됐다</a:t>
-            </a:r>
-            <a:endParaRPr lang="en-US" sz="1300" dirty="0"/>
-          </a:p>
-        </p:txBody>
-      </p:sp>
-      <p:sp>
-        <p:nvSpPr>
-          <p:cNvPr id="56" name="o248"/>
-          <p:cNvSpPr/>
-          <p:nvPr/>
-        </p:nvSpPr>
-        <p:spPr>
-          <a:xfrm>
-            <a:off x="7886700" y="1600200"/>
-            <a:ext cx="3695700" cy="2209800"/>
-          </a:xfrm>
-          <a:prstGeom prst="roundRect">
-            <a:avLst>
-              <a:gd name="adj" fmla="val 8621"/>
-            </a:avLst>
-          </a:prstGeom>
-          <a:solidFill>
-            <a:srgbClr val="F5F5F7"/>
-          </a:solidFill>
-          <a:ln/>
-        </p:spPr>
-      </p:sp>
-      <p:sp>
-        <p:nvSpPr>
-          <p:cNvPr id="57" name="o249"/>
-          <p:cNvSpPr txBox="1"/>
-          <p:nvPr/>
-        </p:nvSpPr>
-        <p:spPr>
-          <a:xfrm>
-            <a:off x="8191500" y="1828800"/>
-            <a:ext cx="3048000" cy="171450"/>
-          </a:xfrm>
-          <a:prstGeom prst="rect">
-            <a:avLst/>
-          </a:prstGeom>
-          <a:noFill/>
-          <a:ln/>
-        </p:spPr>
-        <p:txBody>
-          <a:bodyPr wrap="square" lIns="0" tIns="0" rIns="0" bIns="0" rtlCol="0" anchor="t"/>
-          <a:lstStyle/>
-          <a:p>
-            <a:pPr indent="0" marL="0">
-              <a:buNone/>
-            </a:pPr>
-            <a:r>
-              <a:rPr lang="en-US" sz="1300" dirty="0">
-                <a:solidFill>
-                  <a:srgbClr val="636366"/>
-                </a:solidFill>
-                <a:latin typeface="Noto Sans KR" pitchFamily="34" charset="0"/>
-                <a:ea typeface="Noto Sans KR" pitchFamily="34" charset="-122"/>
-                <a:cs typeface="Noto Sans KR" pitchFamily="34" charset="-120"/>
-              </a:rPr>
-              <a:t>법정교육 누락</a:t>
-            </a:r>
-            <a:endParaRPr lang="en-US" sz="1300" dirty="0"/>
-          </a:p>
-        </p:txBody>
-      </p:sp>
-      <p:sp>
-        <p:nvSpPr>
-          <p:cNvPr id="58" name="o250"/>
-          <p:cNvSpPr txBox="1"/>
-          <p:nvPr/>
-        </p:nvSpPr>
-        <p:spPr>
-          <a:xfrm>
-            <a:off x="8191500" y="2076450"/>
-            <a:ext cx="3048000" cy="666750"/>
-          </a:xfrm>
-          <a:prstGeom prst="rect">
-            <a:avLst/>
-          </a:prstGeom>
-          <a:noFill/>
-          <a:ln/>
-        </p:spPr>
-        <p:txBody>
-          <a:bodyPr wrap="square" lIns="0" tIns="0" rIns="0" bIns="0" rtlCol="0" anchor="t"/>
-          <a:lstStyle/>
-          <a:p>
-            <a:pPr indent="0" marL="0">
-              <a:buNone/>
-            </a:pPr>
-            <a:r>
-              <a:rPr lang="en-US" sz="5200" b="1" dirty="0">
-                <a:solidFill>
-                  <a:srgbClr val="B33F00"/>
-                </a:solidFill>
-                <a:latin typeface="Inter" pitchFamily="34" charset="0"/>
-                <a:ea typeface="Inter" pitchFamily="34" charset="-122"/>
-                <a:cs typeface="Inter" pitchFamily="34" charset="-120"/>
-              </a:rPr>
-              <a:t>18건</a:t>
-            </a:r>
-            <a:endParaRPr lang="en-US" sz="5200" dirty="0"/>
-          </a:p>
-        </p:txBody>
-      </p:sp>
-      <p:sp>
-        <p:nvSpPr>
-          <p:cNvPr id="59" name="o251"/>
-          <p:cNvSpPr txBox="1"/>
-          <p:nvPr/>
-        </p:nvSpPr>
-        <p:spPr>
-          <a:xfrm>
-            <a:off x="8191500" y="2857500"/>
-            <a:ext cx="3048000" cy="190500"/>
-          </a:xfrm>
-          <a:prstGeom prst="rect">
-            <a:avLst/>
-          </a:prstGeom>
-          <a:noFill/>
-          <a:ln/>
-        </p:spPr>
-        <p:txBody>
-          <a:bodyPr wrap="square" lIns="0" tIns="0" rIns="0" bIns="0" rtlCol="0" anchor="t"/>
-          <a:lstStyle/>
-          <a:p>
-            <a:pPr indent="0" marL="0">
-              <a:buNone/>
-            </a:pPr>
-            <a:r>
-              <a:rPr lang="en-US" sz="1300" b="1" dirty="0">
-                <a:solidFill>
-                  <a:srgbClr val="1D1D1F"/>
-                </a:solidFill>
-                <a:latin typeface="Noto Sans KR" pitchFamily="34" charset="0"/>
-                <a:ea typeface="Noto Sans KR" pitchFamily="34" charset="-122"/>
-                <a:cs typeface="Noto Sans KR" pitchFamily="34" charset="-120"/>
-              </a:rPr>
-              <a:t>106명 중 17% · 이행률 83%</a:t>
-            </a:r>
-            <a:endParaRPr lang="en-US" sz="1300" dirty="0"/>
-          </a:p>
-        </p:txBody>
-      </p:sp>
-      <p:sp>
-        <p:nvSpPr>
-          <p:cNvPr id="60" name="o252"/>
-          <p:cNvSpPr txBox="1"/>
-          <p:nvPr/>
-        </p:nvSpPr>
-        <p:spPr>
-          <a:xfrm>
-            <a:off x="8191500" y="3352800"/>
-            <a:ext cx="3048000" cy="171450"/>
-          </a:xfrm>
-          <a:prstGeom prst="rect">
-            <a:avLst/>
-          </a:prstGeom>
-          <a:noFill/>
-          <a:ln/>
-        </p:spPr>
-        <p:txBody>
-          <a:bodyPr wrap="square" lIns="0" tIns="0" rIns="0" bIns="0" rtlCol="0" anchor="t"/>
-          <a:lstStyle/>
-          <a:p>
-            <a:pPr indent="0" marL="0">
-              <a:buNone/>
-            </a:pPr>
-            <a:r>
-              <a:rPr lang="en-US" sz="1200" dirty="0">
-                <a:solidFill>
-                  <a:srgbClr val="636366"/>
-                </a:solidFill>
-                <a:latin typeface="Noto Sans KR" pitchFamily="34" charset="0"/>
-                <a:ea typeface="Noto Sans KR" pitchFamily="34" charset="-122"/>
-                <a:cs typeface="Noto Sans KR" pitchFamily="34" charset="-120"/>
-              </a:rPr>
-              <a:t>지표: 준수율 83% → 목표 100%</a:t>
-            </a:r>
-            <a:endParaRPr lang="en-US" sz="1200" dirty="0"/>
-          </a:p>
-        </p:txBody>
-      </p:sp>
-      <p:sp>
-        <p:nvSpPr>
-          <p:cNvPr id="61" name="o253"/>
-          <p:cNvSpPr/>
-          <p:nvPr/>
-        </p:nvSpPr>
-        <p:spPr>
-          <a:xfrm>
-            <a:off x="7886700" y="4000500"/>
-            <a:ext cx="3695700" cy="2247900"/>
-          </a:xfrm>
-          <a:prstGeom prst="roundRect">
-            <a:avLst>
-              <a:gd name="adj" fmla="val 8475"/>
-            </a:avLst>
-          </a:prstGeom>
-          <a:solidFill>
-            <a:srgbClr val="0A1F44"/>
-          </a:solidFill>
-          <a:ln/>
-        </p:spPr>
-      </p:sp>
-      <p:sp>
-        <p:nvSpPr>
-          <p:cNvPr id="62" name="o254"/>
-          <p:cNvSpPr txBox="1"/>
-          <p:nvPr/>
-        </p:nvSpPr>
-        <p:spPr>
-          <a:xfrm>
-            <a:off x="8191500" y="4229100"/>
-            <a:ext cx="3048000" cy="171450"/>
-          </a:xfrm>
-          <a:prstGeom prst="rect">
-            <a:avLst/>
-          </a:prstGeom>
-          <a:noFill/>
-          <a:ln/>
-        </p:spPr>
-        <p:txBody>
-          <a:bodyPr wrap="square" lIns="0" tIns="0" rIns="0" bIns="0" rtlCol="0" anchor="t"/>
-          <a:lstStyle/>
-          <a:p>
-            <a:pPr indent="0" marL="0">
-              <a:buNone/>
-            </a:pPr>
-            <a:r>
-              <a:rPr lang="en-US" sz="1300" dirty="0">
-                <a:solidFill>
-                  <a:srgbClr val="A9B8D0"/>
-                </a:solidFill>
-                <a:latin typeface="Noto Sans KR" pitchFamily="34" charset="0"/>
-                <a:ea typeface="Noto Sans KR" pitchFamily="34" charset="-122"/>
-                <a:cs typeface="Noto Sans KR" pitchFamily="34" charset="-120"/>
-              </a:rPr>
-              <a:t>종이 기반 처리</a:t>
-            </a:r>
-            <a:endParaRPr lang="en-US" sz="1300" dirty="0"/>
-          </a:p>
-        </p:txBody>
-      </p:sp>
-      <p:sp>
-        <p:nvSpPr>
-          <p:cNvPr id="63" name="o255"/>
-          <p:cNvSpPr txBox="1"/>
-          <p:nvPr/>
-        </p:nvSpPr>
-        <p:spPr>
-          <a:xfrm>
-            <a:off x="8191500" y="4476750"/>
-            <a:ext cx="3048000" cy="666750"/>
-          </a:xfrm>
-          <a:prstGeom prst="rect">
-            <a:avLst/>
-          </a:prstGeom>
-          <a:noFill/>
-          <a:ln/>
-        </p:spPr>
-        <p:txBody>
-          <a:bodyPr wrap="square" lIns="0" tIns="0" rIns="0" bIns="0" rtlCol="0" anchor="t"/>
-          <a:lstStyle/>
-          <a:p>
-            <a:pPr indent="0" marL="0">
-              <a:buNone/>
-            </a:pPr>
-            <a:r>
-              <a:rPr lang="en-US" sz="5200" b="1" dirty="0">
-                <a:solidFill>
-                  <a:srgbClr val="FFFFFF"/>
-                </a:solidFill>
-                <a:latin typeface="Inter" pitchFamily="34" charset="0"/>
-                <a:ea typeface="Inter" pitchFamily="34" charset="-122"/>
-                <a:cs typeface="Inter" pitchFamily="34" charset="-120"/>
-              </a:rPr>
-              <a:t>100%</a:t>
-            </a:r>
-            <a:endParaRPr lang="en-US" sz="5200" dirty="0"/>
-          </a:p>
-        </p:txBody>
-      </p:sp>
-      <p:sp>
-        <p:nvSpPr>
-          <p:cNvPr id="64" name="o256"/>
-          <p:cNvSpPr txBox="1"/>
-          <p:nvPr/>
-        </p:nvSpPr>
-        <p:spPr>
-          <a:xfrm>
-            <a:off x="8191500" y="5257800"/>
-            <a:ext cx="3048000" cy="190500"/>
-          </a:xfrm>
-          <a:prstGeom prst="rect">
-            <a:avLst/>
-          </a:prstGeom>
-          <a:noFill/>
-          <a:ln/>
-        </p:spPr>
-        <p:txBody>
-          <a:bodyPr wrap="square" lIns="0" tIns="0" rIns="0" bIns="0" rtlCol="0" anchor="t"/>
-          <a:lstStyle/>
-          <a:p>
-            <a:pPr indent="0" marL="0">
-              <a:buNone/>
-            </a:pPr>
-            <a:r>
-              <a:rPr lang="en-US" sz="1300" b="1" dirty="0">
-                <a:solidFill>
-                  <a:srgbClr val="FFFFFF"/>
-                </a:solidFill>
-                <a:latin typeface="Noto Sans KR" pitchFamily="34" charset="0"/>
-                <a:ea typeface="Noto Sans KR" pitchFamily="34" charset="-122"/>
-                <a:cs typeface="Noto Sans KR" pitchFamily="34" charset="-120"/>
-              </a:rPr>
-              <a:t>연 94건 출력 · 서명 · 바인더 보관</a:t>
-            </a:r>
-            <a:endParaRPr lang="en-US" sz="1300" dirty="0"/>
-          </a:p>
-        </p:txBody>
-      </p:sp>
-      <p:sp>
-        <p:nvSpPr>
-          <p:cNvPr id="65" name="o257"/>
-          <p:cNvSpPr txBox="1"/>
-          <p:nvPr/>
-        </p:nvSpPr>
-        <p:spPr>
-          <a:xfrm>
-            <a:off x="8191500" y="5753100"/>
-            <a:ext cx="3048000" cy="171450"/>
-          </a:xfrm>
-          <a:prstGeom prst="rect">
-            <a:avLst/>
-          </a:prstGeom>
-          <a:noFill/>
-          <a:ln/>
-        </p:spPr>
-        <p:txBody>
-          <a:bodyPr wrap="square" lIns="0" tIns="0" rIns="0" bIns="0" rtlCol="0" anchor="t"/>
-          <a:lstStyle/>
-          <a:p>
-            <a:pPr indent="0" marL="0">
-              <a:buNone/>
-            </a:pPr>
-            <a:r>
-              <a:rPr lang="en-US" sz="1200" dirty="0">
-                <a:solidFill>
-                  <a:srgbClr val="A9B8D0"/>
-                </a:solidFill>
-                <a:latin typeface="Noto Sans KR" pitchFamily="34" charset="0"/>
-                <a:ea typeface="Noto Sans KR" pitchFamily="34" charset="-122"/>
-                <a:cs typeface="Noto Sans KR" pitchFamily="34" charset="-120"/>
-              </a:rPr>
-              <a:t>지표: 페이퍼리스 0% → 목표 100%</a:t>
+              <a:t>기준값 → 지표 ③ 행정 소요시간 단축률 · 기다림과 이동만 없애도 78%가 줄어든다</a:t>
             </a:r>
             <a:endParaRPr lang="en-US" sz="1200" dirty="0"/>
           </a:p>
@@ -10818,7 +10303,7 @@
       </p:grpSpPr>
       <p:sp>
         <p:nvSpPr>
-          <p:cNvPr id="2" name="o258"/>
+          <p:cNvPr id="2" name="o245"/>
           <p:cNvSpPr txBox="1"/>
           <p:nvPr/>
         </p:nvSpPr>
@@ -10849,7 +10334,7 @@
                 <a:ea typeface="Noto Sans KR" pitchFamily="34" charset="-122"/>
                 <a:cs typeface="Noto Sans KR" pitchFamily="34" charset="-120"/>
               </a:rPr>
-              <a:t>PLAN · 현황 분석 ②</a:t>
+              <a:t>PLAN · 지표 설정 · 목표</a:t>
             </a:r>
             <a:endParaRPr lang="en-US" sz="1000" dirty="0"/>
           </a:p>
@@ -10857,7 +10342,7 @@
       </p:sp>
       <p:sp>
         <p:nvSpPr>
-          <p:cNvPr id="3" name="o259"/>
+          <p:cNvPr id="3" name="o246"/>
           <p:cNvSpPr txBox="1"/>
           <p:nvPr/>
         </p:nvSpPr>
@@ -10896,7 +10381,7 @@
       </p:sp>
       <p:sp>
         <p:nvSpPr>
-          <p:cNvPr id="4" name="o260"/>
+          <p:cNvPr id="4" name="o247"/>
           <p:cNvSpPr/>
           <p:nvPr/>
         </p:nvSpPr>
@@ -10916,7 +10401,7 @@
       </p:sp>
       <p:sp>
         <p:nvSpPr>
-          <p:cNvPr id="5" name="o261"/>
+          <p:cNvPr id="5" name="o248"/>
           <p:cNvSpPr txBox="1"/>
           <p:nvPr/>
         </p:nvSpPr>
@@ -10955,7 +10440,7 @@
       </p:sp>
       <p:sp>
         <p:nvSpPr>
-          <p:cNvPr id="6" name="o262"/>
+          <p:cNvPr id="6" name="o249"/>
           <p:cNvSpPr txBox="1"/>
           <p:nvPr/>
         </p:nvSpPr>
@@ -10994,7 +10479,7 @@
       </p:sp>
       <p:sp>
         <p:nvSpPr>
-          <p:cNvPr id="7" name="o263"/>
+          <p:cNvPr id="7" name="o250"/>
           <p:cNvSpPr txBox="1"/>
           <p:nvPr/>
         </p:nvSpPr>
@@ -11033,7 +10518,7 @@
       </p:sp>
       <p:sp>
         <p:nvSpPr>
-          <p:cNvPr id="8" name="o264"/>
+          <p:cNvPr id="8" name="o251"/>
           <p:cNvSpPr txBox="1"/>
           <p:nvPr/>
         </p:nvSpPr>
@@ -11064,7 +10549,7 @@
                 <a:ea typeface="Noto Sans KR" pitchFamily="34" charset="-122"/>
                 <a:cs typeface="Noto Sans KR" pitchFamily="34" charset="-120"/>
               </a:rPr>
-              <a:t>교육 1건에 33분 48초, 그중 78%는 기다림과 이동이었다</a:t>
+              <a:t>현황을 기준값으로, 4개 지표와 목표를 정했다</a:t>
             </a:r>
             <a:endParaRPr lang="en-US" sz="2800" dirty="0"/>
           </a:p>
@@ -11072,7 +10557,7 @@
       </p:sp>
       <p:sp>
         <p:nvSpPr>
-          <p:cNvPr id="9" name="o265"/>
+          <p:cNvPr id="9" name="o252"/>
           <p:cNvSpPr txBox="1"/>
           <p:nvPr/>
         </p:nvSpPr>
@@ -11103,7 +10588,7 @@
                 <a:ea typeface="Noto Sans KR" pitchFamily="34" charset="-122"/>
                 <a:cs typeface="Noto Sans KR" pitchFamily="34" charset="-120"/>
               </a:rPr>
-              <a:t>2025년 1월 세부 행동 단위별 소요시간 실측 (교육 진행 시간 제외)</a:t>
+              <a:t>기준값(2025) → 목표 · 같은 방법으로 개선 후를 다시 잰다</a:t>
             </a:r>
             <a:endParaRPr lang="en-US" sz="1500" dirty="0"/>
           </a:p>
@@ -11111,7 +10596,7 @@
       </p:sp>
       <p:sp>
         <p:nvSpPr>
-          <p:cNvPr id="10" name="o266"/>
+          <p:cNvPr id="10" name="o253"/>
           <p:cNvSpPr txBox="1"/>
           <p:nvPr/>
         </p:nvSpPr>
@@ -11150,7 +10635,7 @@
       </p:sp>
       <p:sp>
         <p:nvSpPr>
-          <p:cNvPr id="11" name="o267"/>
+          <p:cNvPr id="11" name="o254"/>
           <p:cNvSpPr txBox="1"/>
           <p:nvPr/>
         </p:nvSpPr>
@@ -11189,114 +10674,153 @@
       </p:sp>
       <p:sp>
         <p:nvSpPr>
-          <p:cNvPr id="12" name="o268"/>
+          <p:cNvPr id="12" name="o255"/>
           <p:cNvSpPr/>
           <p:nvPr/>
         </p:nvSpPr>
         <p:spPr>
           <a:xfrm>
             <a:off x="609600" y="1600200"/>
-            <a:ext cx="3530600" cy="2095500"/>
+            <a:ext cx="5391150" cy="1181100"/>
           </a:xfrm>
           <a:prstGeom prst="roundRect">
             <a:avLst>
-              <a:gd name="adj" fmla="val 10909"/>
+              <a:gd name="adj" fmla="val 16129"/>
             </a:avLst>
           </a:prstGeom>
           <a:solidFill>
-            <a:srgbClr val="0A1F44"/>
+            <a:srgbClr val="F5F5F7"/>
           </a:solidFill>
           <a:ln/>
         </p:spPr>
       </p:sp>
       <p:sp>
         <p:nvSpPr>
-          <p:cNvPr id="13" name="o269"/>
-          <p:cNvSpPr txBox="1"/>
-          <p:nvPr/>
-        </p:nvSpPr>
-        <p:spPr>
-          <a:xfrm>
-            <a:off x="914400" y="1847850"/>
-            <a:ext cx="2921000" cy="190500"/>
-          </a:xfrm>
-          <a:prstGeom prst="rect">
-            <a:avLst/>
-          </a:prstGeom>
-          <a:noFill/>
-          <a:ln/>
-        </p:spPr>
-        <p:txBody>
-          <a:bodyPr wrap="square" lIns="0" tIns="0" rIns="0" bIns="0" rtlCol="0" anchor="t"/>
-          <a:lstStyle/>
-          <a:p>
-            <a:pPr indent="0" marL="0">
-              <a:buNone/>
-            </a:pPr>
-            <a:r>
-              <a:rPr lang="en-US" sz="1300" dirty="0">
-                <a:solidFill>
-                  <a:srgbClr val="A9B8D0"/>
-                </a:solidFill>
-                <a:latin typeface="Noto Sans KR" pitchFamily="34" charset="0"/>
-                <a:ea typeface="Noto Sans KR" pitchFamily="34" charset="-122"/>
-                <a:cs typeface="Noto Sans KR" pitchFamily="34" charset="-120"/>
-              </a:rPr>
-              <a:t>특별안전보건교육 1건</a:t>
-            </a:r>
-            <a:endParaRPr lang="en-US" sz="1300" dirty="0"/>
-          </a:p>
-        </p:txBody>
-      </p:sp>
-      <p:sp>
-        <p:nvSpPr>
-          <p:cNvPr id="14" name="o270"/>
-          <p:cNvSpPr txBox="1"/>
-          <p:nvPr/>
-        </p:nvSpPr>
-        <p:spPr>
-          <a:xfrm>
-            <a:off x="914400" y="2152650"/>
-            <a:ext cx="3149600" cy="762000"/>
-          </a:xfrm>
-          <a:prstGeom prst="rect">
-            <a:avLst/>
-          </a:prstGeom>
-          <a:noFill/>
-          <a:ln/>
-        </p:spPr>
-        <p:txBody>
-          <a:bodyPr wrap="square" lIns="0" tIns="0" rIns="0" bIns="0" rtlCol="0" anchor="t"/>
-          <a:lstStyle/>
-          <a:p>
-            <a:pPr indent="0" marL="0">
-              <a:buNone/>
-            </a:pPr>
-            <a:r>
-              <a:rPr lang="en-US" sz="4400" b="1" dirty="0">
-                <a:solidFill>
-                  <a:srgbClr val="FFFFFF"/>
+          <p:cNvPr id="13" name="o256"/>
+          <p:cNvSpPr txBox="1"/>
+          <p:nvPr/>
+        </p:nvSpPr>
+        <p:spPr>
+          <a:xfrm>
+            <a:off x="876300" y="1790700"/>
+            <a:ext cx="1905000" cy="171450"/>
+          </a:xfrm>
+          <a:prstGeom prst="rect">
+            <a:avLst/>
+          </a:prstGeom>
+          <a:noFill/>
+          <a:ln/>
+        </p:spPr>
+        <p:txBody>
+          <a:bodyPr wrap="square" lIns="0" tIns="0" rIns="0" bIns="0" rtlCol="0" anchor="t"/>
+          <a:lstStyle/>
+          <a:p>
+            <a:pPr indent="0" marL="0">
+              <a:buNone/>
+            </a:pPr>
+            <a:r>
+              <a:rPr lang="en-US" sz="1100" b="1" dirty="0">
+                <a:solidFill>
+                  <a:srgbClr val="0A1F44"/>
+                </a:solidFill>
+                <a:latin typeface="Noto Sans KR" pitchFamily="34" charset="0"/>
+                <a:ea typeface="Noto Sans KR" pitchFamily="34" charset="-122"/>
+                <a:cs typeface="Noto Sans KR" pitchFamily="34" charset="-120"/>
+              </a:rPr>
+              <a:t>① 과정지표</a:t>
+            </a:r>
+            <a:endParaRPr lang="en-US" sz="1100" dirty="0"/>
+          </a:p>
+        </p:txBody>
+      </p:sp>
+      <p:sp>
+        <p:nvSpPr>
+          <p:cNvPr id="14" name="o257"/>
+          <p:cNvSpPr txBox="1"/>
+          <p:nvPr/>
+        </p:nvSpPr>
+        <p:spPr>
+          <a:xfrm>
+            <a:off x="4781550" y="1790700"/>
+            <a:ext cx="952500" cy="171450"/>
+          </a:xfrm>
+          <a:prstGeom prst="rect">
+            <a:avLst/>
+          </a:prstGeom>
+          <a:noFill/>
+          <a:ln/>
+        </p:spPr>
+        <p:txBody>
+          <a:bodyPr wrap="square" lIns="0" tIns="0" rIns="0" bIns="0" rtlCol="0" anchor="t"/>
+          <a:lstStyle/>
+          <a:p>
+            <a:pPr algn="r" indent="0" marL="0">
+              <a:buNone/>
+            </a:pPr>
+            <a:r>
+              <a:rPr lang="en-US" sz="1000" dirty="0">
+                <a:solidFill>
+                  <a:srgbClr val="636366"/>
                 </a:solidFill>
                 <a:latin typeface="Inter" pitchFamily="34" charset="0"/>
                 <a:ea typeface="Inter" pitchFamily="34" charset="-122"/>
                 <a:cs typeface="Inter" pitchFamily="34" charset="-120"/>
               </a:rPr>
-              <a:t>33분 48초</a:t>
-            </a:r>
-            <a:endParaRPr lang="en-US" sz="4400" dirty="0"/>
-          </a:p>
-        </p:txBody>
-      </p:sp>
-      <p:sp>
-        <p:nvSpPr>
-          <p:cNvPr id="15" name="o271"/>
-          <p:cNvSpPr txBox="1"/>
-          <p:nvPr/>
-        </p:nvSpPr>
-        <p:spPr>
-          <a:xfrm>
-            <a:off x="914400" y="3143250"/>
-            <a:ext cx="2921000" cy="342900"/>
+              <a:t>근거 현황 05</a:t>
+            </a:r>
+            <a:endParaRPr lang="en-US" sz="1000" dirty="0"/>
+          </a:p>
+        </p:txBody>
+      </p:sp>
+      <p:sp>
+        <p:nvSpPr>
+          <p:cNvPr id="15" name="o258"/>
+          <p:cNvSpPr txBox="1"/>
+          <p:nvPr/>
+        </p:nvSpPr>
+        <p:spPr>
+          <a:xfrm>
+            <a:off x="876300" y="2000250"/>
+            <a:ext cx="3429000" cy="285750"/>
+          </a:xfrm>
+          <a:prstGeom prst="rect">
+            <a:avLst/>
+          </a:prstGeom>
+          <a:noFill/>
+          <a:ln/>
+        </p:spPr>
+        <p:txBody>
+          <a:bodyPr wrap="square" lIns="0" tIns="0" rIns="0" bIns="0" rtlCol="0" anchor="t"/>
+          <a:lstStyle/>
+          <a:p>
+            <a:pPr indent="0" marL="0">
+              <a:buNone/>
+            </a:pPr>
+            <a:r>
+              <a:rPr lang="en-US" sz="1900" b="1" dirty="0">
+                <a:solidFill>
+                  <a:srgbClr val="1D1D1F"/>
+                </a:solidFill>
+                <a:latin typeface="Noto Sans KR" pitchFamily="34" charset="0"/>
+                <a:ea typeface="Noto Sans KR" pitchFamily="34" charset="-122"/>
+                <a:cs typeface="Noto Sans KR" pitchFamily="34" charset="-120"/>
+              </a:rPr>
+              <a:t>법정 의무교육 준수율</a:t>
+            </a:r>
+            <a:endParaRPr lang="en-US" sz="1900" dirty="0"/>
+          </a:p>
+        </p:txBody>
+      </p:sp>
+      <p:sp>
+        <p:nvSpPr>
+          <p:cNvPr id="16" name="o259"/>
+          <p:cNvSpPr txBox="1"/>
+          <p:nvPr/>
+        </p:nvSpPr>
+        <p:spPr>
+          <a:xfrm>
+            <a:off x="876300" y="2362200"/>
+            <a:ext cx="3429000" cy="190500"/>
           </a:xfrm>
           <a:prstGeom prst="rect">
             <a:avLst/>
@@ -11314,13 +10838,13 @@
             <a:r>
               <a:rPr lang="en-US" sz="1200" dirty="0">
                 <a:solidFill>
-                  <a:srgbClr val="A9B8D0"/>
-                </a:solidFill>
-                <a:latin typeface="Noto Sans KR" pitchFamily="34" charset="0"/>
-                <a:ea typeface="Noto Sans KR" pitchFamily="34" charset="-122"/>
-                <a:cs typeface="Noto Sans KR" pitchFamily="34" charset="-120"/>
-              </a:rPr>
-              <a:t>작성 · 서명 · 제출 · 결재 · 보관</a:t>
+                  <a:srgbClr val="636366"/>
+                </a:solidFill>
+                <a:latin typeface="Noto Sans KR" pitchFamily="34" charset="0"/>
+                <a:ea typeface="Noto Sans KR" pitchFamily="34" charset="-122"/>
+                <a:cs typeface="Noto Sans KR" pitchFamily="34" charset="-120"/>
+              </a:rPr>
+              <a:t>기한 내 이행 완료 ÷ 법정 교육 대상</a:t>
             </a:r>
             <a:endParaRPr lang="en-US" sz="1200" dirty="0"/>
           </a:p>
@@ -11328,18 +10852,96 @@
       </p:sp>
       <p:sp>
         <p:nvSpPr>
-          <p:cNvPr id="16" name="o272"/>
+          <p:cNvPr id="17" name="o260"/>
+          <p:cNvSpPr txBox="1"/>
+          <p:nvPr/>
+        </p:nvSpPr>
+        <p:spPr>
+          <a:xfrm>
+            <a:off x="3829050" y="2057400"/>
+            <a:ext cx="1905000" cy="152400"/>
+          </a:xfrm>
+          <a:prstGeom prst="rect">
+            <a:avLst/>
+          </a:prstGeom>
+          <a:noFill/>
+          <a:ln/>
+        </p:spPr>
+        <p:txBody>
+          <a:bodyPr wrap="square" lIns="0" tIns="0" rIns="0" bIns="0" rtlCol="0" anchor="t"/>
+          <a:lstStyle/>
+          <a:p>
+            <a:pPr algn="r" indent="0" marL="0">
+              <a:buNone/>
+            </a:pPr>
+            <a:r>
+              <a:rPr lang="en-US" sz="1100" dirty="0">
+                <a:solidFill>
+                  <a:srgbClr val="636366"/>
+                </a:solidFill>
+                <a:latin typeface="Noto Sans KR" pitchFamily="34" charset="0"/>
+                <a:ea typeface="Noto Sans KR" pitchFamily="34" charset="-122"/>
+                <a:cs typeface="Noto Sans KR" pitchFamily="34" charset="-120"/>
+              </a:rPr>
+              <a:t>기준값 → 목표</a:t>
+            </a:r>
+            <a:endParaRPr lang="en-US" sz="1100" dirty="0"/>
+          </a:p>
+        </p:txBody>
+      </p:sp>
+      <p:sp>
+        <p:nvSpPr>
+          <p:cNvPr id="18" name="o261"/>
+          <p:cNvSpPr txBox="1"/>
+          <p:nvPr/>
+        </p:nvSpPr>
+        <p:spPr>
+          <a:xfrm>
+            <a:off x="3257550" y="2247900"/>
+            <a:ext cx="2476500" cy="342900"/>
+          </a:xfrm>
+          <a:prstGeom prst="rect">
+            <a:avLst/>
+          </a:prstGeom>
+          <a:noFill/>
+          <a:ln/>
+        </p:spPr>
+        <p:txBody>
+          <a:bodyPr wrap="square" lIns="0" tIns="0" rIns="0" bIns="0" rtlCol="0" anchor="t"/>
+          <a:lstStyle/>
+          <a:p>
+            <a:pPr algn="r" indent="0" marL="0">
+              <a:buNone/>
+            </a:pPr>
+            <a:r>
+              <a:rPr lang="en-US" sz="2200" b="1" dirty="0">
+                <a:solidFill>
+                  <a:srgbClr val="0A1F44"/>
+                </a:solidFill>
+                <a:latin typeface="Inter" pitchFamily="34" charset="0"/>
+                <a:ea typeface="Inter" pitchFamily="34" charset="-122"/>
+                <a:cs typeface="Inter" pitchFamily="34" charset="-120"/>
+              </a:rPr>
+              <a:t>83% → 100%</a:t>
+            </a:r>
+            <a:endParaRPr lang="en-US" sz="2200" dirty="0"/>
+          </a:p>
+        </p:txBody>
+      </p:sp>
+      <p:sp>
+        <p:nvSpPr>
+          <p:cNvPr id="19" name="o262"/>
           <p:cNvSpPr/>
           <p:nvPr/>
         </p:nvSpPr>
         <p:spPr>
           <a:xfrm>
-            <a:off x="4330700" y="1600200"/>
-            <a:ext cx="3530600" cy="2095500"/>
+            <a:off x="6191250" y="1600200"/>
+            <a:ext cx="5391150" cy="1181100"/>
           </a:xfrm>
           <a:prstGeom prst="roundRect">
             <a:avLst>
-              <a:gd name="adj" fmla="val 10909"/>
+              <a:gd name="adj" fmla="val 16129"/>
             </a:avLst>
           </a:prstGeom>
           <a:solidFill>
@@ -11350,92 +10952,131 @@
       </p:sp>
       <p:sp>
         <p:nvSpPr>
-          <p:cNvPr id="17" name="o273"/>
-          <p:cNvSpPr txBox="1"/>
-          <p:nvPr/>
-        </p:nvSpPr>
-        <p:spPr>
-          <a:xfrm>
-            <a:off x="4635500" y="1847850"/>
-            <a:ext cx="2921000" cy="190500"/>
-          </a:xfrm>
-          <a:prstGeom prst="rect">
-            <a:avLst/>
-          </a:prstGeom>
-          <a:noFill/>
-          <a:ln/>
-        </p:spPr>
-        <p:txBody>
-          <a:bodyPr wrap="square" lIns="0" tIns="0" rIns="0" bIns="0" rtlCol="0" anchor="t"/>
-          <a:lstStyle/>
-          <a:p>
-            <a:pPr indent="0" marL="0">
-              <a:buNone/>
-            </a:pPr>
-            <a:r>
-              <a:rPr lang="en-US" sz="1300" dirty="0">
+          <p:cNvPr id="20" name="o263"/>
+          <p:cNvSpPr txBox="1"/>
+          <p:nvPr/>
+        </p:nvSpPr>
+        <p:spPr>
+          <a:xfrm>
+            <a:off x="6457950" y="1790700"/>
+            <a:ext cx="1905000" cy="171450"/>
+          </a:xfrm>
+          <a:prstGeom prst="rect">
+            <a:avLst/>
+          </a:prstGeom>
+          <a:noFill/>
+          <a:ln/>
+        </p:spPr>
+        <p:txBody>
+          <a:bodyPr wrap="square" lIns="0" tIns="0" rIns="0" bIns="0" rtlCol="0" anchor="t"/>
+          <a:lstStyle/>
+          <a:p>
+            <a:pPr indent="0" marL="0">
+              <a:buNone/>
+            </a:pPr>
+            <a:r>
+              <a:rPr lang="en-US" sz="1100" b="1" dirty="0">
+                <a:solidFill>
+                  <a:srgbClr val="0A1F44"/>
+                </a:solidFill>
+                <a:latin typeface="Noto Sans KR" pitchFamily="34" charset="0"/>
+                <a:ea typeface="Noto Sans KR" pitchFamily="34" charset="-122"/>
+                <a:cs typeface="Noto Sans KR" pitchFamily="34" charset="-120"/>
+              </a:rPr>
+              <a:t>② 결과지표</a:t>
+            </a:r>
+            <a:endParaRPr lang="en-US" sz="1100" dirty="0"/>
+          </a:p>
+        </p:txBody>
+      </p:sp>
+      <p:sp>
+        <p:nvSpPr>
+          <p:cNvPr id="21" name="o264"/>
+          <p:cNvSpPr txBox="1"/>
+          <p:nvPr/>
+        </p:nvSpPr>
+        <p:spPr>
+          <a:xfrm>
+            <a:off x="10363200" y="1790700"/>
+            <a:ext cx="952500" cy="171450"/>
+          </a:xfrm>
+          <a:prstGeom prst="rect">
+            <a:avLst/>
+          </a:prstGeom>
+          <a:noFill/>
+          <a:ln/>
+        </p:spPr>
+        <p:txBody>
+          <a:bodyPr wrap="square" lIns="0" tIns="0" rIns="0" bIns="0" rtlCol="0" anchor="t"/>
+          <a:lstStyle/>
+          <a:p>
+            <a:pPr algn="r" indent="0" marL="0">
+              <a:buNone/>
+            </a:pPr>
+            <a:r>
+              <a:rPr lang="en-US" sz="1000" dirty="0">
                 <a:solidFill>
                   <a:srgbClr val="636366"/>
-                </a:solidFill>
-                <a:latin typeface="Noto Sans KR" pitchFamily="34" charset="0"/>
-                <a:ea typeface="Noto Sans KR" pitchFamily="34" charset="-122"/>
-                <a:cs typeface="Noto Sans KR" pitchFamily="34" charset="-120"/>
-              </a:rPr>
-              <a:t>기다림 + 이동</a:t>
-            </a:r>
-            <a:endParaRPr lang="en-US" sz="1300" dirty="0"/>
-          </a:p>
-        </p:txBody>
-      </p:sp>
-      <p:sp>
-        <p:nvSpPr>
-          <p:cNvPr id="18" name="o274"/>
-          <p:cNvSpPr txBox="1"/>
-          <p:nvPr/>
-        </p:nvSpPr>
-        <p:spPr>
-          <a:xfrm>
-            <a:off x="4635500" y="2152650"/>
-            <a:ext cx="3149600" cy="762000"/>
-          </a:xfrm>
-          <a:prstGeom prst="rect">
-            <a:avLst/>
-          </a:prstGeom>
-          <a:noFill/>
-          <a:ln/>
-        </p:spPr>
-        <p:txBody>
-          <a:bodyPr wrap="square" lIns="0" tIns="0" rIns="0" bIns="0" rtlCol="0" anchor="t"/>
-          <a:lstStyle/>
-          <a:p>
-            <a:pPr indent="0" marL="0">
-              <a:buNone/>
-            </a:pPr>
-            <a:r>
-              <a:rPr lang="en-US" sz="4400" b="1" dirty="0">
-                <a:solidFill>
-                  <a:srgbClr val="0A1F44"/>
                 </a:solidFill>
                 <a:latin typeface="Inter" pitchFamily="34" charset="0"/>
                 <a:ea typeface="Inter" pitchFamily="34" charset="-122"/>
                 <a:cs typeface="Inter" pitchFamily="34" charset="-120"/>
               </a:rPr>
-              <a:t>78%</a:t>
-            </a:r>
-            <a:endParaRPr lang="en-US" sz="4400" dirty="0"/>
-          </a:p>
-        </p:txBody>
-      </p:sp>
-      <p:sp>
-        <p:nvSpPr>
-          <p:cNvPr id="19" name="o275"/>
-          <p:cNvSpPr txBox="1"/>
-          <p:nvPr/>
-        </p:nvSpPr>
-        <p:spPr>
-          <a:xfrm>
-            <a:off x="4635500" y="3143250"/>
-            <a:ext cx="2921000" cy="342900"/>
+              <a:t>근거 현황 05</a:t>
+            </a:r>
+            <a:endParaRPr lang="en-US" sz="1000" dirty="0"/>
+          </a:p>
+        </p:txBody>
+      </p:sp>
+      <p:sp>
+        <p:nvSpPr>
+          <p:cNvPr id="22" name="o265"/>
+          <p:cNvSpPr txBox="1"/>
+          <p:nvPr/>
+        </p:nvSpPr>
+        <p:spPr>
+          <a:xfrm>
+            <a:off x="6457950" y="2000250"/>
+            <a:ext cx="3429000" cy="285750"/>
+          </a:xfrm>
+          <a:prstGeom prst="rect">
+            <a:avLst/>
+          </a:prstGeom>
+          <a:noFill/>
+          <a:ln/>
+        </p:spPr>
+        <p:txBody>
+          <a:bodyPr wrap="square" lIns="0" tIns="0" rIns="0" bIns="0" rtlCol="0" anchor="t"/>
+          <a:lstStyle/>
+          <a:p>
+            <a:pPr indent="0" marL="0">
+              <a:buNone/>
+            </a:pPr>
+            <a:r>
+              <a:rPr lang="en-US" sz="1900" b="1" dirty="0">
+                <a:solidFill>
+                  <a:srgbClr val="1D1D1F"/>
+                </a:solidFill>
+                <a:latin typeface="Noto Sans KR" pitchFamily="34" charset="0"/>
+                <a:ea typeface="Noto Sans KR" pitchFamily="34" charset="-122"/>
+                <a:cs typeface="Noto Sans KR" pitchFamily="34" charset="-120"/>
+              </a:rPr>
+              <a:t>페이퍼리스 전환율</a:t>
+            </a:r>
+            <a:endParaRPr lang="en-US" sz="1900" dirty="0"/>
+          </a:p>
+        </p:txBody>
+      </p:sp>
+      <p:sp>
+        <p:nvSpPr>
+          <p:cNvPr id="23" name="o266"/>
+          <p:cNvSpPr txBox="1"/>
+          <p:nvPr/>
+        </p:nvSpPr>
+        <p:spPr>
+          <a:xfrm>
+            <a:off x="6457950" y="2362200"/>
+            <a:ext cx="3429000" cy="190500"/>
           </a:xfrm>
           <a:prstGeom prst="rect">
             <a:avLst/>
@@ -11459,7 +11100,7 @@
                 <a:ea typeface="Noto Sans KR" pitchFamily="34" charset="-122"/>
                 <a:cs typeface="Noto Sans KR" pitchFamily="34" charset="-120"/>
               </a:rPr>
-              <a:t>결재 대기 19:24 + 직접 제출 7:00</a:t>
+              <a:t>종이 없이 DB 저장 완결 ÷ 대상 업무</a:t>
             </a:r>
             <a:endParaRPr lang="en-US" sz="1200" dirty="0"/>
           </a:p>
@@ -11467,18 +11108,96 @@
       </p:sp>
       <p:sp>
         <p:nvSpPr>
-          <p:cNvPr id="20" name="o276"/>
+          <p:cNvPr id="24" name="o267"/>
+          <p:cNvSpPr txBox="1"/>
+          <p:nvPr/>
+        </p:nvSpPr>
+        <p:spPr>
+          <a:xfrm>
+            <a:off x="9410700" y="2057400"/>
+            <a:ext cx="1905000" cy="152400"/>
+          </a:xfrm>
+          <a:prstGeom prst="rect">
+            <a:avLst/>
+          </a:prstGeom>
+          <a:noFill/>
+          <a:ln/>
+        </p:spPr>
+        <p:txBody>
+          <a:bodyPr wrap="square" lIns="0" tIns="0" rIns="0" bIns="0" rtlCol="0" anchor="t"/>
+          <a:lstStyle/>
+          <a:p>
+            <a:pPr algn="r" indent="0" marL="0">
+              <a:buNone/>
+            </a:pPr>
+            <a:r>
+              <a:rPr lang="en-US" sz="1100" dirty="0">
+                <a:solidFill>
+                  <a:srgbClr val="636366"/>
+                </a:solidFill>
+                <a:latin typeface="Noto Sans KR" pitchFamily="34" charset="0"/>
+                <a:ea typeface="Noto Sans KR" pitchFamily="34" charset="-122"/>
+                <a:cs typeface="Noto Sans KR" pitchFamily="34" charset="-120"/>
+              </a:rPr>
+              <a:t>기준값 → 목표</a:t>
+            </a:r>
+            <a:endParaRPr lang="en-US" sz="1100" dirty="0"/>
+          </a:p>
+        </p:txBody>
+      </p:sp>
+      <p:sp>
+        <p:nvSpPr>
+          <p:cNvPr id="25" name="o268"/>
+          <p:cNvSpPr txBox="1"/>
+          <p:nvPr/>
+        </p:nvSpPr>
+        <p:spPr>
+          <a:xfrm>
+            <a:off x="8839200" y="2247900"/>
+            <a:ext cx="2476500" cy="342900"/>
+          </a:xfrm>
+          <a:prstGeom prst="rect">
+            <a:avLst/>
+          </a:prstGeom>
+          <a:noFill/>
+          <a:ln/>
+        </p:spPr>
+        <p:txBody>
+          <a:bodyPr wrap="square" lIns="0" tIns="0" rIns="0" bIns="0" rtlCol="0" anchor="t"/>
+          <a:lstStyle/>
+          <a:p>
+            <a:pPr algn="r" indent="0" marL="0">
+              <a:buNone/>
+            </a:pPr>
+            <a:r>
+              <a:rPr lang="en-US" sz="2200" b="1" dirty="0">
+                <a:solidFill>
+                  <a:srgbClr val="0A1F44"/>
+                </a:solidFill>
+                <a:latin typeface="Inter" pitchFamily="34" charset="0"/>
+                <a:ea typeface="Inter" pitchFamily="34" charset="-122"/>
+                <a:cs typeface="Inter" pitchFamily="34" charset="-120"/>
+              </a:rPr>
+              <a:t>0% → 100%</a:t>
+            </a:r>
+            <a:endParaRPr lang="en-US" sz="2200" dirty="0"/>
+          </a:p>
+        </p:txBody>
+      </p:sp>
+      <p:sp>
+        <p:nvSpPr>
+          <p:cNvPr id="26" name="o269"/>
           <p:cNvSpPr/>
           <p:nvPr/>
         </p:nvSpPr>
         <p:spPr>
           <a:xfrm>
-            <a:off x="8051800" y="1600200"/>
-            <a:ext cx="3530600" cy="2095500"/>
+            <a:off x="609600" y="2933700"/>
+            <a:ext cx="5391150" cy="1181100"/>
           </a:xfrm>
           <a:prstGeom prst="roundRect">
             <a:avLst>
-              <a:gd name="adj" fmla="val 10909"/>
+              <a:gd name="adj" fmla="val 16129"/>
             </a:avLst>
           </a:prstGeom>
           <a:solidFill>
@@ -11489,92 +11208,131 @@
       </p:sp>
       <p:sp>
         <p:nvSpPr>
-          <p:cNvPr id="21" name="o277"/>
-          <p:cNvSpPr txBox="1"/>
-          <p:nvPr/>
-        </p:nvSpPr>
-        <p:spPr>
-          <a:xfrm>
-            <a:off x="8356600" y="1847850"/>
-            <a:ext cx="2921000" cy="190500"/>
-          </a:xfrm>
-          <a:prstGeom prst="rect">
-            <a:avLst/>
-          </a:prstGeom>
-          <a:noFill/>
-          <a:ln/>
-        </p:spPr>
-        <p:txBody>
-          <a:bodyPr wrap="square" lIns="0" tIns="0" rIns="0" bIns="0" rtlCol="0" anchor="t"/>
-          <a:lstStyle/>
-          <a:p>
-            <a:pPr indent="0" marL="0">
-              <a:buNone/>
-            </a:pPr>
-            <a:r>
-              <a:rPr lang="en-US" sz="1300" dirty="0">
+          <p:cNvPr id="27" name="o270"/>
+          <p:cNvSpPr txBox="1"/>
+          <p:nvPr/>
+        </p:nvSpPr>
+        <p:spPr>
+          <a:xfrm>
+            <a:off x="876300" y="3124200"/>
+            <a:ext cx="1905000" cy="171450"/>
+          </a:xfrm>
+          <a:prstGeom prst="rect">
+            <a:avLst/>
+          </a:prstGeom>
+          <a:noFill/>
+          <a:ln/>
+        </p:spPr>
+        <p:txBody>
+          <a:bodyPr wrap="square" lIns="0" tIns="0" rIns="0" bIns="0" rtlCol="0" anchor="t"/>
+          <a:lstStyle/>
+          <a:p>
+            <a:pPr indent="0" marL="0">
+              <a:buNone/>
+            </a:pPr>
+            <a:r>
+              <a:rPr lang="en-US" sz="1100" b="1" dirty="0">
+                <a:solidFill>
+                  <a:srgbClr val="0A1F44"/>
+                </a:solidFill>
+                <a:latin typeface="Noto Sans KR" pitchFamily="34" charset="0"/>
+                <a:ea typeface="Noto Sans KR" pitchFamily="34" charset="-122"/>
+                <a:cs typeface="Noto Sans KR" pitchFamily="34" charset="-120"/>
+              </a:rPr>
+              <a:t>③ 효율지표</a:t>
+            </a:r>
+            <a:endParaRPr lang="en-US" sz="1100" dirty="0"/>
+          </a:p>
+        </p:txBody>
+      </p:sp>
+      <p:sp>
+        <p:nvSpPr>
+          <p:cNvPr id="28" name="o271"/>
+          <p:cNvSpPr txBox="1"/>
+          <p:nvPr/>
+        </p:nvSpPr>
+        <p:spPr>
+          <a:xfrm>
+            <a:off x="4781550" y="3124200"/>
+            <a:ext cx="952500" cy="171450"/>
+          </a:xfrm>
+          <a:prstGeom prst="rect">
+            <a:avLst/>
+          </a:prstGeom>
+          <a:noFill/>
+          <a:ln/>
+        </p:spPr>
+        <p:txBody>
+          <a:bodyPr wrap="square" lIns="0" tIns="0" rIns="0" bIns="0" rtlCol="0" anchor="t"/>
+          <a:lstStyle/>
+          <a:p>
+            <a:pPr algn="r" indent="0" marL="0">
+              <a:buNone/>
+            </a:pPr>
+            <a:r>
+              <a:rPr lang="en-US" sz="1000" dirty="0">
                 <a:solidFill>
                   <a:srgbClr val="636366"/>
-                </a:solidFill>
-                <a:latin typeface="Noto Sans KR" pitchFamily="34" charset="0"/>
-                <a:ea typeface="Noto Sans KR" pitchFamily="34" charset="-122"/>
-                <a:cs typeface="Noto Sans KR" pitchFamily="34" charset="-120"/>
-              </a:rPr>
-              <a:t>MSDS 교육 1건</a:t>
-            </a:r>
-            <a:endParaRPr lang="en-US" sz="1300" dirty="0"/>
-          </a:p>
-        </p:txBody>
-      </p:sp>
-      <p:sp>
-        <p:nvSpPr>
-          <p:cNvPr id="22" name="o278"/>
-          <p:cNvSpPr txBox="1"/>
-          <p:nvPr/>
-        </p:nvSpPr>
-        <p:spPr>
-          <a:xfrm>
-            <a:off x="8356600" y="2152650"/>
-            <a:ext cx="3149600" cy="762000"/>
-          </a:xfrm>
-          <a:prstGeom prst="rect">
-            <a:avLst/>
-          </a:prstGeom>
-          <a:noFill/>
-          <a:ln/>
-        </p:spPr>
-        <p:txBody>
-          <a:bodyPr wrap="square" lIns="0" tIns="0" rIns="0" bIns="0" rtlCol="0" anchor="t"/>
-          <a:lstStyle/>
-          <a:p>
-            <a:pPr indent="0" marL="0">
-              <a:buNone/>
-            </a:pPr>
-            <a:r>
-              <a:rPr lang="en-US" sz="4400" b="1" dirty="0">
-                <a:solidFill>
-                  <a:srgbClr val="0A1F44"/>
                 </a:solidFill>
                 <a:latin typeface="Inter" pitchFamily="34" charset="0"/>
                 <a:ea typeface="Inter" pitchFamily="34" charset="-122"/>
                 <a:cs typeface="Inter" pitchFamily="34" charset="-120"/>
               </a:rPr>
-              <a:t>4분 18초</a:t>
-            </a:r>
-            <a:endParaRPr lang="en-US" sz="4400" dirty="0"/>
-          </a:p>
-        </p:txBody>
-      </p:sp>
-      <p:sp>
-        <p:nvSpPr>
-          <p:cNvPr id="23" name="o279"/>
-          <p:cNvSpPr txBox="1"/>
-          <p:nvPr/>
-        </p:nvSpPr>
-        <p:spPr>
-          <a:xfrm>
-            <a:off x="8356600" y="3143250"/>
-            <a:ext cx="2921000" cy="342900"/>
+              <a:t>근거 현황 06</a:t>
+            </a:r>
+            <a:endParaRPr lang="en-US" sz="1000" dirty="0"/>
+          </a:p>
+        </p:txBody>
+      </p:sp>
+      <p:sp>
+        <p:nvSpPr>
+          <p:cNvPr id="29" name="o272"/>
+          <p:cNvSpPr txBox="1"/>
+          <p:nvPr/>
+        </p:nvSpPr>
+        <p:spPr>
+          <a:xfrm>
+            <a:off x="876300" y="3333750"/>
+            <a:ext cx="3429000" cy="285750"/>
+          </a:xfrm>
+          <a:prstGeom prst="rect">
+            <a:avLst/>
+          </a:prstGeom>
+          <a:noFill/>
+          <a:ln/>
+        </p:spPr>
+        <p:txBody>
+          <a:bodyPr wrap="square" lIns="0" tIns="0" rIns="0" bIns="0" rtlCol="0" anchor="t"/>
+          <a:lstStyle/>
+          <a:p>
+            <a:pPr indent="0" marL="0">
+              <a:buNone/>
+            </a:pPr>
+            <a:r>
+              <a:rPr lang="en-US" sz="1900" b="1" dirty="0">
+                <a:solidFill>
+                  <a:srgbClr val="1D1D1F"/>
+                </a:solidFill>
+                <a:latin typeface="Noto Sans KR" pitchFamily="34" charset="0"/>
+                <a:ea typeface="Noto Sans KR" pitchFamily="34" charset="-122"/>
+                <a:cs typeface="Noto Sans KR" pitchFamily="34" charset="-120"/>
+              </a:rPr>
+              <a:t>행정 소요시간 단축률</a:t>
+            </a:r>
+            <a:endParaRPr lang="en-US" sz="1900" dirty="0"/>
+          </a:p>
+        </p:txBody>
+      </p:sp>
+      <p:sp>
+        <p:nvSpPr>
+          <p:cNvPr id="30" name="o273"/>
+          <p:cNvSpPr txBox="1"/>
+          <p:nvPr/>
+        </p:nvSpPr>
+        <p:spPr>
+          <a:xfrm>
+            <a:off x="876300" y="3695700"/>
+            <a:ext cx="3429000" cy="190500"/>
           </a:xfrm>
           <a:prstGeom prst="rect">
             <a:avLst/>
@@ -11598,7 +11356,7 @@
                 <a:ea typeface="Noto Sans KR" pitchFamily="34" charset="-122"/>
                 <a:cs typeface="Noto Sans KR" pitchFamily="34" charset="-120"/>
               </a:rPr>
-              <a:t>자료 검색이 절반 (2:09)</a:t>
+              <a:t>(수기 시간 − 플랫폼 시간) ÷ 수기 시간</a:t>
             </a:r>
             <a:endParaRPr lang="en-US" sz="1200" dirty="0"/>
           </a:p>
@@ -11606,18 +11364,96 @@
       </p:sp>
       <p:sp>
         <p:nvSpPr>
-          <p:cNvPr id="24" name="o280"/>
+          <p:cNvPr id="31" name="o274"/>
+          <p:cNvSpPr txBox="1"/>
+          <p:nvPr/>
+        </p:nvSpPr>
+        <p:spPr>
+          <a:xfrm>
+            <a:off x="3829050" y="3390900"/>
+            <a:ext cx="1905000" cy="152400"/>
+          </a:xfrm>
+          <a:prstGeom prst="rect">
+            <a:avLst/>
+          </a:prstGeom>
+          <a:noFill/>
+          <a:ln/>
+        </p:spPr>
+        <p:txBody>
+          <a:bodyPr wrap="square" lIns="0" tIns="0" rIns="0" bIns="0" rtlCol="0" anchor="t"/>
+          <a:lstStyle/>
+          <a:p>
+            <a:pPr algn="r" indent="0" marL="0">
+              <a:buNone/>
+            </a:pPr>
+            <a:r>
+              <a:rPr lang="en-US" sz="1100" dirty="0">
+                <a:solidFill>
+                  <a:srgbClr val="636366"/>
+                </a:solidFill>
+                <a:latin typeface="Noto Sans KR" pitchFamily="34" charset="0"/>
+                <a:ea typeface="Noto Sans KR" pitchFamily="34" charset="-122"/>
+                <a:cs typeface="Noto Sans KR" pitchFamily="34" charset="-120"/>
+              </a:rPr>
+              <a:t>기준값 → 목표</a:t>
+            </a:r>
+            <a:endParaRPr lang="en-US" sz="1100" dirty="0"/>
+          </a:p>
+        </p:txBody>
+      </p:sp>
+      <p:sp>
+        <p:nvSpPr>
+          <p:cNvPr id="32" name="o275"/>
+          <p:cNvSpPr txBox="1"/>
+          <p:nvPr/>
+        </p:nvSpPr>
+        <p:spPr>
+          <a:xfrm>
+            <a:off x="3257550" y="3581400"/>
+            <a:ext cx="2476500" cy="342900"/>
+          </a:xfrm>
+          <a:prstGeom prst="rect">
+            <a:avLst/>
+          </a:prstGeom>
+          <a:noFill/>
+          <a:ln/>
+        </p:spPr>
+        <p:txBody>
+          <a:bodyPr wrap="square" lIns="0" tIns="0" rIns="0" bIns="0" rtlCol="0" anchor="t"/>
+          <a:lstStyle/>
+          <a:p>
+            <a:pPr algn="r" indent="0" marL="0">
+              <a:buNone/>
+            </a:pPr>
+            <a:r>
+              <a:rPr lang="en-US" sz="2200" b="1" dirty="0">
+                <a:solidFill>
+                  <a:srgbClr val="0A1F44"/>
+                </a:solidFill>
+                <a:latin typeface="Inter" pitchFamily="34" charset="0"/>
+                <a:ea typeface="Inter" pitchFamily="34" charset="-122"/>
+                <a:cs typeface="Inter" pitchFamily="34" charset="-120"/>
+              </a:rPr>
+              <a:t>33:48 → 70%↓</a:t>
+            </a:r>
+            <a:endParaRPr lang="en-US" sz="2200" dirty="0"/>
+          </a:p>
+        </p:txBody>
+      </p:sp>
+      <p:sp>
+        <p:nvSpPr>
+          <p:cNvPr id="33" name="o276"/>
           <p:cNvSpPr/>
           <p:nvPr/>
         </p:nvSpPr>
         <p:spPr>
           <a:xfrm>
-            <a:off x="609600" y="3886200"/>
-            <a:ext cx="10972800" cy="2362200"/>
+            <a:off x="6191250" y="2933700"/>
+            <a:ext cx="5391150" cy="1181100"/>
           </a:xfrm>
           <a:prstGeom prst="roundRect">
             <a:avLst>
-              <a:gd name="adj" fmla="val 9677"/>
+              <a:gd name="adj" fmla="val 16129"/>
             </a:avLst>
           </a:prstGeom>
           <a:solidFill>
@@ -11628,53 +11464,53 @@
       </p:sp>
       <p:sp>
         <p:nvSpPr>
-          <p:cNvPr id="25" name="o281"/>
-          <p:cNvSpPr txBox="1"/>
-          <p:nvPr/>
-        </p:nvSpPr>
-        <p:spPr>
-          <a:xfrm>
-            <a:off x="952500" y="4114800"/>
-            <a:ext cx="5715000" cy="228600"/>
-          </a:xfrm>
-          <a:prstGeom prst="rect">
-            <a:avLst/>
-          </a:prstGeom>
-          <a:noFill/>
-          <a:ln/>
-        </p:spPr>
-        <p:txBody>
-          <a:bodyPr wrap="square" lIns="0" tIns="0" rIns="0" bIns="0" rtlCol="0" anchor="t"/>
-          <a:lstStyle/>
-          <a:p>
-            <a:pPr indent="0" marL="0">
-              <a:buNone/>
-            </a:pPr>
-            <a:r>
-              <a:rPr lang="en-US" sz="1600" b="1" dirty="0">
-                <a:solidFill>
-                  <a:srgbClr val="1D1D1F"/>
-                </a:solidFill>
-                <a:latin typeface="Noto Sans KR" pitchFamily="34" charset="0"/>
-                <a:ea typeface="Noto Sans KR" pitchFamily="34" charset="-122"/>
-                <a:cs typeface="Noto Sans KR" pitchFamily="34" charset="-120"/>
-              </a:rPr>
-              <a:t>33분 48초는 어디에 쓰였나</a:t>
-            </a:r>
-            <a:endParaRPr lang="en-US" sz="1600" dirty="0"/>
-          </a:p>
-        </p:txBody>
-      </p:sp>
-      <p:sp>
-        <p:nvSpPr>
-          <p:cNvPr id="26" name="o282"/>
-          <p:cNvSpPr txBox="1"/>
-          <p:nvPr/>
-        </p:nvSpPr>
-        <p:spPr>
-          <a:xfrm>
-            <a:off x="6667500" y="4114800"/>
-            <a:ext cx="4572000" cy="228600"/>
+          <p:cNvPr id="34" name="o277"/>
+          <p:cNvSpPr txBox="1"/>
+          <p:nvPr/>
+        </p:nvSpPr>
+        <p:spPr>
+          <a:xfrm>
+            <a:off x="6457950" y="3124200"/>
+            <a:ext cx="1905000" cy="171450"/>
+          </a:xfrm>
+          <a:prstGeom prst="rect">
+            <a:avLst/>
+          </a:prstGeom>
+          <a:noFill/>
+          <a:ln/>
+        </p:spPr>
+        <p:txBody>
+          <a:bodyPr wrap="square" lIns="0" tIns="0" rIns="0" bIns="0" rtlCol="0" anchor="t"/>
+          <a:lstStyle/>
+          <a:p>
+            <a:pPr indent="0" marL="0">
+              <a:buNone/>
+            </a:pPr>
+            <a:r>
+              <a:rPr lang="en-US" sz="1100" b="1" dirty="0">
+                <a:solidFill>
+                  <a:srgbClr val="0A1F44"/>
+                </a:solidFill>
+                <a:latin typeface="Noto Sans KR" pitchFamily="34" charset="0"/>
+                <a:ea typeface="Noto Sans KR" pitchFamily="34" charset="-122"/>
+                <a:cs typeface="Noto Sans KR" pitchFamily="34" charset="-120"/>
+              </a:rPr>
+              <a:t>④ 인프라지표</a:t>
+            </a:r>
+            <a:endParaRPr lang="en-US" sz="1100" dirty="0"/>
+          </a:p>
+        </p:txBody>
+      </p:sp>
+      <p:sp>
+        <p:nvSpPr>
+          <p:cNvPr id="35" name="o278"/>
+          <p:cNvSpPr txBox="1"/>
+          <p:nvPr/>
+        </p:nvSpPr>
+        <p:spPr>
+          <a:xfrm>
+            <a:off x="10363200" y="3124200"/>
+            <a:ext cx="952500" cy="171450"/>
           </a:xfrm>
           <a:prstGeom prst="rect">
             <a:avLst/>
@@ -11690,107 +11526,46 @@
               <a:buNone/>
             </a:pPr>
             <a:r>
-              <a:rPr lang="en-US" sz="1300" b="1" dirty="0">
-                <a:solidFill>
-                  <a:srgbClr val="0A1F44"/>
-                </a:solidFill>
-                <a:latin typeface="Noto Sans KR" pitchFamily="34" charset="0"/>
-                <a:ea typeface="Noto Sans KR" pitchFamily="34" charset="-122"/>
-                <a:cs typeface="Noto Sans KR" pitchFamily="34" charset="-120"/>
-              </a:rPr>
-              <a:t>두 단계만 없애면 78% → 개선 우선순위</a:t>
-            </a:r>
-            <a:endParaRPr lang="en-US" sz="1300" dirty="0"/>
-          </a:p>
-        </p:txBody>
-      </p:sp>
-      <p:sp>
-        <p:nvSpPr>
-          <p:cNvPr id="27" name="o283"/>
-          <p:cNvSpPr/>
-          <p:nvPr/>
-        </p:nvSpPr>
-        <p:spPr>
-          <a:xfrm>
-            <a:off x="952500" y="4533900"/>
-            <a:ext cx="5847223" cy="609600"/>
-          </a:xfrm>
-          <a:prstGeom prst="roundRect">
-            <a:avLst>
-              <a:gd name="adj" fmla="val 15625"/>
-            </a:avLst>
-          </a:prstGeom>
-          <a:solidFill>
-            <a:srgbClr val="0A1F44"/>
-          </a:solidFill>
-          <a:ln/>
-        </p:spPr>
-      </p:sp>
-      <p:sp>
-        <p:nvSpPr>
-          <p:cNvPr id="28" name="o284"/>
-          <p:cNvSpPr txBox="1"/>
-          <p:nvPr/>
-        </p:nvSpPr>
-        <p:spPr>
-          <a:xfrm>
-            <a:off x="1123950" y="4533900"/>
-            <a:ext cx="5561473" cy="609600"/>
-          </a:xfrm>
-          <a:prstGeom prst="rect">
-            <a:avLst/>
-          </a:prstGeom>
-          <a:noFill/>
-          <a:ln/>
-        </p:spPr>
-        <p:txBody>
-          <a:bodyPr wrap="square" lIns="0" tIns="0" rIns="0" bIns="0" rtlCol="0" anchor="ctr"/>
-          <a:lstStyle/>
-          <a:p>
-            <a:pPr indent="0" marL="0">
-              <a:buNone/>
-            </a:pPr>
-            <a:r>
-              <a:rPr lang="en-US" sz="2200" b="1" dirty="0">
-                <a:solidFill>
-                  <a:srgbClr val="FFFFFF"/>
+              <a:rPr lang="en-US" sz="1000" dirty="0">
+                <a:solidFill>
+                  <a:srgbClr val="636366"/>
                 </a:solidFill>
                 <a:latin typeface="Inter" pitchFamily="34" charset="0"/>
                 <a:ea typeface="Inter" pitchFamily="34" charset="-122"/>
                 <a:cs typeface="Inter" pitchFamily="34" charset="-120"/>
               </a:rPr>
-              <a:t>57%</a:t>
-            </a:r>
-            <a:endParaRPr lang="en-US" sz="2200" dirty="0"/>
-          </a:p>
-        </p:txBody>
-      </p:sp>
-      <p:sp>
-        <p:nvSpPr>
-          <p:cNvPr id="29" name="o285"/>
-          <p:cNvSpPr txBox="1"/>
-          <p:nvPr/>
-        </p:nvSpPr>
-        <p:spPr>
-          <a:xfrm>
-            <a:off x="952500" y="5276850"/>
-            <a:ext cx="5847223" cy="190500"/>
-          </a:xfrm>
-          <a:prstGeom prst="rect">
-            <a:avLst/>
-          </a:prstGeom>
-          <a:noFill/>
-          <a:ln/>
-        </p:spPr>
-        <p:txBody>
-          <a:bodyPr wrap="square" lIns="0" tIns="0" rIns="0" bIns="0" rtlCol="0" anchor="t"/>
-          <a:lstStyle/>
-          <a:p>
-            <a:pPr indent="0" marL="0">
-              <a:buNone/>
-            </a:pPr>
-            <a:r>
-              <a:rPr lang="en-US" sz="1300" b="1" dirty="0">
+              <a:t>계획 6대 모듈</a:t>
+            </a:r>
+            <a:endParaRPr lang="en-US" sz="1000" dirty="0"/>
+          </a:p>
+        </p:txBody>
+      </p:sp>
+      <p:sp>
+        <p:nvSpPr>
+          <p:cNvPr id="36" name="o279"/>
+          <p:cNvSpPr txBox="1"/>
+          <p:nvPr/>
+        </p:nvSpPr>
+        <p:spPr>
+          <a:xfrm>
+            <a:off x="6457950" y="3333750"/>
+            <a:ext cx="3429000" cy="285750"/>
+          </a:xfrm>
+          <a:prstGeom prst="rect">
+            <a:avLst/>
+          </a:prstGeom>
+          <a:noFill/>
+          <a:ln/>
+        </p:spPr>
+        <p:txBody>
+          <a:bodyPr wrap="square" lIns="0" tIns="0" rIns="0" bIns="0" rtlCol="0" anchor="t"/>
+          <a:lstStyle/>
+          <a:p>
+            <a:pPr indent="0" marL="0">
+              <a:buNone/>
+            </a:pPr>
+            <a:r>
+              <a:rPr lang="en-US" sz="1900" b="1" dirty="0">
                 <a:solidFill>
                   <a:srgbClr val="1D1D1F"/>
                 </a:solidFill>
@@ -11798,22 +11573,22 @@
                 <a:ea typeface="Noto Sans KR" pitchFamily="34" charset="-122"/>
                 <a:cs typeface="Noto Sans KR" pitchFamily="34" charset="-120"/>
               </a:rPr>
-              <a:t>아날로그 내부 결재 대기</a:t>
-            </a:r>
-            <a:endParaRPr lang="en-US" sz="1300" dirty="0"/>
-          </a:p>
-        </p:txBody>
-      </p:sp>
-      <p:sp>
-        <p:nvSpPr>
-          <p:cNvPr id="30" name="o286"/>
-          <p:cNvSpPr txBox="1"/>
-          <p:nvPr/>
-        </p:nvSpPr>
-        <p:spPr>
-          <a:xfrm>
-            <a:off x="952500" y="5505450"/>
-            <a:ext cx="5847223" cy="171450"/>
+              <a:t>플랫폼 구축 완성도</a:t>
+            </a:r>
+            <a:endParaRPr lang="en-US" sz="1900" dirty="0"/>
+          </a:p>
+        </p:txBody>
+      </p:sp>
+      <p:sp>
+        <p:nvSpPr>
+          <p:cNvPr id="37" name="o280"/>
+          <p:cNvSpPr txBox="1"/>
+          <p:nvPr/>
+        </p:nvSpPr>
+        <p:spPr>
+          <a:xfrm>
+            <a:off x="6457950" y="3695700"/>
+            <a:ext cx="3429000" cy="190500"/>
           </a:xfrm>
           <a:prstGeom prst="rect">
             <a:avLst/>
@@ -11832,151 +11607,413 @@
               <a:rPr lang="en-US" sz="1200" dirty="0">
                 <a:solidFill>
                   <a:srgbClr val="636366"/>
+                </a:solidFill>
+                <a:latin typeface="Noto Sans KR" pitchFamily="34" charset="0"/>
+                <a:ea typeface="Noto Sans KR" pitchFamily="34" charset="-122"/>
+                <a:cs typeface="Noto Sans KR" pitchFamily="34" charset="-120"/>
+              </a:rPr>
+              <a:t>정상 작동 기능 ÷ 계획 기능</a:t>
+            </a:r>
+            <a:endParaRPr lang="en-US" sz="1200" dirty="0"/>
+          </a:p>
+        </p:txBody>
+      </p:sp>
+      <p:sp>
+        <p:nvSpPr>
+          <p:cNvPr id="38" name="o281"/>
+          <p:cNvSpPr txBox="1"/>
+          <p:nvPr/>
+        </p:nvSpPr>
+        <p:spPr>
+          <a:xfrm>
+            <a:off x="9410700" y="3390900"/>
+            <a:ext cx="1905000" cy="152400"/>
+          </a:xfrm>
+          <a:prstGeom prst="rect">
+            <a:avLst/>
+          </a:prstGeom>
+          <a:noFill/>
+          <a:ln/>
+        </p:spPr>
+        <p:txBody>
+          <a:bodyPr wrap="square" lIns="0" tIns="0" rIns="0" bIns="0" rtlCol="0" anchor="t"/>
+          <a:lstStyle/>
+          <a:p>
+            <a:pPr algn="r" indent="0" marL="0">
+              <a:buNone/>
+            </a:pPr>
+            <a:r>
+              <a:rPr lang="en-US" sz="1100" dirty="0">
+                <a:solidFill>
+                  <a:srgbClr val="636366"/>
+                </a:solidFill>
+                <a:latin typeface="Noto Sans KR" pitchFamily="34" charset="0"/>
+                <a:ea typeface="Noto Sans KR" pitchFamily="34" charset="-122"/>
+                <a:cs typeface="Noto Sans KR" pitchFamily="34" charset="-120"/>
+              </a:rPr>
+              <a:t>기준값 → 목표</a:t>
+            </a:r>
+            <a:endParaRPr lang="en-US" sz="1100" dirty="0"/>
+          </a:p>
+        </p:txBody>
+      </p:sp>
+      <p:sp>
+        <p:nvSpPr>
+          <p:cNvPr id="39" name="o282"/>
+          <p:cNvSpPr txBox="1"/>
+          <p:nvPr/>
+        </p:nvSpPr>
+        <p:spPr>
+          <a:xfrm>
+            <a:off x="8839200" y="3581400"/>
+            <a:ext cx="2476500" cy="342900"/>
+          </a:xfrm>
+          <a:prstGeom prst="rect">
+            <a:avLst/>
+          </a:prstGeom>
+          <a:noFill/>
+          <a:ln/>
+        </p:spPr>
+        <p:txBody>
+          <a:bodyPr wrap="square" lIns="0" tIns="0" rIns="0" bIns="0" rtlCol="0" anchor="t"/>
+          <a:lstStyle/>
+          <a:p>
+            <a:pPr algn="r" indent="0" marL="0">
+              <a:buNone/>
+            </a:pPr>
+            <a:r>
+              <a:rPr lang="en-US" sz="2200" b="1" dirty="0">
+                <a:solidFill>
+                  <a:srgbClr val="0A1F44"/>
                 </a:solidFill>
                 <a:latin typeface="Inter" pitchFamily="34" charset="0"/>
                 <a:ea typeface="Inter" pitchFamily="34" charset="-122"/>
                 <a:cs typeface="Inter" pitchFamily="34" charset="-120"/>
               </a:rPr>
-              <a:t>19분 24초</a:t>
-            </a:r>
-            <a:endParaRPr lang="en-US" sz="1200" dirty="0"/>
-          </a:p>
-        </p:txBody>
-      </p:sp>
-      <p:sp>
-        <p:nvSpPr>
-          <p:cNvPr id="31" name="o287"/>
+              <a:t>0 → 6 / 6</a:t>
+            </a:r>
+            <a:endParaRPr lang="en-US" sz="2200" dirty="0"/>
+          </a:p>
+        </p:txBody>
+      </p:sp>
+      <p:sp>
+        <p:nvSpPr>
+          <p:cNvPr id="40" name="o283"/>
+          <p:cNvSpPr txBox="1"/>
+          <p:nvPr/>
+        </p:nvSpPr>
+        <p:spPr>
+          <a:xfrm>
+            <a:off x="609600" y="4381500"/>
+            <a:ext cx="4762500" cy="190500"/>
+          </a:xfrm>
+          <a:prstGeom prst="rect">
+            <a:avLst/>
+          </a:prstGeom>
+          <a:noFill/>
+          <a:ln/>
+        </p:spPr>
+        <p:txBody>
+          <a:bodyPr wrap="square" lIns="0" tIns="0" rIns="0" bIns="0" rtlCol="0" anchor="t"/>
+          <a:lstStyle/>
+          <a:p>
+            <a:pPr indent="0" marL="0">
+              <a:buNone/>
+            </a:pPr>
+            <a:r>
+              <a:rPr lang="en-US" sz="1300" b="1" dirty="0">
+                <a:solidFill>
+                  <a:srgbClr val="636366"/>
+                </a:solidFill>
+                <a:latin typeface="Noto Sans KR" pitchFamily="34" charset="0"/>
+                <a:ea typeface="Noto Sans KR" pitchFamily="34" charset="-122"/>
+                <a:cs typeface="Noto Sans KR" pitchFamily="34" charset="-120"/>
+              </a:rPr>
+              <a:t>측정 방법 — 개선 전후를 같은 방법으로</a:t>
+            </a:r>
+            <a:endParaRPr lang="en-US" sz="1300" dirty="0"/>
+          </a:p>
+        </p:txBody>
+      </p:sp>
+      <p:sp>
+        <p:nvSpPr>
+          <p:cNvPr id="41" name="o284"/>
           <p:cNvSpPr/>
           <p:nvPr/>
         </p:nvSpPr>
         <p:spPr>
           <a:xfrm>
-            <a:off x="6856873" y="4533900"/>
-            <a:ext cx="2073294" cy="609600"/>
+            <a:off x="609600" y="4648200"/>
+            <a:ext cx="3530600" cy="1600200"/>
           </a:xfrm>
           <a:prstGeom prst="roundRect">
             <a:avLst>
-              <a:gd name="adj" fmla="val 15625"/>
+              <a:gd name="adj" fmla="val 11905"/>
             </a:avLst>
           </a:prstGeom>
           <a:solidFill>
-            <a:srgbClr val="4F6A96"/>
+            <a:srgbClr val="F5F5F7"/>
           </a:solidFill>
           <a:ln/>
         </p:spPr>
       </p:sp>
       <p:sp>
         <p:nvSpPr>
-          <p:cNvPr id="32" name="o288"/>
-          <p:cNvSpPr txBox="1"/>
-          <p:nvPr/>
-        </p:nvSpPr>
-        <p:spPr>
-          <a:xfrm>
-            <a:off x="7028323" y="4533900"/>
-            <a:ext cx="1787544" cy="609600"/>
-          </a:xfrm>
-          <a:prstGeom prst="rect">
-            <a:avLst/>
-          </a:prstGeom>
-          <a:noFill/>
-          <a:ln/>
-        </p:spPr>
-        <p:txBody>
-          <a:bodyPr wrap="square" lIns="0" tIns="0" rIns="0" bIns="0" rtlCol="0" anchor="ctr"/>
-          <a:lstStyle/>
-          <a:p>
-            <a:pPr indent="0" marL="0">
-              <a:buNone/>
-            </a:pPr>
-            <a:r>
-              <a:rPr lang="en-US" sz="2200" b="1" dirty="0">
-                <a:solidFill>
-                  <a:srgbClr val="FFFFFF"/>
+          <p:cNvPr id="42" name="o285"/>
+          <p:cNvSpPr txBox="1"/>
+          <p:nvPr/>
+        </p:nvSpPr>
+        <p:spPr>
+          <a:xfrm>
+            <a:off x="876300" y="4857750"/>
+            <a:ext cx="2997200" cy="171450"/>
+          </a:xfrm>
+          <a:prstGeom prst="rect">
+            <a:avLst/>
+          </a:prstGeom>
+          <a:noFill/>
+          <a:ln/>
+        </p:spPr>
+        <p:txBody>
+          <a:bodyPr wrap="square" lIns="0" tIns="0" rIns="0" bIns="0" rtlCol="0" anchor="t"/>
+          <a:lstStyle/>
+          <a:p>
+            <a:pPr indent="0" marL="0">
+              <a:buNone/>
+            </a:pPr>
+            <a:r>
+              <a:rPr lang="en-US" sz="1200" dirty="0">
+                <a:solidFill>
+                  <a:srgbClr val="636366"/>
+                </a:solidFill>
+                <a:latin typeface="Noto Sans KR" pitchFamily="34" charset="0"/>
+                <a:ea typeface="Noto Sans KR" pitchFamily="34" charset="-122"/>
+                <a:cs typeface="Noto Sans KR" pitchFamily="34" charset="-120"/>
+              </a:rPr>
+              <a:t>준수율 · 페이퍼리스</a:t>
+            </a:r>
+            <a:endParaRPr lang="en-US" sz="1200" dirty="0"/>
+          </a:p>
+        </p:txBody>
+      </p:sp>
+      <p:sp>
+        <p:nvSpPr>
+          <p:cNvPr id="43" name="o286"/>
+          <p:cNvSpPr txBox="1"/>
+          <p:nvPr/>
+        </p:nvSpPr>
+        <p:spPr>
+          <a:xfrm>
+            <a:off x="876300" y="5105400"/>
+            <a:ext cx="2997200" cy="419100"/>
+          </a:xfrm>
+          <a:prstGeom prst="rect">
+            <a:avLst/>
+          </a:prstGeom>
+          <a:noFill/>
+          <a:ln/>
+        </p:spPr>
+        <p:txBody>
+          <a:bodyPr wrap="square" lIns="0" tIns="0" rIns="0" bIns="0" rtlCol="0" anchor="t"/>
+          <a:lstStyle/>
+          <a:p>
+            <a:pPr indent="0" marL="0">
+              <a:buNone/>
+            </a:pPr>
+            <a:r>
+              <a:rPr lang="en-US" sz="3000" b="1" dirty="0">
+                <a:solidFill>
+                  <a:srgbClr val="1D1D1F"/>
                 </a:solidFill>
                 <a:latin typeface="Inter" pitchFamily="34" charset="0"/>
                 <a:ea typeface="Inter" pitchFamily="34" charset="-122"/>
                 <a:cs typeface="Inter" pitchFamily="34" charset="-120"/>
               </a:rPr>
-              <a:t>21%</a:t>
-            </a:r>
-            <a:endParaRPr lang="en-US" sz="2200" dirty="0"/>
-          </a:p>
-        </p:txBody>
-      </p:sp>
-      <p:sp>
-        <p:nvSpPr>
-          <p:cNvPr id="33" name="o289"/>
-          <p:cNvSpPr txBox="1"/>
-          <p:nvPr/>
-        </p:nvSpPr>
-        <p:spPr>
-          <a:xfrm>
-            <a:off x="6856873" y="5276850"/>
-            <a:ext cx="2073294" cy="190500"/>
-          </a:xfrm>
-          <a:prstGeom prst="rect">
-            <a:avLst/>
-          </a:prstGeom>
-          <a:noFill/>
-          <a:ln/>
-        </p:spPr>
-        <p:txBody>
-          <a:bodyPr wrap="square" lIns="0" tIns="0" rIns="0" bIns="0" rtlCol="0" anchor="t"/>
-          <a:lstStyle/>
-          <a:p>
-            <a:pPr indent="0" marL="0">
-              <a:buNone/>
-            </a:pPr>
-            <a:r>
-              <a:rPr lang="en-US" sz="1300" b="1" dirty="0">
+              <a:t>전수조사</a:t>
+            </a:r>
+            <a:endParaRPr lang="en-US" sz="3000" dirty="0"/>
+          </a:p>
+        </p:txBody>
+      </p:sp>
+      <p:sp>
+        <p:nvSpPr>
+          <p:cNvPr id="44" name="o287"/>
+          <p:cNvSpPr txBox="1"/>
+          <p:nvPr/>
+        </p:nvSpPr>
+        <p:spPr>
+          <a:xfrm>
+            <a:off x="876300" y="5676900"/>
+            <a:ext cx="2997200" cy="381000"/>
+          </a:xfrm>
+          <a:prstGeom prst="rect">
+            <a:avLst/>
+          </a:prstGeom>
+          <a:noFill/>
+          <a:ln/>
+        </p:spPr>
+        <p:txBody>
+          <a:bodyPr wrap="square" lIns="0" tIns="0" rIns="0" bIns="0" rtlCol="0" anchor="t"/>
+          <a:lstStyle/>
+          <a:p>
+            <a:pPr indent="0" marL="0">
+              <a:lnSpc>
+                <a:spcPct val="135000"/>
+              </a:lnSpc>
+              <a:buNone/>
+            </a:pPr>
+            <a:r>
+              <a:rPr lang="en-US" sz="1200" dirty="0">
+                <a:solidFill>
+                  <a:srgbClr val="636366"/>
+                </a:solidFill>
+                <a:latin typeface="Noto Sans KR" pitchFamily="34" charset="0"/>
+                <a:ea typeface="Noto Sans KR" pitchFamily="34" charset="-122"/>
+                <a:cs typeface="Noto Sans KR" pitchFamily="34" charset="-120"/>
+              </a:rPr>
+              <a:t>입사자 명단 ↔ 교육일지 대조 · 출력 업무 집계 (전 2025.01–12)</a:t>
+            </a:r>
+            <a:endParaRPr lang="en-US" sz="1200" dirty="0"/>
+          </a:p>
+        </p:txBody>
+      </p:sp>
+      <p:sp>
+        <p:nvSpPr>
+          <p:cNvPr id="45" name="o288"/>
+          <p:cNvSpPr/>
+          <p:nvPr/>
+        </p:nvSpPr>
+        <p:spPr>
+          <a:xfrm>
+            <a:off x="4330700" y="4648200"/>
+            <a:ext cx="3530600" cy="1600200"/>
+          </a:xfrm>
+          <a:prstGeom prst="roundRect">
+            <a:avLst>
+              <a:gd name="adj" fmla="val 11905"/>
+            </a:avLst>
+          </a:prstGeom>
+          <a:solidFill>
+            <a:srgbClr val="F5F5F7"/>
+          </a:solidFill>
+          <a:ln/>
+        </p:spPr>
+      </p:sp>
+      <p:sp>
+        <p:nvSpPr>
+          <p:cNvPr id="46" name="o289"/>
+          <p:cNvSpPr txBox="1"/>
+          <p:nvPr/>
+        </p:nvSpPr>
+        <p:spPr>
+          <a:xfrm>
+            <a:off x="4597400" y="4857750"/>
+            <a:ext cx="2997200" cy="171450"/>
+          </a:xfrm>
+          <a:prstGeom prst="rect">
+            <a:avLst/>
+          </a:prstGeom>
+          <a:noFill/>
+          <a:ln/>
+        </p:spPr>
+        <p:txBody>
+          <a:bodyPr wrap="square" lIns="0" tIns="0" rIns="0" bIns="0" rtlCol="0" anchor="t"/>
+          <a:lstStyle/>
+          <a:p>
+            <a:pPr indent="0" marL="0">
+              <a:buNone/>
+            </a:pPr>
+            <a:r>
+              <a:rPr lang="en-US" sz="1200" dirty="0">
+                <a:solidFill>
+                  <a:srgbClr val="636366"/>
+                </a:solidFill>
+                <a:latin typeface="Noto Sans KR" pitchFamily="34" charset="0"/>
+                <a:ea typeface="Noto Sans KR" pitchFamily="34" charset="-122"/>
+                <a:cs typeface="Noto Sans KR" pitchFamily="34" charset="-120"/>
+              </a:rPr>
+              <a:t>행정 소요시간</a:t>
+            </a:r>
+            <a:endParaRPr lang="en-US" sz="1200" dirty="0"/>
+          </a:p>
+        </p:txBody>
+      </p:sp>
+      <p:sp>
+        <p:nvSpPr>
+          <p:cNvPr id="47" name="o290"/>
+          <p:cNvSpPr txBox="1"/>
+          <p:nvPr/>
+        </p:nvSpPr>
+        <p:spPr>
+          <a:xfrm>
+            <a:off x="4597400" y="5105400"/>
+            <a:ext cx="2997200" cy="419100"/>
+          </a:xfrm>
+          <a:prstGeom prst="rect">
+            <a:avLst/>
+          </a:prstGeom>
+          <a:noFill/>
+          <a:ln/>
+        </p:spPr>
+        <p:txBody>
+          <a:bodyPr wrap="square" lIns="0" tIns="0" rIns="0" bIns="0" rtlCol="0" anchor="t"/>
+          <a:lstStyle/>
+          <a:p>
+            <a:pPr indent="0" marL="0">
+              <a:buNone/>
+            </a:pPr>
+            <a:r>
+              <a:rPr lang="en-US" sz="3000" b="1" dirty="0">
                 <a:solidFill>
                   <a:srgbClr val="1D1D1F"/>
-                </a:solidFill>
-                <a:latin typeface="Noto Sans KR" pitchFamily="34" charset="0"/>
-                <a:ea typeface="Noto Sans KR" pitchFamily="34" charset="-122"/>
-                <a:cs typeface="Noto Sans KR" pitchFamily="34" charset="-120"/>
-              </a:rPr>
-              <a:t>직접 제출 (이동)</a:t>
-            </a:r>
-            <a:endParaRPr lang="en-US" sz="1300" dirty="0"/>
-          </a:p>
-        </p:txBody>
-      </p:sp>
-      <p:sp>
-        <p:nvSpPr>
-          <p:cNvPr id="34" name="o290"/>
-          <p:cNvSpPr txBox="1"/>
-          <p:nvPr/>
-        </p:nvSpPr>
-        <p:spPr>
-          <a:xfrm>
-            <a:off x="6856873" y="5505450"/>
-            <a:ext cx="2073294" cy="171450"/>
-          </a:xfrm>
-          <a:prstGeom prst="rect">
-            <a:avLst/>
-          </a:prstGeom>
-          <a:noFill/>
-          <a:ln/>
-        </p:spPr>
-        <p:txBody>
-          <a:bodyPr wrap="square" lIns="0" tIns="0" rIns="0" bIns="0" rtlCol="0" anchor="t"/>
-          <a:lstStyle/>
-          <a:p>
-            <a:pPr indent="0" marL="0">
-              <a:buNone/>
-            </a:pPr>
-            <a:r>
-              <a:rPr lang="en-US" sz="1200" dirty="0">
-                <a:solidFill>
-                  <a:srgbClr val="636366"/>
                 </a:solidFill>
                 <a:latin typeface="Inter" pitchFamily="34" charset="0"/>
                 <a:ea typeface="Inter" pitchFamily="34" charset="-122"/>
                 <a:cs typeface="Inter" pitchFamily="34" charset="-120"/>
               </a:rPr>
-              <a:t>7분 00초</a:t>
+              <a:t>Time Study</a:t>
+            </a:r>
+            <a:endParaRPr lang="en-US" sz="3000" dirty="0"/>
+          </a:p>
+        </p:txBody>
+      </p:sp>
+      <p:sp>
+        <p:nvSpPr>
+          <p:cNvPr id="48" name="o291"/>
+          <p:cNvSpPr txBox="1"/>
+          <p:nvPr/>
+        </p:nvSpPr>
+        <p:spPr>
+          <a:xfrm>
+            <a:off x="4597400" y="5676900"/>
+            <a:ext cx="2997200" cy="381000"/>
+          </a:xfrm>
+          <a:prstGeom prst="rect">
+            <a:avLst/>
+          </a:prstGeom>
+          <a:noFill/>
+          <a:ln/>
+        </p:spPr>
+        <p:txBody>
+          <a:bodyPr wrap="square" lIns="0" tIns="0" rIns="0" bIns="0" rtlCol="0" anchor="t"/>
+          <a:lstStyle/>
+          <a:p>
+            <a:pPr indent="0" marL="0">
+              <a:lnSpc>
+                <a:spcPct val="135000"/>
+              </a:lnSpc>
+              <a:buNone/>
+            </a:pPr>
+            <a:r>
+              <a:rPr lang="en-US" sz="1200" dirty="0">
+                <a:solidFill>
+                  <a:srgbClr val="636366"/>
+                </a:solidFill>
+                <a:latin typeface="Noto Sans KR" pitchFamily="34" charset="0"/>
+                <a:ea typeface="Noto Sans KR" pitchFamily="34" charset="-122"/>
+                <a:cs typeface="Noto Sans KR" pitchFamily="34" charset="-120"/>
+              </a:rPr>
+              <a:t>세부 행동 단위별 직접 관찰 실측 (전 2025.01 · 후 2026.07)</a:t>
             </a:r>
             <a:endParaRPr lang="en-US" sz="1200" dirty="0"/>
           </a:p>
@@ -11984,126 +12021,129 @@
       </p:sp>
       <p:sp>
         <p:nvSpPr>
-          <p:cNvPr id="35" name="o291"/>
+          <p:cNvPr id="49" name="o292"/>
           <p:cNvSpPr/>
           <p:nvPr/>
         </p:nvSpPr>
         <p:spPr>
           <a:xfrm>
-            <a:off x="8987317" y="4533900"/>
-            <a:ext cx="2252183" cy="609600"/>
+            <a:off x="8051800" y="4648200"/>
+            <a:ext cx="3530600" cy="1600200"/>
           </a:xfrm>
           <a:prstGeom prst="roundRect">
             <a:avLst>
-              <a:gd name="adj" fmla="val 15625"/>
+              <a:gd name="adj" fmla="val 11905"/>
             </a:avLst>
           </a:prstGeom>
           <a:solidFill>
-            <a:srgbClr val="C9D3E3"/>
+            <a:srgbClr val="F5F5F7"/>
           </a:solidFill>
           <a:ln/>
         </p:spPr>
       </p:sp>
       <p:sp>
         <p:nvSpPr>
-          <p:cNvPr id="36" name="o292"/>
-          <p:cNvSpPr txBox="1"/>
-          <p:nvPr/>
-        </p:nvSpPr>
-        <p:spPr>
-          <a:xfrm>
-            <a:off x="9158767" y="4533900"/>
-            <a:ext cx="1966433" cy="609600"/>
-          </a:xfrm>
-          <a:prstGeom prst="rect">
-            <a:avLst/>
-          </a:prstGeom>
-          <a:noFill/>
-          <a:ln/>
-        </p:spPr>
-        <p:txBody>
-          <a:bodyPr wrap="square" lIns="0" tIns="0" rIns="0" bIns="0" rtlCol="0" anchor="ctr"/>
-          <a:lstStyle/>
-          <a:p>
-            <a:pPr indent="0" marL="0">
-              <a:buNone/>
-            </a:pPr>
-            <a:r>
-              <a:rPr lang="en-US" sz="2200" b="1" dirty="0">
-                <a:solidFill>
-                  <a:srgbClr val="0A1F44"/>
+          <p:cNvPr id="50" name="o293"/>
+          <p:cNvSpPr txBox="1"/>
+          <p:nvPr/>
+        </p:nvSpPr>
+        <p:spPr>
+          <a:xfrm>
+            <a:off x="8318500" y="4857750"/>
+            <a:ext cx="2997200" cy="171450"/>
+          </a:xfrm>
+          <a:prstGeom prst="rect">
+            <a:avLst/>
+          </a:prstGeom>
+          <a:noFill/>
+          <a:ln/>
+        </p:spPr>
+        <p:txBody>
+          <a:bodyPr wrap="square" lIns="0" tIns="0" rIns="0" bIns="0" rtlCol="0" anchor="t"/>
+          <a:lstStyle/>
+          <a:p>
+            <a:pPr indent="0" marL="0">
+              <a:buNone/>
+            </a:pPr>
+            <a:r>
+              <a:rPr lang="en-US" sz="1200" dirty="0">
+                <a:solidFill>
+                  <a:srgbClr val="636366"/>
+                </a:solidFill>
+                <a:latin typeface="Noto Sans KR" pitchFamily="34" charset="0"/>
+                <a:ea typeface="Noto Sans KR" pitchFamily="34" charset="-122"/>
+                <a:cs typeface="Noto Sans KR" pitchFamily="34" charset="-120"/>
+              </a:rPr>
+              <a:t>개선 후 측정</a:t>
+            </a:r>
+            <a:endParaRPr lang="en-US" sz="1200" dirty="0"/>
+          </a:p>
+        </p:txBody>
+      </p:sp>
+      <p:sp>
+        <p:nvSpPr>
+          <p:cNvPr id="51" name="o294"/>
+          <p:cNvSpPr txBox="1"/>
+          <p:nvPr/>
+        </p:nvSpPr>
+        <p:spPr>
+          <a:xfrm>
+            <a:off x="8318500" y="5105400"/>
+            <a:ext cx="2997200" cy="419100"/>
+          </a:xfrm>
+          <a:prstGeom prst="rect">
+            <a:avLst/>
+          </a:prstGeom>
+          <a:noFill/>
+          <a:ln/>
+        </p:spPr>
+        <p:txBody>
+          <a:bodyPr wrap="square" lIns="0" tIns="0" rIns="0" bIns="0" rtlCol="0" anchor="t"/>
+          <a:lstStyle/>
+          <a:p>
+            <a:pPr indent="0" marL="0">
+              <a:buNone/>
+            </a:pPr>
+            <a:r>
+              <a:rPr lang="en-US" sz="3000" b="1" dirty="0">
+                <a:solidFill>
+                  <a:srgbClr val="1D1D1F"/>
                 </a:solidFill>
                 <a:latin typeface="Inter" pitchFamily="34" charset="0"/>
                 <a:ea typeface="Inter" pitchFamily="34" charset="-122"/>
                 <a:cs typeface="Inter" pitchFamily="34" charset="-120"/>
               </a:rPr>
-              <a:t>22%</a:t>
-            </a:r>
-            <a:endParaRPr lang="en-US" sz="2200" dirty="0"/>
-          </a:p>
-        </p:txBody>
-      </p:sp>
-      <p:sp>
-        <p:nvSpPr>
-          <p:cNvPr id="37" name="o293"/>
-          <p:cNvSpPr txBox="1"/>
-          <p:nvPr/>
-        </p:nvSpPr>
-        <p:spPr>
-          <a:xfrm>
-            <a:off x="8987317" y="5276850"/>
-            <a:ext cx="2252183" cy="190500"/>
-          </a:xfrm>
-          <a:prstGeom prst="rect">
-            <a:avLst/>
-          </a:prstGeom>
-          <a:noFill/>
-          <a:ln/>
-        </p:spPr>
-        <p:txBody>
-          <a:bodyPr wrap="square" lIns="0" tIns="0" rIns="0" bIns="0" rtlCol="0" anchor="t"/>
-          <a:lstStyle/>
-          <a:p>
-            <a:pPr indent="0" marL="0">
-              <a:buNone/>
-            </a:pPr>
-            <a:r>
-              <a:rPr lang="en-US" sz="1300" b="1" dirty="0">
-                <a:solidFill>
-                  <a:srgbClr val="1D1D1F"/>
-                </a:solidFill>
-                <a:latin typeface="Noto Sans KR" pitchFamily="34" charset="0"/>
-                <a:ea typeface="Noto Sans KR" pitchFamily="34" charset="-122"/>
-                <a:cs typeface="Noto Sans KR" pitchFamily="34" charset="-120"/>
-              </a:rPr>
-              <a:t>작성 · 출력 · 서명 등</a:t>
-            </a:r>
-            <a:endParaRPr lang="en-US" sz="1300" dirty="0"/>
-          </a:p>
-        </p:txBody>
-      </p:sp>
-      <p:sp>
-        <p:nvSpPr>
-          <p:cNvPr id="38" name="o294"/>
-          <p:cNvSpPr txBox="1"/>
-          <p:nvPr/>
-        </p:nvSpPr>
-        <p:spPr>
-          <a:xfrm>
-            <a:off x="8987317" y="5505450"/>
-            <a:ext cx="2252183" cy="171450"/>
-          </a:xfrm>
-          <a:prstGeom prst="rect">
-            <a:avLst/>
-          </a:prstGeom>
-          <a:noFill/>
-          <a:ln/>
-        </p:spPr>
-        <p:txBody>
-          <a:bodyPr wrap="square" lIns="0" tIns="0" rIns="0" bIns="0" rtlCol="0" anchor="t"/>
-          <a:lstStyle/>
-          <a:p>
-            <a:pPr indent="0" marL="0">
+              <a:t>2026.05–07</a:t>
+            </a:r>
+            <a:endParaRPr lang="en-US" sz="3000" dirty="0"/>
+          </a:p>
+        </p:txBody>
+      </p:sp>
+      <p:sp>
+        <p:nvSpPr>
+          <p:cNvPr id="52" name="o295"/>
+          <p:cNvSpPr txBox="1"/>
+          <p:nvPr/>
+        </p:nvSpPr>
+        <p:spPr>
+          <a:xfrm>
+            <a:off x="8318500" y="5676900"/>
+            <a:ext cx="2997200" cy="381000"/>
+          </a:xfrm>
+          <a:prstGeom prst="rect">
+            <a:avLst/>
+          </a:prstGeom>
+          <a:noFill/>
+          <a:ln/>
+        </p:spPr>
+        <p:txBody>
+          <a:bodyPr wrap="square" lIns="0" tIns="0" rIns="0" bIns="0" rtlCol="0" anchor="t"/>
+          <a:lstStyle/>
+          <a:p>
+            <a:pPr indent="0" marL="0">
+              <a:lnSpc>
+                <a:spcPct val="135000"/>
+              </a:lnSpc>
               <a:buNone/>
             </a:pPr>
             <a:r>
@@ -12111,50 +12151,11 @@
                 <a:solidFill>
                   <a:srgbClr val="636366"/>
                 </a:solidFill>
-                <a:latin typeface="Inter" pitchFamily="34" charset="0"/>
-                <a:ea typeface="Inter" pitchFamily="34" charset="-122"/>
-                <a:cs typeface="Inter" pitchFamily="34" charset="-120"/>
-              </a:rPr>
-              <a:t>7분 24초</a:t>
-            </a:r>
-            <a:endParaRPr lang="en-US" sz="1200" dirty="0"/>
-          </a:p>
-        </p:txBody>
-      </p:sp>
-      <p:sp>
-        <p:nvSpPr>
-          <p:cNvPr id="39" name="o295"/>
-          <p:cNvSpPr txBox="1"/>
-          <p:nvPr/>
-        </p:nvSpPr>
-        <p:spPr>
-          <a:xfrm>
-            <a:off x="952500" y="5886450"/>
-            <a:ext cx="10287000" cy="190500"/>
-          </a:xfrm>
-          <a:prstGeom prst="rect">
-            <a:avLst/>
-          </a:prstGeom>
-          <a:noFill/>
-          <a:ln/>
-        </p:spPr>
-        <p:txBody>
-          <a:bodyPr wrap="square" lIns="0" tIns="0" rIns="0" bIns="0" rtlCol="0" anchor="t"/>
-          <a:lstStyle/>
-          <a:p>
-            <a:pPr indent="0" marL="0">
-              <a:buNone/>
-            </a:pPr>
-            <a:r>
-              <a:rPr lang="en-US" sz="1200" dirty="0">
-                <a:solidFill>
-                  <a:srgbClr val="636366"/>
-                </a:solidFill>
-                <a:latin typeface="Noto Sans KR" pitchFamily="34" charset="0"/>
-                <a:ea typeface="Noto Sans KR" pitchFamily="34" charset="-122"/>
-                <a:cs typeface="Noto Sans KR" pitchFamily="34" charset="-120"/>
-              </a:rPr>
-              <a:t>지표: 행정 소요시간 70% 이상 단축 — 기다림과 이동만 없애도 78%</a:t>
+                <a:latin typeface="Noto Sans KR" pitchFamily="34" charset="0"/>
+                <a:ea typeface="Noto Sans KR" pitchFamily="34" charset="-122"/>
+                <a:cs typeface="Noto Sans KR" pitchFamily="34" charset="-120"/>
+              </a:rPr>
+              <a:t>플랫폼 DB 자동 집계 — 교육 33건 · 업무 52건</a:t>
             </a:r>
             <a:endParaRPr lang="en-US" sz="1200" dirty="0"/>
           </a:p>
